--- a/exports/ppt_design_preview.pptx
+++ b/exports/ppt_design_preview.pptx
@@ -3355,7 +3355,7 @@
                 <a:ea typeface="Noto Sans KR"/>
                 <a:cs typeface="Noto Sans KR"/>
               </a:rPr>
-              <a:t>산출시각: 2026-06-25 12:44</a:t>
+              <a:t>산출시각: 2026-06-25 13:22</a:t>
             </a:r>
           </a:p>
         </p:txBody>
@@ -5575,8 +5575,8 @@
         </p:nvSpPr>
         <p:spPr>
           <a:xfrm>
-            <a:off x="8275320" y="3090672"/>
-            <a:ext cx="3520440" cy="201168"/>
+            <a:off x="8183879" y="3090672"/>
+            <a:ext cx="3611880" cy="201168"/>
           </a:xfrm>
           <a:prstGeom prst="rect">
             <a:avLst/>
@@ -5709,30 +5709,30 @@
         </p:nvSpPr>
         <p:spPr>
           <a:xfrm>
-            <a:off x="521208" y="3346704"/>
-            <a:ext cx="438912" cy="274320"/>
-          </a:xfrm>
-          <a:prstGeom prst="rect">
-            <a:avLst/>
-          </a:prstGeom>
-          <a:noFill/>
-        </p:spPr>
-        <p:txBody>
-          <a:bodyPr wrap="square" lIns="0" rIns="0" tIns="0" bIns="0" anchor="ctr">
-            <a:spAutoFit/>
-          </a:bodyPr>
-          <a:lstStyle/>
-          <a:p>
-            <a:pPr algn="r">
-              <a:spcBef>
-                <a:spcPts val="0"/>
-              </a:spcBef>
-              <a:spcAft>
-                <a:spcPts val="0"/>
-              </a:spcAft>
-            </a:pPr>
-            <a:r>
-              <a:rPr sz="710" b="1">
+            <a:off x="557784" y="3346704"/>
+            <a:ext cx="530352" cy="274320"/>
+          </a:xfrm>
+          <a:prstGeom prst="rect">
+            <a:avLst/>
+          </a:prstGeom>
+          <a:noFill/>
+        </p:spPr>
+        <p:txBody>
+          <a:bodyPr wrap="square" lIns="0" rIns="0" tIns="0" bIns="0" anchor="ctr">
+            <a:spAutoFit/>
+          </a:bodyPr>
+          <a:lstStyle/>
+          <a:p>
+            <a:pPr algn="ctr">
+              <a:spcBef>
+                <a:spcPts val="0"/>
+              </a:spcBef>
+              <a:spcAft>
+                <a:spcPts val="0"/>
+              </a:spcAft>
+            </a:pPr>
+            <a:r>
+              <a:rPr sz="819" b="1">
                 <a:solidFill>
                   <a:srgbClr val="FFFFFF"/>
                 </a:solidFill>
@@ -5753,8 +5753,8 @@
         </p:nvSpPr>
         <p:spPr>
           <a:xfrm>
-            <a:off x="960120" y="3346704"/>
-            <a:ext cx="3035808" cy="274320"/>
+            <a:off x="1088136" y="3346704"/>
+            <a:ext cx="2907792" cy="274320"/>
           </a:xfrm>
           <a:prstGeom prst="rect">
             <a:avLst/>
@@ -5776,7 +5776,7 @@
               </a:spcAft>
             </a:pPr>
             <a:r>
-              <a:rPr sz="710" b="1">
+              <a:rPr sz="819" b="1">
                 <a:solidFill>
                   <a:srgbClr val="FFFFFF"/>
                 </a:solidFill>
@@ -5820,7 +5820,7 @@
               </a:spcAft>
             </a:pPr>
             <a:r>
-              <a:rPr sz="710" b="1">
+              <a:rPr sz="819" b="1">
                 <a:solidFill>
                   <a:srgbClr val="FFFFFF"/>
                 </a:solidFill>
@@ -5864,7 +5864,7 @@
               </a:spcAft>
             </a:pPr>
             <a:r>
-              <a:rPr sz="710" b="1">
+              <a:rPr sz="819" b="1">
                 <a:solidFill>
                   <a:srgbClr val="FFFFFF"/>
                 </a:solidFill>
@@ -5908,7 +5908,7 @@
               </a:spcAft>
             </a:pPr>
             <a:r>
-              <a:rPr sz="710" b="1">
+              <a:rPr sz="819" b="1">
                 <a:solidFill>
                   <a:srgbClr val="FFFFFF"/>
                 </a:solidFill>
@@ -5952,7 +5952,7 @@
               </a:spcAft>
             </a:pPr>
             <a:r>
-              <a:rPr sz="710" b="1">
+              <a:rPr sz="819" b="1">
                 <a:solidFill>
                   <a:srgbClr val="FFFFFF"/>
                 </a:solidFill>
@@ -5973,30 +5973,30 @@
         </p:nvSpPr>
         <p:spPr>
           <a:xfrm>
-            <a:off x="521208" y="3666744"/>
-            <a:ext cx="438912" cy="420623"/>
-          </a:xfrm>
-          <a:prstGeom prst="rect">
-            <a:avLst/>
-          </a:prstGeom>
-          <a:noFill/>
-        </p:spPr>
-        <p:txBody>
-          <a:bodyPr wrap="square" lIns="0" rIns="0" tIns="0" bIns="0" anchor="ctr">
-            <a:spAutoFit/>
-          </a:bodyPr>
-          <a:lstStyle/>
-          <a:p>
-            <a:pPr algn="r">
-              <a:spcBef>
-                <a:spcPts val="0"/>
-              </a:spcBef>
-              <a:spcAft>
-                <a:spcPts val="0"/>
-              </a:spcAft>
-            </a:pPr>
-            <a:r>
-              <a:rPr sz="760" b="0">
+            <a:off x="557784" y="3666744"/>
+            <a:ext cx="530352" cy="420623"/>
+          </a:xfrm>
+          <a:prstGeom prst="rect">
+            <a:avLst/>
+          </a:prstGeom>
+          <a:noFill/>
+        </p:spPr>
+        <p:txBody>
+          <a:bodyPr wrap="square" lIns="0" rIns="0" tIns="0" bIns="0" anchor="ctr">
+            <a:spAutoFit/>
+          </a:bodyPr>
+          <a:lstStyle/>
+          <a:p>
+            <a:pPr algn="ctr">
+              <a:spcBef>
+                <a:spcPts val="0"/>
+              </a:spcBef>
+              <a:spcAft>
+                <a:spcPts val="0"/>
+              </a:spcAft>
+            </a:pPr>
+            <a:r>
+              <a:rPr sz="860" b="0">
                 <a:solidFill>
                   <a:srgbClr val="6B7280"/>
                 </a:solidFill>
@@ -6017,8 +6017,8 @@
         </p:nvSpPr>
         <p:spPr>
           <a:xfrm>
-            <a:off x="960120" y="3666744"/>
-            <a:ext cx="3035808" cy="420623"/>
+            <a:off x="1088136" y="3666744"/>
+            <a:ext cx="2907792" cy="420623"/>
           </a:xfrm>
           <a:prstGeom prst="rect">
             <a:avLst/>
@@ -6040,7 +6040,7 @@
               </a:spcAft>
             </a:pPr>
             <a:r>
-              <a:rPr sz="780" b="0">
+              <a:rPr sz="880" b="0">
                 <a:solidFill>
                   <a:srgbClr val="121A2A"/>
                 </a:solidFill>
@@ -6084,7 +6084,7 @@
               </a:spcAft>
             </a:pPr>
             <a:r>
-              <a:rPr sz="760" b="0">
+              <a:rPr sz="860" b="0">
                 <a:solidFill>
                   <a:srgbClr val="121A2A"/>
                 </a:solidFill>
@@ -6128,7 +6128,7 @@
               </a:spcAft>
             </a:pPr>
             <a:r>
-              <a:rPr sz="760" b="0">
+              <a:rPr sz="860" b="0">
                 <a:solidFill>
                   <a:srgbClr val="121A2A"/>
                 </a:solidFill>
@@ -6172,7 +6172,7 @@
               </a:spcAft>
             </a:pPr>
             <a:r>
-              <a:rPr sz="760" b="1">
+              <a:rPr sz="860" b="1">
                 <a:solidFill>
                   <a:srgbClr val="D85A30"/>
                 </a:solidFill>
@@ -6216,7 +6216,7 @@
               </a:spcAft>
             </a:pPr>
             <a:r>
-              <a:rPr sz="760" b="0">
+              <a:rPr sz="860" b="0">
                 <a:solidFill>
                   <a:srgbClr val="121A2A"/>
                 </a:solidFill>
@@ -6323,30 +6323,30 @@
         </p:nvSpPr>
         <p:spPr>
           <a:xfrm>
-            <a:off x="521208" y="4105656"/>
-            <a:ext cx="438912" cy="420623"/>
-          </a:xfrm>
-          <a:prstGeom prst="rect">
-            <a:avLst/>
-          </a:prstGeom>
-          <a:noFill/>
-        </p:spPr>
-        <p:txBody>
-          <a:bodyPr wrap="square" lIns="0" rIns="0" tIns="0" bIns="0" anchor="ctr">
-            <a:spAutoFit/>
-          </a:bodyPr>
-          <a:lstStyle/>
-          <a:p>
-            <a:pPr algn="r">
-              <a:spcBef>
-                <a:spcPts val="0"/>
-              </a:spcBef>
-              <a:spcAft>
-                <a:spcPts val="0"/>
-              </a:spcAft>
-            </a:pPr>
-            <a:r>
-              <a:rPr sz="760" b="0">
+            <a:off x="557784" y="4105656"/>
+            <a:ext cx="530352" cy="420623"/>
+          </a:xfrm>
+          <a:prstGeom prst="rect">
+            <a:avLst/>
+          </a:prstGeom>
+          <a:noFill/>
+        </p:spPr>
+        <p:txBody>
+          <a:bodyPr wrap="square" lIns="0" rIns="0" tIns="0" bIns="0" anchor="ctr">
+            <a:spAutoFit/>
+          </a:bodyPr>
+          <a:lstStyle/>
+          <a:p>
+            <a:pPr algn="ctr">
+              <a:spcBef>
+                <a:spcPts val="0"/>
+              </a:spcBef>
+              <a:spcAft>
+                <a:spcPts val="0"/>
+              </a:spcAft>
+            </a:pPr>
+            <a:r>
+              <a:rPr sz="860" b="0">
                 <a:solidFill>
                   <a:srgbClr val="6B7280"/>
                 </a:solidFill>
@@ -6367,8 +6367,8 @@
         </p:nvSpPr>
         <p:spPr>
           <a:xfrm>
-            <a:off x="960120" y="4105656"/>
-            <a:ext cx="3035808" cy="420623"/>
+            <a:off x="1088136" y="4105656"/>
+            <a:ext cx="2907792" cy="420623"/>
           </a:xfrm>
           <a:prstGeom prst="rect">
             <a:avLst/>
@@ -6390,7 +6390,7 @@
               </a:spcAft>
             </a:pPr>
             <a:r>
-              <a:rPr sz="780" b="0">
+              <a:rPr sz="880" b="0">
                 <a:solidFill>
                   <a:srgbClr val="121A2A"/>
                 </a:solidFill>
@@ -6434,7 +6434,7 @@
               </a:spcAft>
             </a:pPr>
             <a:r>
-              <a:rPr sz="760" b="0">
+              <a:rPr sz="860" b="0">
                 <a:solidFill>
                   <a:srgbClr val="121A2A"/>
                 </a:solidFill>
@@ -6478,7 +6478,7 @@
               </a:spcAft>
             </a:pPr>
             <a:r>
-              <a:rPr sz="760" b="0">
+              <a:rPr sz="860" b="0">
                 <a:solidFill>
                   <a:srgbClr val="121A2A"/>
                 </a:solidFill>
@@ -6522,7 +6522,7 @@
               </a:spcAft>
             </a:pPr>
             <a:r>
-              <a:rPr sz="760" b="1">
+              <a:rPr sz="860" b="1">
                 <a:solidFill>
                   <a:srgbClr val="D85A30"/>
                 </a:solidFill>
@@ -6566,7 +6566,7 @@
               </a:spcAft>
             </a:pPr>
             <a:r>
-              <a:rPr sz="760" b="0">
+              <a:rPr sz="860" b="0">
                 <a:solidFill>
                   <a:srgbClr val="121A2A"/>
                 </a:solidFill>
@@ -6630,30 +6630,30 @@
         </p:nvSpPr>
         <p:spPr>
           <a:xfrm>
-            <a:off x="521208" y="4544568"/>
-            <a:ext cx="438912" cy="420623"/>
-          </a:xfrm>
-          <a:prstGeom prst="rect">
-            <a:avLst/>
-          </a:prstGeom>
-          <a:noFill/>
-        </p:spPr>
-        <p:txBody>
-          <a:bodyPr wrap="square" lIns="0" rIns="0" tIns="0" bIns="0" anchor="ctr">
-            <a:spAutoFit/>
-          </a:bodyPr>
-          <a:lstStyle/>
-          <a:p>
-            <a:pPr algn="r">
-              <a:spcBef>
-                <a:spcPts val="0"/>
-              </a:spcBef>
-              <a:spcAft>
-                <a:spcPts val="0"/>
-              </a:spcAft>
-            </a:pPr>
-            <a:r>
-              <a:rPr sz="760" b="0">
+            <a:off x="557784" y="4544568"/>
+            <a:ext cx="530352" cy="420623"/>
+          </a:xfrm>
+          <a:prstGeom prst="rect">
+            <a:avLst/>
+          </a:prstGeom>
+          <a:noFill/>
+        </p:spPr>
+        <p:txBody>
+          <a:bodyPr wrap="square" lIns="0" rIns="0" tIns="0" bIns="0" anchor="ctr">
+            <a:spAutoFit/>
+          </a:bodyPr>
+          <a:lstStyle/>
+          <a:p>
+            <a:pPr algn="ctr">
+              <a:spcBef>
+                <a:spcPts val="0"/>
+              </a:spcBef>
+              <a:spcAft>
+                <a:spcPts val="0"/>
+              </a:spcAft>
+            </a:pPr>
+            <a:r>
+              <a:rPr sz="860" b="0">
                 <a:solidFill>
                   <a:srgbClr val="6B7280"/>
                 </a:solidFill>
@@ -6674,8 +6674,8 @@
         </p:nvSpPr>
         <p:spPr>
           <a:xfrm>
-            <a:off x="960120" y="4544568"/>
-            <a:ext cx="3035808" cy="420623"/>
+            <a:off x="1088136" y="4544568"/>
+            <a:ext cx="2907792" cy="420623"/>
           </a:xfrm>
           <a:prstGeom prst="rect">
             <a:avLst/>
@@ -6697,7 +6697,7 @@
               </a:spcAft>
             </a:pPr>
             <a:r>
-              <a:rPr sz="780" b="0">
+              <a:rPr sz="880" b="0">
                 <a:solidFill>
                   <a:srgbClr val="121A2A"/>
                 </a:solidFill>
@@ -6741,7 +6741,7 @@
               </a:spcAft>
             </a:pPr>
             <a:r>
-              <a:rPr sz="760" b="0">
+              <a:rPr sz="860" b="0">
                 <a:solidFill>
                   <a:srgbClr val="121A2A"/>
                 </a:solidFill>
@@ -6785,7 +6785,7 @@
               </a:spcAft>
             </a:pPr>
             <a:r>
-              <a:rPr sz="760" b="0">
+              <a:rPr sz="860" b="0">
                 <a:solidFill>
                   <a:srgbClr val="121A2A"/>
                 </a:solidFill>
@@ -6829,7 +6829,7 @@
               </a:spcAft>
             </a:pPr>
             <a:r>
-              <a:rPr sz="760" b="1">
+              <a:rPr sz="860" b="1">
                 <a:solidFill>
                   <a:srgbClr val="D85A30"/>
                 </a:solidFill>
@@ -6873,7 +6873,7 @@
               </a:spcAft>
             </a:pPr>
             <a:r>
-              <a:rPr sz="760" b="0">
+              <a:rPr sz="860" b="0">
                 <a:solidFill>
                   <a:srgbClr val="121A2A"/>
                 </a:solidFill>
@@ -6980,30 +6980,30 @@
         </p:nvSpPr>
         <p:spPr>
           <a:xfrm>
-            <a:off x="521208" y="4983479"/>
-            <a:ext cx="438912" cy="420623"/>
-          </a:xfrm>
-          <a:prstGeom prst="rect">
-            <a:avLst/>
-          </a:prstGeom>
-          <a:noFill/>
-        </p:spPr>
-        <p:txBody>
-          <a:bodyPr wrap="square" lIns="0" rIns="0" tIns="0" bIns="0" anchor="ctr">
-            <a:spAutoFit/>
-          </a:bodyPr>
-          <a:lstStyle/>
-          <a:p>
-            <a:pPr algn="r">
-              <a:spcBef>
-                <a:spcPts val="0"/>
-              </a:spcBef>
-              <a:spcAft>
-                <a:spcPts val="0"/>
-              </a:spcAft>
-            </a:pPr>
-            <a:r>
-              <a:rPr sz="760" b="0">
+            <a:off x="557784" y="4983479"/>
+            <a:ext cx="530352" cy="420623"/>
+          </a:xfrm>
+          <a:prstGeom prst="rect">
+            <a:avLst/>
+          </a:prstGeom>
+          <a:noFill/>
+        </p:spPr>
+        <p:txBody>
+          <a:bodyPr wrap="square" lIns="0" rIns="0" tIns="0" bIns="0" anchor="ctr">
+            <a:spAutoFit/>
+          </a:bodyPr>
+          <a:lstStyle/>
+          <a:p>
+            <a:pPr algn="ctr">
+              <a:spcBef>
+                <a:spcPts val="0"/>
+              </a:spcBef>
+              <a:spcAft>
+                <a:spcPts val="0"/>
+              </a:spcAft>
+            </a:pPr>
+            <a:r>
+              <a:rPr sz="860" b="0">
                 <a:solidFill>
                   <a:srgbClr val="6B7280"/>
                 </a:solidFill>
@@ -7024,8 +7024,8 @@
         </p:nvSpPr>
         <p:spPr>
           <a:xfrm>
-            <a:off x="960120" y="4983479"/>
-            <a:ext cx="3035808" cy="420623"/>
+            <a:off x="1088136" y="4983479"/>
+            <a:ext cx="2907792" cy="420623"/>
           </a:xfrm>
           <a:prstGeom prst="rect">
             <a:avLst/>
@@ -7047,7 +7047,7 @@
               </a:spcAft>
             </a:pPr>
             <a:r>
-              <a:rPr sz="780" b="0">
+              <a:rPr sz="880" b="0">
                 <a:solidFill>
                   <a:srgbClr val="121A2A"/>
                 </a:solidFill>
@@ -7091,7 +7091,7 @@
               </a:spcAft>
             </a:pPr>
             <a:r>
-              <a:rPr sz="760" b="0">
+              <a:rPr sz="860" b="0">
                 <a:solidFill>
                   <a:srgbClr val="121A2A"/>
                 </a:solidFill>
@@ -7135,7 +7135,7 @@
               </a:spcAft>
             </a:pPr>
             <a:r>
-              <a:rPr sz="760" b="0">
+              <a:rPr sz="860" b="0">
                 <a:solidFill>
                   <a:srgbClr val="121A2A"/>
                 </a:solidFill>
@@ -7179,7 +7179,7 @@
               </a:spcAft>
             </a:pPr>
             <a:r>
-              <a:rPr sz="760" b="1">
+              <a:rPr sz="860" b="1">
                 <a:solidFill>
                   <a:srgbClr val="D85A30"/>
                 </a:solidFill>
@@ -7223,7 +7223,7 @@
               </a:spcAft>
             </a:pPr>
             <a:r>
-              <a:rPr sz="760" b="0">
+              <a:rPr sz="860" b="0">
                 <a:solidFill>
                   <a:srgbClr val="121A2A"/>
                 </a:solidFill>
@@ -7287,30 +7287,30 @@
         </p:nvSpPr>
         <p:spPr>
           <a:xfrm>
-            <a:off x="521208" y="5422392"/>
-            <a:ext cx="438912" cy="420623"/>
-          </a:xfrm>
-          <a:prstGeom prst="rect">
-            <a:avLst/>
-          </a:prstGeom>
-          <a:noFill/>
-        </p:spPr>
-        <p:txBody>
-          <a:bodyPr wrap="square" lIns="0" rIns="0" tIns="0" bIns="0" anchor="ctr">
-            <a:spAutoFit/>
-          </a:bodyPr>
-          <a:lstStyle/>
-          <a:p>
-            <a:pPr algn="r">
-              <a:spcBef>
-                <a:spcPts val="0"/>
-              </a:spcBef>
-              <a:spcAft>
-                <a:spcPts val="0"/>
-              </a:spcAft>
-            </a:pPr>
-            <a:r>
-              <a:rPr sz="760" b="0">
+            <a:off x="557784" y="5422392"/>
+            <a:ext cx="530352" cy="420623"/>
+          </a:xfrm>
+          <a:prstGeom prst="rect">
+            <a:avLst/>
+          </a:prstGeom>
+          <a:noFill/>
+        </p:spPr>
+        <p:txBody>
+          <a:bodyPr wrap="square" lIns="0" rIns="0" tIns="0" bIns="0" anchor="ctr">
+            <a:spAutoFit/>
+          </a:bodyPr>
+          <a:lstStyle/>
+          <a:p>
+            <a:pPr algn="ctr">
+              <a:spcBef>
+                <a:spcPts val="0"/>
+              </a:spcBef>
+              <a:spcAft>
+                <a:spcPts val="0"/>
+              </a:spcAft>
+            </a:pPr>
+            <a:r>
+              <a:rPr sz="860" b="0">
                 <a:solidFill>
                   <a:srgbClr val="6B7280"/>
                 </a:solidFill>
@@ -7331,8 +7331,8 @@
         </p:nvSpPr>
         <p:spPr>
           <a:xfrm>
-            <a:off x="960120" y="5422392"/>
-            <a:ext cx="3035808" cy="420623"/>
+            <a:off x="1088136" y="5422392"/>
+            <a:ext cx="2907792" cy="420623"/>
           </a:xfrm>
           <a:prstGeom prst="rect">
             <a:avLst/>
@@ -7354,7 +7354,7 @@
               </a:spcAft>
             </a:pPr>
             <a:r>
-              <a:rPr sz="780" b="0">
+              <a:rPr sz="880" b="0">
                 <a:solidFill>
                   <a:srgbClr val="121A2A"/>
                 </a:solidFill>
@@ -7398,7 +7398,7 @@
               </a:spcAft>
             </a:pPr>
             <a:r>
-              <a:rPr sz="760" b="0">
+              <a:rPr sz="860" b="0">
                 <a:solidFill>
                   <a:srgbClr val="121A2A"/>
                 </a:solidFill>
@@ -7442,7 +7442,7 @@
               </a:spcAft>
             </a:pPr>
             <a:r>
-              <a:rPr sz="760" b="0">
+              <a:rPr sz="860" b="0">
                 <a:solidFill>
                   <a:srgbClr val="121A2A"/>
                 </a:solidFill>
@@ -7486,7 +7486,7 @@
               </a:spcAft>
             </a:pPr>
             <a:r>
-              <a:rPr sz="760" b="1">
+              <a:rPr sz="860" b="1">
                 <a:solidFill>
                   <a:srgbClr val="D85A30"/>
                 </a:solidFill>
@@ -7530,7 +7530,7 @@
               </a:spcAft>
             </a:pPr>
             <a:r>
-              <a:rPr sz="760" b="0">
+              <a:rPr sz="860" b="0">
                 <a:solidFill>
                   <a:srgbClr val="121A2A"/>
                 </a:solidFill>
@@ -7637,30 +7637,30 @@
         </p:nvSpPr>
         <p:spPr>
           <a:xfrm>
-            <a:off x="521208" y="5861304"/>
-            <a:ext cx="438912" cy="420623"/>
-          </a:xfrm>
-          <a:prstGeom prst="rect">
-            <a:avLst/>
-          </a:prstGeom>
-          <a:noFill/>
-        </p:spPr>
-        <p:txBody>
-          <a:bodyPr wrap="square" lIns="0" rIns="0" tIns="0" bIns="0" anchor="ctr">
-            <a:spAutoFit/>
-          </a:bodyPr>
-          <a:lstStyle/>
-          <a:p>
-            <a:pPr algn="r">
-              <a:spcBef>
-                <a:spcPts val="0"/>
-              </a:spcBef>
-              <a:spcAft>
-                <a:spcPts val="0"/>
-              </a:spcAft>
-            </a:pPr>
-            <a:r>
-              <a:rPr sz="760" b="0">
+            <a:off x="557784" y="5861304"/>
+            <a:ext cx="530352" cy="420623"/>
+          </a:xfrm>
+          <a:prstGeom prst="rect">
+            <a:avLst/>
+          </a:prstGeom>
+          <a:noFill/>
+        </p:spPr>
+        <p:txBody>
+          <a:bodyPr wrap="square" lIns="0" rIns="0" tIns="0" bIns="0" anchor="ctr">
+            <a:spAutoFit/>
+          </a:bodyPr>
+          <a:lstStyle/>
+          <a:p>
+            <a:pPr algn="ctr">
+              <a:spcBef>
+                <a:spcPts val="0"/>
+              </a:spcBef>
+              <a:spcAft>
+                <a:spcPts val="0"/>
+              </a:spcAft>
+            </a:pPr>
+            <a:r>
+              <a:rPr sz="860" b="0">
                 <a:solidFill>
                   <a:srgbClr val="6B7280"/>
                 </a:solidFill>
@@ -7681,8 +7681,8 @@
         </p:nvSpPr>
         <p:spPr>
           <a:xfrm>
-            <a:off x="960120" y="5861304"/>
-            <a:ext cx="3035808" cy="420623"/>
+            <a:off x="1088136" y="5861304"/>
+            <a:ext cx="2907792" cy="420623"/>
           </a:xfrm>
           <a:prstGeom prst="rect">
             <a:avLst/>
@@ -7704,7 +7704,7 @@
               </a:spcAft>
             </a:pPr>
             <a:r>
-              <a:rPr sz="780" b="0">
+              <a:rPr sz="880" b="0">
                 <a:solidFill>
                   <a:srgbClr val="121A2A"/>
                 </a:solidFill>
@@ -7748,7 +7748,7 @@
               </a:spcAft>
             </a:pPr>
             <a:r>
-              <a:rPr sz="760" b="0">
+              <a:rPr sz="860" b="0">
                 <a:solidFill>
                   <a:srgbClr val="121A2A"/>
                 </a:solidFill>
@@ -7792,7 +7792,7 @@
               </a:spcAft>
             </a:pPr>
             <a:r>
-              <a:rPr sz="760" b="0">
+              <a:rPr sz="860" b="0">
                 <a:solidFill>
                   <a:srgbClr val="121A2A"/>
                 </a:solidFill>
@@ -7836,7 +7836,7 @@
               </a:spcAft>
             </a:pPr>
             <a:r>
-              <a:rPr sz="760" b="1">
+              <a:rPr sz="860" b="1">
                 <a:solidFill>
                   <a:srgbClr val="D85A30"/>
                 </a:solidFill>
@@ -7880,7 +7880,7 @@
               </a:spcAft>
             </a:pPr>
             <a:r>
-              <a:rPr sz="760" b="0">
+              <a:rPr sz="860" b="0">
                 <a:solidFill>
                   <a:srgbClr val="121A2A"/>
                 </a:solidFill>
@@ -7944,8 +7944,8 @@
         </p:nvSpPr>
         <p:spPr>
           <a:xfrm>
-            <a:off x="8275320" y="3310128"/>
-            <a:ext cx="3520440" cy="2999232"/>
+            <a:off x="8183879" y="3310128"/>
+            <a:ext cx="3611880" cy="2999232"/>
           </a:xfrm>
           <a:prstGeom prst="roundRect">
             <a:avLst/>
@@ -7989,8 +7989,8 @@
         </p:nvSpPr>
         <p:spPr>
           <a:xfrm>
-            <a:off x="8275320" y="3310128"/>
-            <a:ext cx="3520440" cy="347472"/>
+            <a:off x="8183879" y="3310128"/>
+            <a:ext cx="3611880" cy="347472"/>
           </a:xfrm>
           <a:prstGeom prst="rect">
             <a:avLst/>
@@ -8034,8 +8034,8 @@
         </p:nvSpPr>
         <p:spPr>
           <a:xfrm>
-            <a:off x="8366760" y="3346704"/>
-            <a:ext cx="585216" cy="274320"/>
+            <a:off x="8293607" y="3346704"/>
+            <a:ext cx="658368" cy="274320"/>
           </a:xfrm>
           <a:prstGeom prst="rect">
             <a:avLst/>
@@ -8057,7 +8057,7 @@
               </a:spcAft>
             </a:pPr>
             <a:r>
-              <a:rPr sz="650" b="1">
+              <a:rPr sz="780" b="1">
                 <a:solidFill>
                   <a:srgbClr val="FFFFFF"/>
                 </a:solidFill>
@@ -8079,7 +8079,7 @@
         <p:spPr>
           <a:xfrm>
             <a:off x="8951976" y="3346704"/>
-            <a:ext cx="1344168" cy="274320"/>
+            <a:ext cx="1481328" cy="274320"/>
           </a:xfrm>
           <a:prstGeom prst="rect">
             <a:avLst/>
@@ -8101,7 +8101,7 @@
               </a:spcAft>
             </a:pPr>
             <a:r>
-              <a:rPr sz="650" b="1">
+              <a:rPr sz="780" b="1">
                 <a:solidFill>
                   <a:srgbClr val="FFFFFF"/>
                 </a:solidFill>
@@ -8122,8 +8122,8 @@
         </p:nvSpPr>
         <p:spPr>
           <a:xfrm>
-            <a:off x="10296144" y="3346704"/>
-            <a:ext cx="493776" cy="274320"/>
+            <a:off x="10433304" y="3346704"/>
+            <a:ext cx="512064" cy="274320"/>
           </a:xfrm>
           <a:prstGeom prst="rect">
             <a:avLst/>
@@ -8145,7 +8145,7 @@
               </a:spcAft>
             </a:pPr>
             <a:r>
-              <a:rPr sz="650" b="1">
+              <a:rPr sz="780" b="1">
                 <a:solidFill>
                   <a:srgbClr val="FFFFFF"/>
                 </a:solidFill>
@@ -8166,8 +8166,8 @@
         </p:nvSpPr>
         <p:spPr>
           <a:xfrm>
-            <a:off x="10789920" y="3346704"/>
-            <a:ext cx="896112" cy="274320"/>
+            <a:off x="10945368" y="3346704"/>
+            <a:ext cx="713232" cy="274320"/>
           </a:xfrm>
           <a:prstGeom prst="rect">
             <a:avLst/>
@@ -8189,7 +8189,7 @@
               </a:spcAft>
             </a:pPr>
             <a:r>
-              <a:rPr sz="650" b="1">
+              <a:rPr sz="780" b="1">
                 <a:solidFill>
                   <a:srgbClr val="FFFFFF"/>
                 </a:solidFill>
@@ -8197,7 +8197,7 @@
                 <a:ea typeface="Noto Sans KR"/>
                 <a:cs typeface="Noto Sans KR"/>
               </a:rPr>
-              <a:t>포장가능재고 PCS</a:t>
+              <a:t>가용 PCS</a:t>
             </a:r>
           </a:p>
         </p:txBody>
@@ -8210,8 +8210,8 @@
         </p:nvSpPr>
         <p:spPr>
           <a:xfrm>
-            <a:off x="8366760" y="3685032"/>
-            <a:ext cx="585216" cy="384048"/>
+            <a:off x="8293607" y="3685032"/>
+            <a:ext cx="658368" cy="384048"/>
           </a:xfrm>
           <a:prstGeom prst="rect">
             <a:avLst/>
@@ -8233,7 +8233,7 @@
               </a:spcAft>
             </a:pPr>
             <a:r>
-              <a:rPr sz="640" b="0">
+              <a:rPr sz="770" b="0">
                 <a:solidFill>
                   <a:srgbClr val="121A2A"/>
                 </a:solidFill>
@@ -8255,7 +8255,7 @@
         <p:spPr>
           <a:xfrm>
             <a:off x="8951976" y="3685032"/>
-            <a:ext cx="1344168" cy="384048"/>
+            <a:ext cx="1481328" cy="384048"/>
           </a:xfrm>
           <a:prstGeom prst="rect">
             <a:avLst/>
@@ -8277,7 +8277,7 @@
               </a:spcAft>
             </a:pPr>
             <a:r>
-              <a:rPr sz="660" b="0">
+              <a:rPr sz="790" b="0">
                 <a:solidFill>
                   <a:srgbClr val="121A2A"/>
                 </a:solidFill>
@@ -8298,8 +8298,8 @@
         </p:nvSpPr>
         <p:spPr>
           <a:xfrm>
-            <a:off x="10296144" y="3685032"/>
-            <a:ext cx="493776" cy="384048"/>
+            <a:off x="10433304" y="3685032"/>
+            <a:ext cx="512064" cy="384048"/>
           </a:xfrm>
           <a:prstGeom prst="rect">
             <a:avLst/>
@@ -8321,7 +8321,7 @@
               </a:spcAft>
             </a:pPr>
             <a:r>
-              <a:rPr sz="640" b="1">
+              <a:rPr sz="770" b="1">
                 <a:solidFill>
                   <a:srgbClr val="D85A30"/>
                 </a:solidFill>
@@ -8342,8 +8342,8 @@
         </p:nvSpPr>
         <p:spPr>
           <a:xfrm>
-            <a:off x="10789920" y="3685032"/>
-            <a:ext cx="896112" cy="384048"/>
+            <a:off x="10945368" y="3685032"/>
+            <a:ext cx="713232" cy="384048"/>
           </a:xfrm>
           <a:prstGeom prst="rect">
             <a:avLst/>
@@ -8365,7 +8365,7 @@
               </a:spcAft>
             </a:pPr>
             <a:r>
-              <a:rPr sz="640" b="0">
+              <a:rPr sz="770" b="0">
                 <a:solidFill>
                   <a:srgbClr val="121A2A"/>
                 </a:solidFill>
@@ -8386,8 +8386,8 @@
         </p:nvSpPr>
         <p:spPr>
           <a:xfrm>
-            <a:off x="8348472" y="4096512"/>
-            <a:ext cx="3374136" cy="9144"/>
+            <a:off x="8257031" y="4096512"/>
+            <a:ext cx="3465576" cy="9144"/>
           </a:xfrm>
           <a:prstGeom prst="rect">
             <a:avLst/>
@@ -8429,8 +8429,8 @@
         </p:nvSpPr>
         <p:spPr>
           <a:xfrm>
-            <a:off x="8302752" y="4096512"/>
-            <a:ext cx="3465576" cy="438912"/>
+            <a:off x="8211311" y="4096512"/>
+            <a:ext cx="3557016" cy="438912"/>
           </a:xfrm>
           <a:prstGeom prst="rect">
             <a:avLst/>
@@ -8472,8 +8472,8 @@
         </p:nvSpPr>
         <p:spPr>
           <a:xfrm>
-            <a:off x="8366760" y="4123944"/>
-            <a:ext cx="585216" cy="384048"/>
+            <a:off x="8293607" y="4123944"/>
+            <a:ext cx="658368" cy="384048"/>
           </a:xfrm>
           <a:prstGeom prst="rect">
             <a:avLst/>
@@ -8495,7 +8495,7 @@
               </a:spcAft>
             </a:pPr>
             <a:r>
-              <a:rPr sz="640" b="0">
+              <a:rPr sz="770" b="0">
                 <a:solidFill>
                   <a:srgbClr val="121A2A"/>
                 </a:solidFill>
@@ -8517,7 +8517,7 @@
         <p:spPr>
           <a:xfrm>
             <a:off x="8951976" y="4123944"/>
-            <a:ext cx="1344168" cy="384048"/>
+            <a:ext cx="1481328" cy="384048"/>
           </a:xfrm>
           <a:prstGeom prst="rect">
             <a:avLst/>
@@ -8539,7 +8539,7 @@
               </a:spcAft>
             </a:pPr>
             <a:r>
-              <a:rPr sz="660" b="0">
+              <a:rPr sz="790" b="0">
                 <a:solidFill>
                   <a:srgbClr val="121A2A"/>
                 </a:solidFill>
@@ -8560,8 +8560,8 @@
         </p:nvSpPr>
         <p:spPr>
           <a:xfrm>
-            <a:off x="10296144" y="4123944"/>
-            <a:ext cx="493776" cy="384048"/>
+            <a:off x="10433304" y="4123944"/>
+            <a:ext cx="512064" cy="384048"/>
           </a:xfrm>
           <a:prstGeom prst="rect">
             <a:avLst/>
@@ -8583,7 +8583,7 @@
               </a:spcAft>
             </a:pPr>
             <a:r>
-              <a:rPr sz="640" b="1">
+              <a:rPr sz="770" b="1">
                 <a:solidFill>
                   <a:srgbClr val="D85A30"/>
                 </a:solidFill>
@@ -8604,8 +8604,8 @@
         </p:nvSpPr>
         <p:spPr>
           <a:xfrm>
-            <a:off x="10789920" y="4123944"/>
-            <a:ext cx="896112" cy="384048"/>
+            <a:off x="10945368" y="4123944"/>
+            <a:ext cx="713232" cy="384048"/>
           </a:xfrm>
           <a:prstGeom prst="rect">
             <a:avLst/>
@@ -8627,7 +8627,7 @@
               </a:spcAft>
             </a:pPr>
             <a:r>
-              <a:rPr sz="640" b="0">
+              <a:rPr sz="770" b="0">
                 <a:solidFill>
                   <a:srgbClr val="121A2A"/>
                 </a:solidFill>
@@ -8648,8 +8648,8 @@
         </p:nvSpPr>
         <p:spPr>
           <a:xfrm>
-            <a:off x="8348472" y="4535424"/>
-            <a:ext cx="3374136" cy="9144"/>
+            <a:off x="8257031" y="4535424"/>
+            <a:ext cx="3465576" cy="9144"/>
           </a:xfrm>
           <a:prstGeom prst="rect">
             <a:avLst/>
@@ -8691,8 +8691,8 @@
         </p:nvSpPr>
         <p:spPr>
           <a:xfrm>
-            <a:off x="8366760" y="4562856"/>
-            <a:ext cx="585216" cy="384048"/>
+            <a:off x="8293607" y="4562856"/>
+            <a:ext cx="658368" cy="384048"/>
           </a:xfrm>
           <a:prstGeom prst="rect">
             <a:avLst/>
@@ -8714,7 +8714,7 @@
               </a:spcAft>
             </a:pPr>
             <a:r>
-              <a:rPr sz="640" b="0">
+              <a:rPr sz="770" b="0">
                 <a:solidFill>
                   <a:srgbClr val="121A2A"/>
                 </a:solidFill>
@@ -8736,7 +8736,7 @@
         <p:spPr>
           <a:xfrm>
             <a:off x="8951976" y="4562856"/>
-            <a:ext cx="1344168" cy="384048"/>
+            <a:ext cx="1481328" cy="384048"/>
           </a:xfrm>
           <a:prstGeom prst="rect">
             <a:avLst/>
@@ -8758,7 +8758,7 @@
               </a:spcAft>
             </a:pPr>
             <a:r>
-              <a:rPr sz="660" b="0">
+              <a:rPr sz="790" b="0">
                 <a:solidFill>
                   <a:srgbClr val="121A2A"/>
                 </a:solidFill>
@@ -8779,8 +8779,8 @@
         </p:nvSpPr>
         <p:spPr>
           <a:xfrm>
-            <a:off x="10296144" y="4562856"/>
-            <a:ext cx="493776" cy="384048"/>
+            <a:off x="10433304" y="4562856"/>
+            <a:ext cx="512064" cy="384048"/>
           </a:xfrm>
           <a:prstGeom prst="rect">
             <a:avLst/>
@@ -8802,7 +8802,7 @@
               </a:spcAft>
             </a:pPr>
             <a:r>
-              <a:rPr sz="640" b="1">
+              <a:rPr sz="770" b="1">
                 <a:solidFill>
                   <a:srgbClr val="D85A30"/>
                 </a:solidFill>
@@ -8823,8 +8823,8 @@
         </p:nvSpPr>
         <p:spPr>
           <a:xfrm>
-            <a:off x="10789920" y="4562856"/>
-            <a:ext cx="896112" cy="384048"/>
+            <a:off x="10945368" y="4562856"/>
+            <a:ext cx="713232" cy="384048"/>
           </a:xfrm>
           <a:prstGeom prst="rect">
             <a:avLst/>
@@ -8846,7 +8846,7 @@
               </a:spcAft>
             </a:pPr>
             <a:r>
-              <a:rPr sz="640" b="0">
+              <a:rPr sz="770" b="0">
                 <a:solidFill>
                   <a:srgbClr val="121A2A"/>
                 </a:solidFill>
@@ -8867,8 +8867,8 @@
         </p:nvSpPr>
         <p:spPr>
           <a:xfrm>
-            <a:off x="8348472" y="4974336"/>
-            <a:ext cx="3374136" cy="9144"/>
+            <a:off x="8257031" y="4974336"/>
+            <a:ext cx="3465576" cy="9144"/>
           </a:xfrm>
           <a:prstGeom prst="rect">
             <a:avLst/>
@@ -8910,8 +8910,8 @@
         </p:nvSpPr>
         <p:spPr>
           <a:xfrm>
-            <a:off x="8302752" y="4974336"/>
-            <a:ext cx="3465576" cy="438912"/>
+            <a:off x="8211311" y="4974336"/>
+            <a:ext cx="3557016" cy="438912"/>
           </a:xfrm>
           <a:prstGeom prst="rect">
             <a:avLst/>
@@ -8953,8 +8953,8 @@
         </p:nvSpPr>
         <p:spPr>
           <a:xfrm>
-            <a:off x="8366760" y="5001768"/>
-            <a:ext cx="585216" cy="384048"/>
+            <a:off x="8293607" y="5001768"/>
+            <a:ext cx="658368" cy="384048"/>
           </a:xfrm>
           <a:prstGeom prst="rect">
             <a:avLst/>
@@ -8976,7 +8976,7 @@
               </a:spcAft>
             </a:pPr>
             <a:r>
-              <a:rPr sz="640" b="0">
+              <a:rPr sz="770" b="0">
                 <a:solidFill>
                   <a:srgbClr val="121A2A"/>
                 </a:solidFill>
@@ -8998,7 +8998,7 @@
         <p:spPr>
           <a:xfrm>
             <a:off x="8951976" y="5001768"/>
-            <a:ext cx="1344168" cy="384048"/>
+            <a:ext cx="1481328" cy="384048"/>
           </a:xfrm>
           <a:prstGeom prst="rect">
             <a:avLst/>
@@ -9020,7 +9020,7 @@
               </a:spcAft>
             </a:pPr>
             <a:r>
-              <a:rPr sz="660" b="0">
+              <a:rPr sz="790" b="0">
                 <a:solidFill>
                   <a:srgbClr val="121A2A"/>
                 </a:solidFill>
@@ -9041,8 +9041,8 @@
         </p:nvSpPr>
         <p:spPr>
           <a:xfrm>
-            <a:off x="10296144" y="5001768"/>
-            <a:ext cx="493776" cy="384048"/>
+            <a:off x="10433304" y="5001768"/>
+            <a:ext cx="512064" cy="384048"/>
           </a:xfrm>
           <a:prstGeom prst="rect">
             <a:avLst/>
@@ -9064,7 +9064,7 @@
               </a:spcAft>
             </a:pPr>
             <a:r>
-              <a:rPr sz="640" b="1">
+              <a:rPr sz="770" b="1">
                 <a:solidFill>
                   <a:srgbClr val="D85A30"/>
                 </a:solidFill>
@@ -9085,8 +9085,8 @@
         </p:nvSpPr>
         <p:spPr>
           <a:xfrm>
-            <a:off x="10789920" y="5001768"/>
-            <a:ext cx="896112" cy="384048"/>
+            <a:off x="10945368" y="5001768"/>
+            <a:ext cx="713232" cy="384048"/>
           </a:xfrm>
           <a:prstGeom prst="rect">
             <a:avLst/>
@@ -9108,7 +9108,7 @@
               </a:spcAft>
             </a:pPr>
             <a:r>
-              <a:rPr sz="640" b="0">
+              <a:rPr sz="770" b="0">
                 <a:solidFill>
                   <a:srgbClr val="121A2A"/>
                 </a:solidFill>
@@ -9129,8 +9129,8 @@
         </p:nvSpPr>
         <p:spPr>
           <a:xfrm>
-            <a:off x="8348472" y="5413248"/>
-            <a:ext cx="3374136" cy="9144"/>
+            <a:off x="8257031" y="5413248"/>
+            <a:ext cx="3465576" cy="9144"/>
           </a:xfrm>
           <a:prstGeom prst="rect">
             <a:avLst/>
@@ -9172,8 +9172,8 @@
         </p:nvSpPr>
         <p:spPr>
           <a:xfrm>
-            <a:off x="8366760" y="5440680"/>
-            <a:ext cx="585216" cy="384048"/>
+            <a:off x="8293607" y="5440680"/>
+            <a:ext cx="658368" cy="384048"/>
           </a:xfrm>
           <a:prstGeom prst="rect">
             <a:avLst/>
@@ -9195,7 +9195,7 @@
               </a:spcAft>
             </a:pPr>
             <a:r>
-              <a:rPr sz="640" b="0">
+              <a:rPr sz="770" b="0">
                 <a:solidFill>
                   <a:srgbClr val="121A2A"/>
                 </a:solidFill>
@@ -9217,7 +9217,7 @@
         <p:spPr>
           <a:xfrm>
             <a:off x="8951976" y="5440680"/>
-            <a:ext cx="1344168" cy="384048"/>
+            <a:ext cx="1481328" cy="384048"/>
           </a:xfrm>
           <a:prstGeom prst="rect">
             <a:avLst/>
@@ -9239,7 +9239,7 @@
               </a:spcAft>
             </a:pPr>
             <a:r>
-              <a:rPr sz="660" b="0">
+              <a:rPr sz="790" b="0">
                 <a:solidFill>
                   <a:srgbClr val="121A2A"/>
                 </a:solidFill>
@@ -9260,8 +9260,8 @@
         </p:nvSpPr>
         <p:spPr>
           <a:xfrm>
-            <a:off x="10296144" y="5440680"/>
-            <a:ext cx="493776" cy="384048"/>
+            <a:off x="10433304" y="5440680"/>
+            <a:ext cx="512064" cy="384048"/>
           </a:xfrm>
           <a:prstGeom prst="rect">
             <a:avLst/>
@@ -9283,7 +9283,7 @@
               </a:spcAft>
             </a:pPr>
             <a:r>
-              <a:rPr sz="640" b="1">
+              <a:rPr sz="770" b="1">
                 <a:solidFill>
                   <a:srgbClr val="D85A30"/>
                 </a:solidFill>
@@ -9304,8 +9304,8 @@
         </p:nvSpPr>
         <p:spPr>
           <a:xfrm>
-            <a:off x="10789920" y="5440680"/>
-            <a:ext cx="896112" cy="384048"/>
+            <a:off x="10945368" y="5440680"/>
+            <a:ext cx="713232" cy="384048"/>
           </a:xfrm>
           <a:prstGeom prst="rect">
             <a:avLst/>
@@ -9327,7 +9327,7 @@
               </a:spcAft>
             </a:pPr>
             <a:r>
-              <a:rPr sz="640" b="0">
+              <a:rPr sz="770" b="0">
                 <a:solidFill>
                   <a:srgbClr val="121A2A"/>
                 </a:solidFill>
@@ -9348,8 +9348,8 @@
         </p:nvSpPr>
         <p:spPr>
           <a:xfrm>
-            <a:off x="8348472" y="5852160"/>
-            <a:ext cx="3374136" cy="9144"/>
+            <a:off x="8257031" y="5852160"/>
+            <a:ext cx="3465576" cy="9144"/>
           </a:xfrm>
           <a:prstGeom prst="rect">
             <a:avLst/>

--- a/exports/ppt_design_preview.pptx
+++ b/exports/ppt_design_preview.pptx
@@ -6,6 +6,7 @@
   </p:sldMasterIdLst>
   <p:sldIdLst>
     <p:sldId id="256" r:id="rId7"/>
+    <p:sldId id="257" r:id="rId8"/>
   </p:sldIdLst>
   <p:sldSz cx="12191695" cy="6858000" type="screen4x3"/>
   <p:notesSz cx="6858000" cy="9144000"/>
@@ -3355,7 +3356,7 @@
                 <a:ea typeface="Noto Sans KR"/>
                 <a:cs typeface="Noto Sans KR"/>
               </a:rPr>
-              <a:t>산출시각: 2026-06-25 13:22</a:t>
+              <a:t>산출시각: 2026-06-25 13:49</a:t>
             </a:r>
           </a:p>
         </p:txBody>
@@ -3533,7 +3534,7 @@
                 <a:ea typeface="Noto Sans KR"/>
                 <a:cs typeface="Noto Sans KR"/>
               </a:rPr>
-              <a:t>용마입고율 13.3% / 미입고 165,234 PACK / 긴급 15건</a:t>
+              <a:t>용마입고율 13.3% / 미입고 165,234 PACK / 긴급 SKU 42개</a:t>
             </a:r>
           </a:p>
         </p:txBody>
@@ -9424,6 +9425,3230 @@
               </a:rPr>
               <a:t>진도율은 생산요청 기준이며, 요청/긴급 대응 품목은 일일 재고표 기준으로 산출됩니다.</a:t>
             </a:r>
+          </a:p>
+        </p:txBody>
+      </p:sp>
+    </p:spTree>
+  </p:cSld>
+  <p:clrMapOvr>
+    <a:masterClrMapping/>
+  </p:clrMapOvr>
+</p:sld>
+</file>
+
+<file path=ppt/slides/slide2.xml><?xml version="1.0" encoding="utf-8"?>
+<p:sld xmlns:a="http://schemas.openxmlformats.org/drawingml/2006/main" xmlns:p="http://schemas.openxmlformats.org/presentationml/2006/main" xmlns:r="http://schemas.openxmlformats.org/officeDocument/2006/relationships">
+  <p:cSld>
+    <p:bg>
+      <p:bgPr>
+        <a:solidFill>
+          <a:srgbClr val="F6F7F9"/>
+        </a:solidFill>
+        <a:effectLst/>
+      </p:bgPr>
+    </p:bg>
+    <p:spTree>
+      <p:nvGrpSpPr>
+        <p:cNvPr id="1" name=""/>
+        <p:cNvGrpSpPr/>
+        <p:nvPr/>
+      </p:nvGrpSpPr>
+      <p:grpSpPr/>
+      <p:sp>
+        <p:nvSpPr>
+          <p:cNvPr id="2" name="Rectangle 1"/>
+          <p:cNvSpPr/>
+          <p:nvPr/>
+        </p:nvSpPr>
+        <p:spPr>
+          <a:xfrm>
+            <a:off x="0" y="0"/>
+            <a:ext cx="12191695" cy="804672"/>
+          </a:xfrm>
+          <a:prstGeom prst="rect">
+            <a:avLst/>
+          </a:prstGeom>
+          <a:solidFill>
+            <a:srgbClr val="172033"/>
+          </a:solidFill>
+          <a:ln>
+            <a:noFill/>
+          </a:ln>
+        </p:spPr>
+        <p:style>
+          <a:lnRef idx="1">
+            <a:schemeClr val="accent1"/>
+          </a:lnRef>
+          <a:fillRef idx="3">
+            <a:schemeClr val="accent1"/>
+          </a:fillRef>
+          <a:effectRef idx="2">
+            <a:schemeClr val="accent1"/>
+          </a:effectRef>
+          <a:fontRef idx="minor">
+            <a:schemeClr val="lt1"/>
+          </a:fontRef>
+        </p:style>
+        <p:txBody>
+          <a:bodyPr rtlCol="0" anchor="ctr"/>
+          <a:lstStyle/>
+          <a:p>
+            <a:pPr algn="ctr"/>
+          </a:p>
+        </p:txBody>
+      </p:sp>
+      <p:sp>
+        <p:nvSpPr>
+          <p:cNvPr id="3" name="Rectangle 2"/>
+          <p:cNvSpPr/>
+          <p:nvPr/>
+        </p:nvSpPr>
+        <p:spPr>
+          <a:xfrm>
+            <a:off x="0" y="786384"/>
+            <a:ext cx="12191695" cy="27432"/>
+          </a:xfrm>
+          <a:prstGeom prst="rect">
+            <a:avLst/>
+          </a:prstGeom>
+          <a:solidFill>
+            <a:srgbClr val="D85A30"/>
+          </a:solidFill>
+          <a:ln w="6350">
+            <a:solidFill>
+              <a:srgbClr val="D85A30"/>
+            </a:solidFill>
+          </a:ln>
+        </p:spPr>
+        <p:style>
+          <a:lnRef idx="1">
+            <a:schemeClr val="accent1"/>
+          </a:lnRef>
+          <a:fillRef idx="3">
+            <a:schemeClr val="accent1"/>
+          </a:fillRef>
+          <a:effectRef idx="2">
+            <a:schemeClr val="accent1"/>
+          </a:effectRef>
+          <a:fontRef idx="minor">
+            <a:schemeClr val="lt1"/>
+          </a:fontRef>
+        </p:style>
+        <p:txBody>
+          <a:bodyPr rtlCol="0" anchor="ctr"/>
+          <a:lstStyle/>
+          <a:p>
+            <a:pPr algn="ctr"/>
+          </a:p>
+        </p:txBody>
+      </p:sp>
+      <p:sp>
+        <p:nvSpPr>
+          <p:cNvPr id="4" name="TextBox 3"/>
+          <p:cNvSpPr txBox="1"/>
+          <p:nvPr/>
+        </p:nvSpPr>
+        <p:spPr>
+          <a:xfrm>
+            <a:off x="411480" y="146304"/>
+            <a:ext cx="6217920" cy="292608"/>
+          </a:xfrm>
+          <a:prstGeom prst="rect">
+            <a:avLst/>
+          </a:prstGeom>
+          <a:noFill/>
+        </p:spPr>
+        <p:txBody>
+          <a:bodyPr wrap="square" lIns="0" rIns="0" tIns="0" bIns="0" anchor="ctr">
+            <a:spAutoFit/>
+          </a:bodyPr>
+          <a:lstStyle/>
+          <a:p>
+            <a:pPr algn="l">
+              <a:spcBef>
+                <a:spcPts val="0"/>
+              </a:spcBef>
+              <a:spcAft>
+                <a:spcPts val="0"/>
+              </a:spcAft>
+            </a:pPr>
+            <a:r>
+              <a:rPr sz="1800" b="1">
+                <a:solidFill>
+                  <a:srgbClr val="FFFFFF"/>
+                </a:solidFill>
+                <a:latin typeface="Noto Sans KR"/>
+                <a:ea typeface="Noto Sans KR"/>
+                <a:cs typeface="Noto Sans KR"/>
+              </a:rPr>
+              <a:t>요청 긴급 S코드 요약</a:t>
+            </a:r>
+          </a:p>
+        </p:txBody>
+      </p:sp>
+      <p:sp>
+        <p:nvSpPr>
+          <p:cNvPr id="5" name="TextBox 4"/>
+          <p:cNvSpPr txBox="1"/>
+          <p:nvPr/>
+        </p:nvSpPr>
+        <p:spPr>
+          <a:xfrm>
+            <a:off x="411480" y="466344"/>
+            <a:ext cx="6583680" cy="164592"/>
+          </a:xfrm>
+          <a:prstGeom prst="rect">
+            <a:avLst/>
+          </a:prstGeom>
+          <a:noFill/>
+        </p:spPr>
+        <p:txBody>
+          <a:bodyPr wrap="square" lIns="0" rIns="0" tIns="0" bIns="0" anchor="ctr">
+            <a:spAutoFit/>
+          </a:bodyPr>
+          <a:lstStyle/>
+          <a:p>
+            <a:pPr algn="l">
+              <a:spcBef>
+                <a:spcPts val="0"/>
+              </a:spcBef>
+              <a:spcAft>
+                <a:spcPts val="0"/>
+              </a:spcAft>
+            </a:pPr>
+            <a:r>
+              <a:rPr sz="830" b="0">
+                <a:solidFill>
+                  <a:srgbClr val="CBD5E1"/>
+                </a:solidFill>
+                <a:latin typeface="Noto Sans KR"/>
+                <a:ea typeface="Noto Sans KR"/>
+                <a:cs typeface="Noto Sans KR"/>
+              </a:rPr>
+              <a:t>일일 재고표 기준 긴급요청 품목을 S코드 단위로 집계</a:t>
+            </a:r>
+          </a:p>
+        </p:txBody>
+      </p:sp>
+      <p:sp>
+        <p:nvSpPr>
+          <p:cNvPr id="6" name="TextBox 5"/>
+          <p:cNvSpPr txBox="1"/>
+          <p:nvPr/>
+        </p:nvSpPr>
+        <p:spPr>
+          <a:xfrm>
+            <a:off x="7406640" y="301752"/>
+            <a:ext cx="4343400" cy="182880"/>
+          </a:xfrm>
+          <a:prstGeom prst="rect">
+            <a:avLst/>
+          </a:prstGeom>
+          <a:noFill/>
+        </p:spPr>
+        <p:txBody>
+          <a:bodyPr wrap="square" lIns="0" rIns="0" tIns="0" bIns="0" anchor="ctr">
+            <a:spAutoFit/>
+          </a:bodyPr>
+          <a:lstStyle/>
+          <a:p>
+            <a:pPr algn="r">
+              <a:spcBef>
+                <a:spcPts val="0"/>
+              </a:spcBef>
+              <a:spcAft>
+                <a:spcPts val="0"/>
+              </a:spcAft>
+            </a:pPr>
+            <a:r>
+              <a:rPr sz="780" b="0">
+                <a:solidFill>
+                  <a:srgbClr val="E5E7EB"/>
+                </a:solidFill>
+                <a:latin typeface="Noto Sans KR"/>
+                <a:ea typeface="Noto Sans KR"/>
+                <a:cs typeface="Noto Sans KR"/>
+              </a:rPr>
+              <a:t>기준: ?? / 산출시각: 2026-06-25 13:49</a:t>
+            </a:r>
+          </a:p>
+        </p:txBody>
+      </p:sp>
+      <p:sp>
+        <p:nvSpPr>
+          <p:cNvPr id="7" name="TextBox 6"/>
+          <p:cNvSpPr txBox="1"/>
+          <p:nvPr/>
+        </p:nvSpPr>
+        <p:spPr>
+          <a:xfrm>
+            <a:off x="566928" y="1024128"/>
+            <a:ext cx="7315200" cy="219456"/>
+          </a:xfrm>
+          <a:prstGeom prst="rect">
+            <a:avLst/>
+          </a:prstGeom>
+          <a:noFill/>
+        </p:spPr>
+        <p:txBody>
+          <a:bodyPr wrap="square" lIns="0" rIns="0" tIns="0" bIns="0" anchor="ctr">
+            <a:spAutoFit/>
+          </a:bodyPr>
+          <a:lstStyle/>
+          <a:p>
+            <a:pPr algn="l">
+              <a:spcBef>
+                <a:spcPts val="0"/>
+              </a:spcBef>
+              <a:spcAft>
+                <a:spcPts val="0"/>
+              </a:spcAft>
+            </a:pPr>
+            <a:r>
+              <a:rPr sz="1000" b="1">
+                <a:solidFill>
+                  <a:srgbClr val="121A2A"/>
+                </a:solidFill>
+                <a:latin typeface="Noto Sans KR"/>
+                <a:ea typeface="Noto Sans KR"/>
+                <a:cs typeface="Noto Sans KR"/>
+              </a:rPr>
+              <a:t>S코드 11개 / SKU 42개 / 요청외 S코드 4개</a:t>
+            </a:r>
+          </a:p>
+        </p:txBody>
+      </p:sp>
+      <p:sp>
+        <p:nvSpPr>
+          <p:cNvPr id="8" name="TextBox 7"/>
+          <p:cNvSpPr txBox="1"/>
+          <p:nvPr/>
+        </p:nvSpPr>
+        <p:spPr>
+          <a:xfrm>
+            <a:off x="566928" y="6382512"/>
+            <a:ext cx="10789920" cy="182880"/>
+          </a:xfrm>
+          <a:prstGeom prst="rect">
+            <a:avLst/>
+          </a:prstGeom>
+          <a:noFill/>
+        </p:spPr>
+        <p:txBody>
+          <a:bodyPr wrap="square" lIns="0" rIns="0" tIns="0" bIns="0" anchor="ctr">
+            <a:spAutoFit/>
+          </a:bodyPr>
+          <a:lstStyle/>
+          <a:p>
+            <a:pPr algn="l">
+              <a:spcBef>
+                <a:spcPts val="0"/>
+              </a:spcBef>
+              <a:spcAft>
+                <a:spcPts val="0"/>
+              </a:spcAft>
+            </a:pPr>
+            <a:r>
+              <a:rPr sz="750" b="0">
+                <a:solidFill>
+                  <a:srgbClr val="6B7280"/>
+                </a:solidFill>
+                <a:latin typeface="Noto Sans KR"/>
+                <a:ea typeface="Noto Sans KR"/>
+                <a:cs typeface="Noto Sans KR"/>
+              </a:rPr>
+              <a:t>요청외는 해당 S코드 안에 요청외 긴급 SKU가 1개 이상 포함된 경우로 분류합니다.</a:t>
+            </a:r>
+          </a:p>
+        </p:txBody>
+      </p:sp>
+      <p:sp>
+        <p:nvSpPr>
+          <p:cNvPr id="9" name="Rounded Rectangle 8"/>
+          <p:cNvSpPr/>
+          <p:nvPr/>
+        </p:nvSpPr>
+        <p:spPr>
+          <a:xfrm>
+            <a:off x="566928" y="1371600"/>
+            <a:ext cx="11064240" cy="4846320"/>
+          </a:xfrm>
+          <a:prstGeom prst="roundRect">
+            <a:avLst/>
+          </a:prstGeom>
+          <a:solidFill>
+            <a:srgbClr val="FFFFFF"/>
+          </a:solidFill>
+          <a:ln w="6350">
+            <a:solidFill>
+              <a:srgbClr val="DDE3EA"/>
+            </a:solidFill>
+          </a:ln>
+        </p:spPr>
+        <p:style>
+          <a:lnRef idx="1">
+            <a:schemeClr val="accent1"/>
+          </a:lnRef>
+          <a:fillRef idx="3">
+            <a:schemeClr val="accent1"/>
+          </a:fillRef>
+          <a:effectRef idx="2">
+            <a:schemeClr val="accent1"/>
+          </a:effectRef>
+          <a:fontRef idx="minor">
+            <a:schemeClr val="lt1"/>
+          </a:fontRef>
+        </p:style>
+        <p:txBody>
+          <a:bodyPr rtlCol="0" anchor="ctr"/>
+          <a:lstStyle/>
+          <a:p>
+            <a:pPr algn="ctr"/>
+          </a:p>
+        </p:txBody>
+      </p:sp>
+      <p:sp>
+        <p:nvSpPr>
+          <p:cNvPr id="10" name="Rectangle 9"/>
+          <p:cNvSpPr/>
+          <p:nvPr/>
+        </p:nvSpPr>
+        <p:spPr>
+          <a:xfrm>
+            <a:off x="566928" y="1371600"/>
+            <a:ext cx="11064240" cy="384048"/>
+          </a:xfrm>
+          <a:prstGeom prst="rect">
+            <a:avLst/>
+          </a:prstGeom>
+          <a:solidFill>
+            <a:srgbClr val="172033"/>
+          </a:solidFill>
+          <a:ln w="6350">
+            <a:solidFill>
+              <a:srgbClr val="172033"/>
+            </a:solidFill>
+          </a:ln>
+        </p:spPr>
+        <p:style>
+          <a:lnRef idx="1">
+            <a:schemeClr val="accent1"/>
+          </a:lnRef>
+          <a:fillRef idx="3">
+            <a:schemeClr val="accent1"/>
+          </a:fillRef>
+          <a:effectRef idx="2">
+            <a:schemeClr val="accent1"/>
+          </a:effectRef>
+          <a:fontRef idx="minor">
+            <a:schemeClr val="lt1"/>
+          </a:fontRef>
+        </p:style>
+        <p:txBody>
+          <a:bodyPr rtlCol="0" anchor="ctr"/>
+          <a:lstStyle/>
+          <a:p>
+            <a:pPr algn="ctr"/>
+          </a:p>
+        </p:txBody>
+      </p:sp>
+      <p:sp>
+        <p:nvSpPr>
+          <p:cNvPr id="11" name="TextBox 10"/>
+          <p:cNvSpPr txBox="1"/>
+          <p:nvPr/>
+        </p:nvSpPr>
+        <p:spPr>
+          <a:xfrm>
+            <a:off x="713232" y="1426464"/>
+            <a:ext cx="960120" cy="274320"/>
+          </a:xfrm>
+          <a:prstGeom prst="rect">
+            <a:avLst/>
+          </a:prstGeom>
+          <a:noFill/>
+        </p:spPr>
+        <p:txBody>
+          <a:bodyPr wrap="square" lIns="0" rIns="0" tIns="0" bIns="0" anchor="ctr">
+            <a:spAutoFit/>
+          </a:bodyPr>
+          <a:lstStyle/>
+          <a:p>
+            <a:pPr algn="l">
+              <a:spcBef>
+                <a:spcPts val="0"/>
+              </a:spcBef>
+              <a:spcAft>
+                <a:spcPts val="0"/>
+              </a:spcAft>
+            </a:pPr>
+            <a:r>
+              <a:rPr sz="850" b="1">
+                <a:solidFill>
+                  <a:srgbClr val="FFFFFF"/>
+                </a:solidFill>
+                <a:latin typeface="Noto Sans KR"/>
+                <a:ea typeface="Noto Sans KR"/>
+                <a:cs typeface="Noto Sans KR"/>
+              </a:rPr>
+              <a:t>S코드</a:t>
+            </a:r>
+          </a:p>
+        </p:txBody>
+      </p:sp>
+      <p:sp>
+        <p:nvSpPr>
+          <p:cNvPr id="12" name="TextBox 11"/>
+          <p:cNvSpPr txBox="1"/>
+          <p:nvPr/>
+        </p:nvSpPr>
+        <p:spPr>
+          <a:xfrm>
+            <a:off x="1673352" y="1426464"/>
+            <a:ext cx="1143000" cy="274320"/>
+          </a:xfrm>
+          <a:prstGeom prst="rect">
+            <a:avLst/>
+          </a:prstGeom>
+          <a:noFill/>
+        </p:spPr>
+        <p:txBody>
+          <a:bodyPr wrap="square" lIns="0" rIns="0" tIns="0" bIns="0" anchor="ctr">
+            <a:spAutoFit/>
+          </a:bodyPr>
+          <a:lstStyle/>
+          <a:p>
+            <a:pPr algn="l">
+              <a:spcBef>
+                <a:spcPts val="0"/>
+              </a:spcBef>
+              <a:spcAft>
+                <a:spcPts val="0"/>
+              </a:spcAft>
+            </a:pPr>
+            <a:r>
+              <a:rPr sz="850" b="1">
+                <a:solidFill>
+                  <a:srgbClr val="FFFFFF"/>
+                </a:solidFill>
+                <a:latin typeface="Noto Sans KR"/>
+                <a:ea typeface="Noto Sans KR"/>
+                <a:cs typeface="Noto Sans KR"/>
+              </a:rPr>
+              <a:t>요청구분</a:t>
+            </a:r>
+          </a:p>
+        </p:txBody>
+      </p:sp>
+      <p:sp>
+        <p:nvSpPr>
+          <p:cNvPr id="13" name="TextBox 12"/>
+          <p:cNvSpPr txBox="1"/>
+          <p:nvPr/>
+        </p:nvSpPr>
+        <p:spPr>
+          <a:xfrm>
+            <a:off x="2816352" y="1426464"/>
+            <a:ext cx="7818120" cy="274320"/>
+          </a:xfrm>
+          <a:prstGeom prst="rect">
+            <a:avLst/>
+          </a:prstGeom>
+          <a:noFill/>
+        </p:spPr>
+        <p:txBody>
+          <a:bodyPr wrap="square" lIns="0" rIns="0" tIns="0" bIns="0" anchor="ctr">
+            <a:spAutoFit/>
+          </a:bodyPr>
+          <a:lstStyle/>
+          <a:p>
+            <a:pPr algn="l">
+              <a:spcBef>
+                <a:spcPts val="0"/>
+              </a:spcBef>
+              <a:spcAft>
+                <a:spcPts val="0"/>
+              </a:spcAft>
+            </a:pPr>
+            <a:r>
+              <a:rPr sz="850" b="1">
+                <a:solidFill>
+                  <a:srgbClr val="FFFFFF"/>
+                </a:solidFill>
+                <a:latin typeface="Noto Sans KR"/>
+                <a:ea typeface="Noto Sans KR"/>
+                <a:cs typeface="Noto Sans KR"/>
+              </a:rPr>
+              <a:t>제품명</a:t>
+            </a:r>
+          </a:p>
+        </p:txBody>
+      </p:sp>
+      <p:sp>
+        <p:nvSpPr>
+          <p:cNvPr id="14" name="TextBox 13"/>
+          <p:cNvSpPr txBox="1"/>
+          <p:nvPr/>
+        </p:nvSpPr>
+        <p:spPr>
+          <a:xfrm>
+            <a:off x="10634472" y="1426464"/>
+            <a:ext cx="868680" cy="274320"/>
+          </a:xfrm>
+          <a:prstGeom prst="rect">
+            <a:avLst/>
+          </a:prstGeom>
+          <a:noFill/>
+        </p:spPr>
+        <p:txBody>
+          <a:bodyPr wrap="square" lIns="0" rIns="0" tIns="0" bIns="0" anchor="ctr">
+            <a:spAutoFit/>
+          </a:bodyPr>
+          <a:lstStyle/>
+          <a:p>
+            <a:pPr algn="r">
+              <a:spcBef>
+                <a:spcPts val="0"/>
+              </a:spcBef>
+              <a:spcAft>
+                <a:spcPts val="0"/>
+              </a:spcAft>
+            </a:pPr>
+            <a:r>
+              <a:rPr sz="850" b="1">
+                <a:solidFill>
+                  <a:srgbClr val="FFFFFF"/>
+                </a:solidFill>
+                <a:latin typeface="Noto Sans KR"/>
+                <a:ea typeface="Noto Sans KR"/>
+                <a:cs typeface="Noto Sans KR"/>
+              </a:rPr>
+              <a:t>SKU 수</a:t>
+            </a:r>
+          </a:p>
+        </p:txBody>
+      </p:sp>
+      <p:sp>
+        <p:nvSpPr>
+          <p:cNvPr id="15" name="TextBox 14"/>
+          <p:cNvSpPr txBox="1"/>
+          <p:nvPr/>
+        </p:nvSpPr>
+        <p:spPr>
+          <a:xfrm>
+            <a:off x="713232" y="1773936"/>
+            <a:ext cx="960120" cy="320040"/>
+          </a:xfrm>
+          <a:prstGeom prst="rect">
+            <a:avLst/>
+          </a:prstGeom>
+          <a:noFill/>
+        </p:spPr>
+        <p:txBody>
+          <a:bodyPr wrap="square" lIns="0" rIns="0" tIns="0" bIns="0" anchor="ctr">
+            <a:spAutoFit/>
+          </a:bodyPr>
+          <a:lstStyle/>
+          <a:p>
+            <a:pPr algn="l">
+              <a:spcBef>
+                <a:spcPts val="0"/>
+              </a:spcBef>
+              <a:spcAft>
+                <a:spcPts val="0"/>
+              </a:spcAft>
+            </a:pPr>
+            <a:r>
+              <a:rPr sz="869" b="1">
+                <a:solidFill>
+                  <a:srgbClr val="185FA5"/>
+                </a:solidFill>
+                <a:latin typeface="Noto Sans KR"/>
+                <a:ea typeface="Noto Sans KR"/>
+                <a:cs typeface="Noto Sans KR"/>
+              </a:rPr>
+              <a:t>S129</a:t>
+            </a:r>
+          </a:p>
+        </p:txBody>
+      </p:sp>
+      <p:sp>
+        <p:nvSpPr>
+          <p:cNvPr id="16" name="TextBox 15"/>
+          <p:cNvSpPr txBox="1"/>
+          <p:nvPr/>
+        </p:nvSpPr>
+        <p:spPr>
+          <a:xfrm>
+            <a:off x="1673352" y="1773936"/>
+            <a:ext cx="1143000" cy="320040"/>
+          </a:xfrm>
+          <a:prstGeom prst="rect">
+            <a:avLst/>
+          </a:prstGeom>
+          <a:noFill/>
+        </p:spPr>
+        <p:txBody>
+          <a:bodyPr wrap="square" lIns="0" rIns="0" tIns="0" bIns="0" anchor="ctr">
+            <a:spAutoFit/>
+          </a:bodyPr>
+          <a:lstStyle/>
+          <a:p>
+            <a:pPr algn="l">
+              <a:spcBef>
+                <a:spcPts val="0"/>
+              </a:spcBef>
+              <a:spcAft>
+                <a:spcPts val="0"/>
+              </a:spcAft>
+            </a:pPr>
+            <a:r>
+              <a:rPr sz="869" b="1">
+                <a:solidFill>
+                  <a:srgbClr val="D85A30"/>
+                </a:solidFill>
+                <a:latin typeface="Noto Sans KR"/>
+                <a:ea typeface="Noto Sans KR"/>
+                <a:cs typeface="Noto Sans KR"/>
+              </a:rPr>
+              <a:t>요청외</a:t>
+            </a:r>
+          </a:p>
+        </p:txBody>
+      </p:sp>
+      <p:sp>
+        <p:nvSpPr>
+          <p:cNvPr id="17" name="TextBox 16"/>
+          <p:cNvSpPr txBox="1"/>
+          <p:nvPr/>
+        </p:nvSpPr>
+        <p:spPr>
+          <a:xfrm>
+            <a:off x="2816352" y="1773936"/>
+            <a:ext cx="7818120" cy="320040"/>
+          </a:xfrm>
+          <a:prstGeom prst="rect">
+            <a:avLst/>
+          </a:prstGeom>
+          <a:noFill/>
+        </p:spPr>
+        <p:txBody>
+          <a:bodyPr wrap="square" lIns="0" rIns="0" tIns="0" bIns="0" anchor="ctr">
+            <a:spAutoFit/>
+          </a:bodyPr>
+          <a:lstStyle/>
+          <a:p>
+            <a:pPr algn="l">
+              <a:spcBef>
+                <a:spcPts val="0"/>
+              </a:spcBef>
+              <a:spcAft>
+                <a:spcPts val="0"/>
+              </a:spcAft>
+            </a:pPr>
+            <a:r>
+              <a:rPr sz="840" b="0">
+                <a:solidFill>
+                  <a:srgbClr val="121A2A"/>
+                </a:solidFill>
+                <a:latin typeface="Noto Sans KR"/>
+                <a:ea typeface="Noto Sans KR"/>
+                <a:cs typeface="Noto Sans KR"/>
+              </a:rPr>
+              <a:t>Iris SoulBrown_40팩</a:t>
+            </a:r>
+          </a:p>
+        </p:txBody>
+      </p:sp>
+      <p:sp>
+        <p:nvSpPr>
+          <p:cNvPr id="18" name="TextBox 17"/>
+          <p:cNvSpPr txBox="1"/>
+          <p:nvPr/>
+        </p:nvSpPr>
+        <p:spPr>
+          <a:xfrm>
+            <a:off x="10634472" y="1773936"/>
+            <a:ext cx="868680" cy="320040"/>
+          </a:xfrm>
+          <a:prstGeom prst="rect">
+            <a:avLst/>
+          </a:prstGeom>
+          <a:noFill/>
+        </p:spPr>
+        <p:txBody>
+          <a:bodyPr wrap="square" lIns="0" rIns="0" tIns="0" bIns="0" anchor="ctr">
+            <a:spAutoFit/>
+          </a:bodyPr>
+          <a:lstStyle/>
+          <a:p>
+            <a:pPr algn="r">
+              <a:spcBef>
+                <a:spcPts val="0"/>
+              </a:spcBef>
+              <a:spcAft>
+                <a:spcPts val="0"/>
+              </a:spcAft>
+            </a:pPr>
+            <a:r>
+              <a:rPr sz="869" b="1">
+                <a:solidFill>
+                  <a:srgbClr val="D85A30"/>
+                </a:solidFill>
+                <a:latin typeface="Noto Sans KR"/>
+                <a:ea typeface="Noto Sans KR"/>
+                <a:cs typeface="Noto Sans KR"/>
+              </a:rPr>
+              <a:t>12</a:t>
+            </a:r>
+          </a:p>
+        </p:txBody>
+      </p:sp>
+      <p:sp>
+        <p:nvSpPr>
+          <p:cNvPr id="19" name="Rectangle 18"/>
+          <p:cNvSpPr/>
+          <p:nvPr/>
+        </p:nvSpPr>
+        <p:spPr>
+          <a:xfrm>
+            <a:off x="658368" y="2112264"/>
+            <a:ext cx="10881360" cy="9144"/>
+          </a:xfrm>
+          <a:prstGeom prst="rect">
+            <a:avLst/>
+          </a:prstGeom>
+          <a:solidFill>
+            <a:srgbClr val="F1F4F8"/>
+          </a:solidFill>
+          <a:ln>
+            <a:noFill/>
+          </a:ln>
+        </p:spPr>
+        <p:style>
+          <a:lnRef idx="1">
+            <a:schemeClr val="accent1"/>
+          </a:lnRef>
+          <a:fillRef idx="3">
+            <a:schemeClr val="accent1"/>
+          </a:fillRef>
+          <a:effectRef idx="2">
+            <a:schemeClr val="accent1"/>
+          </a:effectRef>
+          <a:fontRef idx="minor">
+            <a:schemeClr val="lt1"/>
+          </a:fontRef>
+        </p:style>
+        <p:txBody>
+          <a:bodyPr rtlCol="0" anchor="ctr"/>
+          <a:lstStyle/>
+          <a:p>
+            <a:pPr algn="ctr"/>
+          </a:p>
+        </p:txBody>
+      </p:sp>
+      <p:sp>
+        <p:nvSpPr>
+          <p:cNvPr id="20" name="Rectangle 19"/>
+          <p:cNvSpPr/>
+          <p:nvPr/>
+        </p:nvSpPr>
+        <p:spPr>
+          <a:xfrm>
+            <a:off x="640080" y="2112264"/>
+            <a:ext cx="10917936" cy="356616"/>
+          </a:xfrm>
+          <a:prstGeom prst="rect">
+            <a:avLst/>
+          </a:prstGeom>
+          <a:solidFill>
+            <a:srgbClr val="F8FAFC"/>
+          </a:solidFill>
+          <a:ln>
+            <a:noFill/>
+          </a:ln>
+        </p:spPr>
+        <p:style>
+          <a:lnRef idx="1">
+            <a:schemeClr val="accent1"/>
+          </a:lnRef>
+          <a:fillRef idx="3">
+            <a:schemeClr val="accent1"/>
+          </a:fillRef>
+          <a:effectRef idx="2">
+            <a:schemeClr val="accent1"/>
+          </a:effectRef>
+          <a:fontRef idx="minor">
+            <a:schemeClr val="lt1"/>
+          </a:fontRef>
+        </p:style>
+        <p:txBody>
+          <a:bodyPr rtlCol="0" anchor="ctr"/>
+          <a:lstStyle/>
+          <a:p>
+            <a:pPr algn="ctr"/>
+          </a:p>
+        </p:txBody>
+      </p:sp>
+      <p:sp>
+        <p:nvSpPr>
+          <p:cNvPr id="21" name="TextBox 20"/>
+          <p:cNvSpPr txBox="1"/>
+          <p:nvPr/>
+        </p:nvSpPr>
+        <p:spPr>
+          <a:xfrm>
+            <a:off x="713232" y="2130552"/>
+            <a:ext cx="960120" cy="320040"/>
+          </a:xfrm>
+          <a:prstGeom prst="rect">
+            <a:avLst/>
+          </a:prstGeom>
+          <a:noFill/>
+        </p:spPr>
+        <p:txBody>
+          <a:bodyPr wrap="square" lIns="0" rIns="0" tIns="0" bIns="0" anchor="ctr">
+            <a:spAutoFit/>
+          </a:bodyPr>
+          <a:lstStyle/>
+          <a:p>
+            <a:pPr algn="l">
+              <a:spcBef>
+                <a:spcPts val="0"/>
+              </a:spcBef>
+              <a:spcAft>
+                <a:spcPts val="0"/>
+              </a:spcAft>
+            </a:pPr>
+            <a:r>
+              <a:rPr sz="869" b="1">
+                <a:solidFill>
+                  <a:srgbClr val="185FA5"/>
+                </a:solidFill>
+                <a:latin typeface="Noto Sans KR"/>
+                <a:ea typeface="Noto Sans KR"/>
+                <a:cs typeface="Noto Sans KR"/>
+              </a:rPr>
+              <a:t>S320</a:t>
+            </a:r>
+          </a:p>
+        </p:txBody>
+      </p:sp>
+      <p:sp>
+        <p:nvSpPr>
+          <p:cNvPr id="22" name="TextBox 21"/>
+          <p:cNvSpPr txBox="1"/>
+          <p:nvPr/>
+        </p:nvSpPr>
+        <p:spPr>
+          <a:xfrm>
+            <a:off x="1673352" y="2130552"/>
+            <a:ext cx="1143000" cy="320040"/>
+          </a:xfrm>
+          <a:prstGeom prst="rect">
+            <a:avLst/>
+          </a:prstGeom>
+          <a:noFill/>
+        </p:spPr>
+        <p:txBody>
+          <a:bodyPr wrap="square" lIns="0" rIns="0" tIns="0" bIns="0" anchor="ctr">
+            <a:spAutoFit/>
+          </a:bodyPr>
+          <a:lstStyle/>
+          <a:p>
+            <a:pPr algn="l">
+              <a:spcBef>
+                <a:spcPts val="0"/>
+              </a:spcBef>
+              <a:spcAft>
+                <a:spcPts val="0"/>
+              </a:spcAft>
+            </a:pPr>
+            <a:r>
+              <a:rPr sz="869" b="1">
+                <a:solidFill>
+                  <a:srgbClr val="1D9E75"/>
+                </a:solidFill>
+                <a:latin typeface="Noto Sans KR"/>
+                <a:ea typeface="Noto Sans KR"/>
+                <a:cs typeface="Noto Sans KR"/>
+              </a:rPr>
+              <a:t>요청내</a:t>
+            </a:r>
+          </a:p>
+        </p:txBody>
+      </p:sp>
+      <p:sp>
+        <p:nvSpPr>
+          <p:cNvPr id="23" name="TextBox 22"/>
+          <p:cNvSpPr txBox="1"/>
+          <p:nvPr/>
+        </p:nvSpPr>
+        <p:spPr>
+          <a:xfrm>
+            <a:off x="2816352" y="2130552"/>
+            <a:ext cx="7818120" cy="320040"/>
+          </a:xfrm>
+          <a:prstGeom prst="rect">
+            <a:avLst/>
+          </a:prstGeom>
+          <a:noFill/>
+        </p:spPr>
+        <p:txBody>
+          <a:bodyPr wrap="square" lIns="0" rIns="0" tIns="0" bIns="0" anchor="ctr">
+            <a:spAutoFit/>
+          </a:bodyPr>
+          <a:lstStyle/>
+          <a:p>
+            <a:pPr algn="l">
+              <a:spcBef>
+                <a:spcPts val="0"/>
+              </a:spcBef>
+              <a:spcAft>
+                <a:spcPts val="0"/>
+              </a:spcAft>
+            </a:pPr>
+            <a:r>
+              <a:rPr sz="840" b="0">
+                <a:solidFill>
+                  <a:srgbClr val="121A2A"/>
+                </a:solidFill>
+                <a:latin typeface="Noto Sans KR"/>
+                <a:ea typeface="Noto Sans KR"/>
+                <a:cs typeface="Noto Sans KR"/>
+              </a:rPr>
+              <a:t>Clalen O2O2 M_Micelia_Mute Brown_45%_2P</a:t>
+            </a:r>
+          </a:p>
+        </p:txBody>
+      </p:sp>
+      <p:sp>
+        <p:nvSpPr>
+          <p:cNvPr id="24" name="TextBox 23"/>
+          <p:cNvSpPr txBox="1"/>
+          <p:nvPr/>
+        </p:nvSpPr>
+        <p:spPr>
+          <a:xfrm>
+            <a:off x="10634472" y="2130552"/>
+            <a:ext cx="868680" cy="320040"/>
+          </a:xfrm>
+          <a:prstGeom prst="rect">
+            <a:avLst/>
+          </a:prstGeom>
+          <a:noFill/>
+        </p:spPr>
+        <p:txBody>
+          <a:bodyPr wrap="square" lIns="0" rIns="0" tIns="0" bIns="0" anchor="ctr">
+            <a:spAutoFit/>
+          </a:bodyPr>
+          <a:lstStyle/>
+          <a:p>
+            <a:pPr algn="r">
+              <a:spcBef>
+                <a:spcPts val="0"/>
+              </a:spcBef>
+              <a:spcAft>
+                <a:spcPts val="0"/>
+              </a:spcAft>
+            </a:pPr>
+            <a:r>
+              <a:rPr sz="869" b="1">
+                <a:solidFill>
+                  <a:srgbClr val="D85A30"/>
+                </a:solidFill>
+                <a:latin typeface="Noto Sans KR"/>
+                <a:ea typeface="Noto Sans KR"/>
+                <a:cs typeface="Noto Sans KR"/>
+              </a:rPr>
+              <a:t>9</a:t>
+            </a:r>
+          </a:p>
+        </p:txBody>
+      </p:sp>
+      <p:sp>
+        <p:nvSpPr>
+          <p:cNvPr id="25" name="Rectangle 24"/>
+          <p:cNvSpPr/>
+          <p:nvPr/>
+        </p:nvSpPr>
+        <p:spPr>
+          <a:xfrm>
+            <a:off x="658368" y="2468880"/>
+            <a:ext cx="10881360" cy="9144"/>
+          </a:xfrm>
+          <a:prstGeom prst="rect">
+            <a:avLst/>
+          </a:prstGeom>
+          <a:solidFill>
+            <a:srgbClr val="F1F4F8"/>
+          </a:solidFill>
+          <a:ln>
+            <a:noFill/>
+          </a:ln>
+        </p:spPr>
+        <p:style>
+          <a:lnRef idx="1">
+            <a:schemeClr val="accent1"/>
+          </a:lnRef>
+          <a:fillRef idx="3">
+            <a:schemeClr val="accent1"/>
+          </a:fillRef>
+          <a:effectRef idx="2">
+            <a:schemeClr val="accent1"/>
+          </a:effectRef>
+          <a:fontRef idx="minor">
+            <a:schemeClr val="lt1"/>
+          </a:fontRef>
+        </p:style>
+        <p:txBody>
+          <a:bodyPr rtlCol="0" anchor="ctr"/>
+          <a:lstStyle/>
+          <a:p>
+            <a:pPr algn="ctr"/>
+          </a:p>
+        </p:txBody>
+      </p:sp>
+      <p:sp>
+        <p:nvSpPr>
+          <p:cNvPr id="26" name="TextBox 25"/>
+          <p:cNvSpPr txBox="1"/>
+          <p:nvPr/>
+        </p:nvSpPr>
+        <p:spPr>
+          <a:xfrm>
+            <a:off x="713232" y="2487168"/>
+            <a:ext cx="960120" cy="320040"/>
+          </a:xfrm>
+          <a:prstGeom prst="rect">
+            <a:avLst/>
+          </a:prstGeom>
+          <a:noFill/>
+        </p:spPr>
+        <p:txBody>
+          <a:bodyPr wrap="square" lIns="0" rIns="0" tIns="0" bIns="0" anchor="ctr">
+            <a:spAutoFit/>
+          </a:bodyPr>
+          <a:lstStyle/>
+          <a:p>
+            <a:pPr algn="l">
+              <a:spcBef>
+                <a:spcPts val="0"/>
+              </a:spcBef>
+              <a:spcAft>
+                <a:spcPts val="0"/>
+              </a:spcAft>
+            </a:pPr>
+            <a:r>
+              <a:rPr sz="869" b="1">
+                <a:solidFill>
+                  <a:srgbClr val="185FA5"/>
+                </a:solidFill>
+                <a:latin typeface="Noto Sans KR"/>
+                <a:ea typeface="Noto Sans KR"/>
+                <a:cs typeface="Noto Sans KR"/>
+              </a:rPr>
+              <a:t>S154</a:t>
+            </a:r>
+          </a:p>
+        </p:txBody>
+      </p:sp>
+      <p:sp>
+        <p:nvSpPr>
+          <p:cNvPr id="27" name="TextBox 26"/>
+          <p:cNvSpPr txBox="1"/>
+          <p:nvPr/>
+        </p:nvSpPr>
+        <p:spPr>
+          <a:xfrm>
+            <a:off x="1673352" y="2487168"/>
+            <a:ext cx="1143000" cy="320040"/>
+          </a:xfrm>
+          <a:prstGeom prst="rect">
+            <a:avLst/>
+          </a:prstGeom>
+          <a:noFill/>
+        </p:spPr>
+        <p:txBody>
+          <a:bodyPr wrap="square" lIns="0" rIns="0" tIns="0" bIns="0" anchor="ctr">
+            <a:spAutoFit/>
+          </a:bodyPr>
+          <a:lstStyle/>
+          <a:p>
+            <a:pPr algn="l">
+              <a:spcBef>
+                <a:spcPts val="0"/>
+              </a:spcBef>
+              <a:spcAft>
+                <a:spcPts val="0"/>
+              </a:spcAft>
+            </a:pPr>
+            <a:r>
+              <a:rPr sz="869" b="1">
+                <a:solidFill>
+                  <a:srgbClr val="1D9E75"/>
+                </a:solidFill>
+                <a:latin typeface="Noto Sans KR"/>
+                <a:ea typeface="Noto Sans KR"/>
+                <a:cs typeface="Noto Sans KR"/>
+              </a:rPr>
+              <a:t>요청내</a:t>
+            </a:r>
+          </a:p>
+        </p:txBody>
+      </p:sp>
+      <p:sp>
+        <p:nvSpPr>
+          <p:cNvPr id="28" name="TextBox 27"/>
+          <p:cNvSpPr txBox="1"/>
+          <p:nvPr/>
+        </p:nvSpPr>
+        <p:spPr>
+          <a:xfrm>
+            <a:off x="2816352" y="2487168"/>
+            <a:ext cx="7818120" cy="320040"/>
+          </a:xfrm>
+          <a:prstGeom prst="rect">
+            <a:avLst/>
+          </a:prstGeom>
+          <a:noFill/>
+        </p:spPr>
+        <p:txBody>
+          <a:bodyPr wrap="square" lIns="0" rIns="0" tIns="0" bIns="0" anchor="ctr">
+            <a:spAutoFit/>
+          </a:bodyPr>
+          <a:lstStyle/>
+          <a:p>
+            <a:pPr algn="l">
+              <a:spcBef>
+                <a:spcPts val="0"/>
+              </a:spcBef>
+              <a:spcAft>
+                <a:spcPts val="0"/>
+              </a:spcAft>
+            </a:pPr>
+            <a:r>
+              <a:rPr sz="840" b="0">
+                <a:solidFill>
+                  <a:srgbClr val="121A2A"/>
+                </a:solidFill>
+                <a:latin typeface="Noto Sans KR"/>
+                <a:ea typeface="Noto Sans KR"/>
+                <a:cs typeface="Noto Sans KR"/>
+              </a:rPr>
+              <a:t>Iris Toric Halo Brown_30</a:t>
+            </a:r>
+          </a:p>
+        </p:txBody>
+      </p:sp>
+      <p:sp>
+        <p:nvSpPr>
+          <p:cNvPr id="29" name="TextBox 28"/>
+          <p:cNvSpPr txBox="1"/>
+          <p:nvPr/>
+        </p:nvSpPr>
+        <p:spPr>
+          <a:xfrm>
+            <a:off x="10634472" y="2487168"/>
+            <a:ext cx="868680" cy="320040"/>
+          </a:xfrm>
+          <a:prstGeom prst="rect">
+            <a:avLst/>
+          </a:prstGeom>
+          <a:noFill/>
+        </p:spPr>
+        <p:txBody>
+          <a:bodyPr wrap="square" lIns="0" rIns="0" tIns="0" bIns="0" anchor="ctr">
+            <a:spAutoFit/>
+          </a:bodyPr>
+          <a:lstStyle/>
+          <a:p>
+            <a:pPr algn="r">
+              <a:spcBef>
+                <a:spcPts val="0"/>
+              </a:spcBef>
+              <a:spcAft>
+                <a:spcPts val="0"/>
+              </a:spcAft>
+            </a:pPr>
+            <a:r>
+              <a:rPr sz="869" b="1">
+                <a:solidFill>
+                  <a:srgbClr val="D85A30"/>
+                </a:solidFill>
+                <a:latin typeface="Noto Sans KR"/>
+                <a:ea typeface="Noto Sans KR"/>
+                <a:cs typeface="Noto Sans KR"/>
+              </a:rPr>
+              <a:t>5</a:t>
+            </a:r>
+          </a:p>
+        </p:txBody>
+      </p:sp>
+      <p:sp>
+        <p:nvSpPr>
+          <p:cNvPr id="30" name="Rectangle 29"/>
+          <p:cNvSpPr/>
+          <p:nvPr/>
+        </p:nvSpPr>
+        <p:spPr>
+          <a:xfrm>
+            <a:off x="658368" y="2825496"/>
+            <a:ext cx="10881360" cy="9144"/>
+          </a:xfrm>
+          <a:prstGeom prst="rect">
+            <a:avLst/>
+          </a:prstGeom>
+          <a:solidFill>
+            <a:srgbClr val="F1F4F8"/>
+          </a:solidFill>
+          <a:ln>
+            <a:noFill/>
+          </a:ln>
+        </p:spPr>
+        <p:style>
+          <a:lnRef idx="1">
+            <a:schemeClr val="accent1"/>
+          </a:lnRef>
+          <a:fillRef idx="3">
+            <a:schemeClr val="accent1"/>
+          </a:fillRef>
+          <a:effectRef idx="2">
+            <a:schemeClr val="accent1"/>
+          </a:effectRef>
+          <a:fontRef idx="minor">
+            <a:schemeClr val="lt1"/>
+          </a:fontRef>
+        </p:style>
+        <p:txBody>
+          <a:bodyPr rtlCol="0" anchor="ctr"/>
+          <a:lstStyle/>
+          <a:p>
+            <a:pPr algn="ctr"/>
+          </a:p>
+        </p:txBody>
+      </p:sp>
+      <p:sp>
+        <p:nvSpPr>
+          <p:cNvPr id="31" name="Rectangle 30"/>
+          <p:cNvSpPr/>
+          <p:nvPr/>
+        </p:nvSpPr>
+        <p:spPr>
+          <a:xfrm>
+            <a:off x="640080" y="2825496"/>
+            <a:ext cx="10917936" cy="356616"/>
+          </a:xfrm>
+          <a:prstGeom prst="rect">
+            <a:avLst/>
+          </a:prstGeom>
+          <a:solidFill>
+            <a:srgbClr val="F8FAFC"/>
+          </a:solidFill>
+          <a:ln>
+            <a:noFill/>
+          </a:ln>
+        </p:spPr>
+        <p:style>
+          <a:lnRef idx="1">
+            <a:schemeClr val="accent1"/>
+          </a:lnRef>
+          <a:fillRef idx="3">
+            <a:schemeClr val="accent1"/>
+          </a:fillRef>
+          <a:effectRef idx="2">
+            <a:schemeClr val="accent1"/>
+          </a:effectRef>
+          <a:fontRef idx="minor">
+            <a:schemeClr val="lt1"/>
+          </a:fontRef>
+        </p:style>
+        <p:txBody>
+          <a:bodyPr rtlCol="0" anchor="ctr"/>
+          <a:lstStyle/>
+          <a:p>
+            <a:pPr algn="ctr"/>
+          </a:p>
+        </p:txBody>
+      </p:sp>
+      <p:sp>
+        <p:nvSpPr>
+          <p:cNvPr id="32" name="TextBox 31"/>
+          <p:cNvSpPr txBox="1"/>
+          <p:nvPr/>
+        </p:nvSpPr>
+        <p:spPr>
+          <a:xfrm>
+            <a:off x="713232" y="2843784"/>
+            <a:ext cx="960120" cy="320040"/>
+          </a:xfrm>
+          <a:prstGeom prst="rect">
+            <a:avLst/>
+          </a:prstGeom>
+          <a:noFill/>
+        </p:spPr>
+        <p:txBody>
+          <a:bodyPr wrap="square" lIns="0" rIns="0" tIns="0" bIns="0" anchor="ctr">
+            <a:spAutoFit/>
+          </a:bodyPr>
+          <a:lstStyle/>
+          <a:p>
+            <a:pPr algn="l">
+              <a:spcBef>
+                <a:spcPts val="0"/>
+              </a:spcBef>
+              <a:spcAft>
+                <a:spcPts val="0"/>
+              </a:spcAft>
+            </a:pPr>
+            <a:r>
+              <a:rPr sz="869" b="1">
+                <a:solidFill>
+                  <a:srgbClr val="185FA5"/>
+                </a:solidFill>
+                <a:latin typeface="Noto Sans KR"/>
+                <a:ea typeface="Noto Sans KR"/>
+                <a:cs typeface="Noto Sans KR"/>
+              </a:rPr>
+              <a:t>S309</a:t>
+            </a:r>
+          </a:p>
+        </p:txBody>
+      </p:sp>
+      <p:sp>
+        <p:nvSpPr>
+          <p:cNvPr id="33" name="TextBox 32"/>
+          <p:cNvSpPr txBox="1"/>
+          <p:nvPr/>
+        </p:nvSpPr>
+        <p:spPr>
+          <a:xfrm>
+            <a:off x="1673352" y="2843784"/>
+            <a:ext cx="1143000" cy="320040"/>
+          </a:xfrm>
+          <a:prstGeom prst="rect">
+            <a:avLst/>
+          </a:prstGeom>
+          <a:noFill/>
+        </p:spPr>
+        <p:txBody>
+          <a:bodyPr wrap="square" lIns="0" rIns="0" tIns="0" bIns="0" anchor="ctr">
+            <a:spAutoFit/>
+          </a:bodyPr>
+          <a:lstStyle/>
+          <a:p>
+            <a:pPr algn="l">
+              <a:spcBef>
+                <a:spcPts val="0"/>
+              </a:spcBef>
+              <a:spcAft>
+                <a:spcPts val="0"/>
+              </a:spcAft>
+            </a:pPr>
+            <a:r>
+              <a:rPr sz="869" b="1">
+                <a:solidFill>
+                  <a:srgbClr val="1D9E75"/>
+                </a:solidFill>
+                <a:latin typeface="Noto Sans KR"/>
+                <a:ea typeface="Noto Sans KR"/>
+                <a:cs typeface="Noto Sans KR"/>
+              </a:rPr>
+              <a:t>요청내</a:t>
+            </a:r>
+          </a:p>
+        </p:txBody>
+      </p:sp>
+      <p:sp>
+        <p:nvSpPr>
+          <p:cNvPr id="34" name="TextBox 33"/>
+          <p:cNvSpPr txBox="1"/>
+          <p:nvPr/>
+        </p:nvSpPr>
+        <p:spPr>
+          <a:xfrm>
+            <a:off x="2816352" y="2843784"/>
+            <a:ext cx="7818120" cy="320040"/>
+          </a:xfrm>
+          <a:prstGeom prst="rect">
+            <a:avLst/>
+          </a:prstGeom>
+          <a:noFill/>
+        </p:spPr>
+        <p:txBody>
+          <a:bodyPr wrap="square" lIns="0" rIns="0" tIns="0" bIns="0" anchor="ctr">
+            <a:spAutoFit/>
+          </a:bodyPr>
+          <a:lstStyle/>
+          <a:p>
+            <a:pPr algn="l">
+              <a:spcBef>
+                <a:spcPts val="0"/>
+              </a:spcBef>
+              <a:spcAft>
+                <a:spcPts val="0"/>
+              </a:spcAft>
+            </a:pPr>
+            <a:r>
+              <a:rPr sz="840" b="0">
+                <a:solidFill>
+                  <a:srgbClr val="121A2A"/>
+                </a:solidFill>
+                <a:latin typeface="Noto Sans KR"/>
+                <a:ea typeface="Noto Sans KR"/>
+                <a:cs typeface="Noto Sans KR"/>
+              </a:rPr>
+              <a:t>Clalen O2O2 D_Micelia_Mute Brown_10P</a:t>
+            </a:r>
+          </a:p>
+        </p:txBody>
+      </p:sp>
+      <p:sp>
+        <p:nvSpPr>
+          <p:cNvPr id="35" name="TextBox 34"/>
+          <p:cNvSpPr txBox="1"/>
+          <p:nvPr/>
+        </p:nvSpPr>
+        <p:spPr>
+          <a:xfrm>
+            <a:off x="10634472" y="2843784"/>
+            <a:ext cx="868680" cy="320040"/>
+          </a:xfrm>
+          <a:prstGeom prst="rect">
+            <a:avLst/>
+          </a:prstGeom>
+          <a:noFill/>
+        </p:spPr>
+        <p:txBody>
+          <a:bodyPr wrap="square" lIns="0" rIns="0" tIns="0" bIns="0" anchor="ctr">
+            <a:spAutoFit/>
+          </a:bodyPr>
+          <a:lstStyle/>
+          <a:p>
+            <a:pPr algn="r">
+              <a:spcBef>
+                <a:spcPts val="0"/>
+              </a:spcBef>
+              <a:spcAft>
+                <a:spcPts val="0"/>
+              </a:spcAft>
+            </a:pPr>
+            <a:r>
+              <a:rPr sz="869" b="1">
+                <a:solidFill>
+                  <a:srgbClr val="D85A30"/>
+                </a:solidFill>
+                <a:latin typeface="Noto Sans KR"/>
+                <a:ea typeface="Noto Sans KR"/>
+                <a:cs typeface="Noto Sans KR"/>
+              </a:rPr>
+              <a:t>4</a:t>
+            </a:r>
+          </a:p>
+        </p:txBody>
+      </p:sp>
+      <p:sp>
+        <p:nvSpPr>
+          <p:cNvPr id="36" name="Rectangle 35"/>
+          <p:cNvSpPr/>
+          <p:nvPr/>
+        </p:nvSpPr>
+        <p:spPr>
+          <a:xfrm>
+            <a:off x="658368" y="3182112"/>
+            <a:ext cx="10881360" cy="9144"/>
+          </a:xfrm>
+          <a:prstGeom prst="rect">
+            <a:avLst/>
+          </a:prstGeom>
+          <a:solidFill>
+            <a:srgbClr val="F1F4F8"/>
+          </a:solidFill>
+          <a:ln>
+            <a:noFill/>
+          </a:ln>
+        </p:spPr>
+        <p:style>
+          <a:lnRef idx="1">
+            <a:schemeClr val="accent1"/>
+          </a:lnRef>
+          <a:fillRef idx="3">
+            <a:schemeClr val="accent1"/>
+          </a:fillRef>
+          <a:effectRef idx="2">
+            <a:schemeClr val="accent1"/>
+          </a:effectRef>
+          <a:fontRef idx="minor">
+            <a:schemeClr val="lt1"/>
+          </a:fontRef>
+        </p:style>
+        <p:txBody>
+          <a:bodyPr rtlCol="0" anchor="ctr"/>
+          <a:lstStyle/>
+          <a:p>
+            <a:pPr algn="ctr"/>
+          </a:p>
+        </p:txBody>
+      </p:sp>
+      <p:sp>
+        <p:nvSpPr>
+          <p:cNvPr id="37" name="TextBox 36"/>
+          <p:cNvSpPr txBox="1"/>
+          <p:nvPr/>
+        </p:nvSpPr>
+        <p:spPr>
+          <a:xfrm>
+            <a:off x="713232" y="3200400"/>
+            <a:ext cx="960120" cy="320040"/>
+          </a:xfrm>
+          <a:prstGeom prst="rect">
+            <a:avLst/>
+          </a:prstGeom>
+          <a:noFill/>
+        </p:spPr>
+        <p:txBody>
+          <a:bodyPr wrap="square" lIns="0" rIns="0" tIns="0" bIns="0" anchor="ctr">
+            <a:spAutoFit/>
+          </a:bodyPr>
+          <a:lstStyle/>
+          <a:p>
+            <a:pPr algn="l">
+              <a:spcBef>
+                <a:spcPts val="0"/>
+              </a:spcBef>
+              <a:spcAft>
+                <a:spcPts val="0"/>
+              </a:spcAft>
+            </a:pPr>
+            <a:r>
+              <a:rPr sz="869" b="1">
+                <a:solidFill>
+                  <a:srgbClr val="185FA5"/>
+                </a:solidFill>
+                <a:latin typeface="Noto Sans KR"/>
+                <a:ea typeface="Noto Sans KR"/>
+                <a:cs typeface="Noto Sans KR"/>
+              </a:rPr>
+              <a:t>S159</a:t>
+            </a:r>
+          </a:p>
+        </p:txBody>
+      </p:sp>
+      <p:sp>
+        <p:nvSpPr>
+          <p:cNvPr id="38" name="TextBox 37"/>
+          <p:cNvSpPr txBox="1"/>
+          <p:nvPr/>
+        </p:nvSpPr>
+        <p:spPr>
+          <a:xfrm>
+            <a:off x="1673352" y="3200400"/>
+            <a:ext cx="1143000" cy="320040"/>
+          </a:xfrm>
+          <a:prstGeom prst="rect">
+            <a:avLst/>
+          </a:prstGeom>
+          <a:noFill/>
+        </p:spPr>
+        <p:txBody>
+          <a:bodyPr wrap="square" lIns="0" rIns="0" tIns="0" bIns="0" anchor="ctr">
+            <a:spAutoFit/>
+          </a:bodyPr>
+          <a:lstStyle/>
+          <a:p>
+            <a:pPr algn="l">
+              <a:spcBef>
+                <a:spcPts val="0"/>
+              </a:spcBef>
+              <a:spcAft>
+                <a:spcPts val="0"/>
+              </a:spcAft>
+            </a:pPr>
+            <a:r>
+              <a:rPr sz="869" b="1">
+                <a:solidFill>
+                  <a:srgbClr val="1D9E75"/>
+                </a:solidFill>
+                <a:latin typeface="Noto Sans KR"/>
+                <a:ea typeface="Noto Sans KR"/>
+                <a:cs typeface="Noto Sans KR"/>
+              </a:rPr>
+              <a:t>요청내</a:t>
+            </a:r>
+          </a:p>
+        </p:txBody>
+      </p:sp>
+      <p:sp>
+        <p:nvSpPr>
+          <p:cNvPr id="39" name="TextBox 38"/>
+          <p:cNvSpPr txBox="1"/>
+          <p:nvPr/>
+        </p:nvSpPr>
+        <p:spPr>
+          <a:xfrm>
+            <a:off x="2816352" y="3200400"/>
+            <a:ext cx="7818120" cy="320040"/>
+          </a:xfrm>
+          <a:prstGeom prst="rect">
+            <a:avLst/>
+          </a:prstGeom>
+          <a:noFill/>
+        </p:spPr>
+        <p:txBody>
+          <a:bodyPr wrap="square" lIns="0" rIns="0" tIns="0" bIns="0" anchor="ctr">
+            <a:spAutoFit/>
+          </a:bodyPr>
+          <a:lstStyle/>
+          <a:p>
+            <a:pPr algn="l">
+              <a:spcBef>
+                <a:spcPts val="0"/>
+              </a:spcBef>
+              <a:spcAft>
+                <a:spcPts val="0"/>
+              </a:spcAft>
+            </a:pPr>
+            <a:r>
+              <a:rPr sz="840" b="0">
+                <a:solidFill>
+                  <a:srgbClr val="121A2A"/>
+                </a:solidFill>
+                <a:latin typeface="Noto Sans KR"/>
+                <a:ea typeface="Noto Sans KR"/>
+                <a:cs typeface="Noto Sans KR"/>
+              </a:rPr>
+              <a:t>Iris Toric Halo Gray_30</a:t>
+            </a:r>
+          </a:p>
+        </p:txBody>
+      </p:sp>
+      <p:sp>
+        <p:nvSpPr>
+          <p:cNvPr id="40" name="TextBox 39"/>
+          <p:cNvSpPr txBox="1"/>
+          <p:nvPr/>
+        </p:nvSpPr>
+        <p:spPr>
+          <a:xfrm>
+            <a:off x="10634472" y="3200400"/>
+            <a:ext cx="868680" cy="320040"/>
+          </a:xfrm>
+          <a:prstGeom prst="rect">
+            <a:avLst/>
+          </a:prstGeom>
+          <a:noFill/>
+        </p:spPr>
+        <p:txBody>
+          <a:bodyPr wrap="square" lIns="0" rIns="0" tIns="0" bIns="0" anchor="ctr">
+            <a:spAutoFit/>
+          </a:bodyPr>
+          <a:lstStyle/>
+          <a:p>
+            <a:pPr algn="r">
+              <a:spcBef>
+                <a:spcPts val="0"/>
+              </a:spcBef>
+              <a:spcAft>
+                <a:spcPts val="0"/>
+              </a:spcAft>
+            </a:pPr>
+            <a:r>
+              <a:rPr sz="869" b="1">
+                <a:solidFill>
+                  <a:srgbClr val="D85A30"/>
+                </a:solidFill>
+                <a:latin typeface="Noto Sans KR"/>
+                <a:ea typeface="Noto Sans KR"/>
+                <a:cs typeface="Noto Sans KR"/>
+              </a:rPr>
+              <a:t>3</a:t>
+            </a:r>
+          </a:p>
+        </p:txBody>
+      </p:sp>
+      <p:sp>
+        <p:nvSpPr>
+          <p:cNvPr id="41" name="Rectangle 40"/>
+          <p:cNvSpPr/>
+          <p:nvPr/>
+        </p:nvSpPr>
+        <p:spPr>
+          <a:xfrm>
+            <a:off x="658368" y="3538728"/>
+            <a:ext cx="10881360" cy="9144"/>
+          </a:xfrm>
+          <a:prstGeom prst="rect">
+            <a:avLst/>
+          </a:prstGeom>
+          <a:solidFill>
+            <a:srgbClr val="F1F4F8"/>
+          </a:solidFill>
+          <a:ln>
+            <a:noFill/>
+          </a:ln>
+        </p:spPr>
+        <p:style>
+          <a:lnRef idx="1">
+            <a:schemeClr val="accent1"/>
+          </a:lnRef>
+          <a:fillRef idx="3">
+            <a:schemeClr val="accent1"/>
+          </a:fillRef>
+          <a:effectRef idx="2">
+            <a:schemeClr val="accent1"/>
+          </a:effectRef>
+          <a:fontRef idx="minor">
+            <a:schemeClr val="lt1"/>
+          </a:fontRef>
+        </p:style>
+        <p:txBody>
+          <a:bodyPr rtlCol="0" anchor="ctr"/>
+          <a:lstStyle/>
+          <a:p>
+            <a:pPr algn="ctr"/>
+          </a:p>
+        </p:txBody>
+      </p:sp>
+      <p:sp>
+        <p:nvSpPr>
+          <p:cNvPr id="42" name="Rectangle 41"/>
+          <p:cNvSpPr/>
+          <p:nvPr/>
+        </p:nvSpPr>
+        <p:spPr>
+          <a:xfrm>
+            <a:off x="640080" y="3538728"/>
+            <a:ext cx="10917936" cy="356616"/>
+          </a:xfrm>
+          <a:prstGeom prst="rect">
+            <a:avLst/>
+          </a:prstGeom>
+          <a:solidFill>
+            <a:srgbClr val="F8FAFC"/>
+          </a:solidFill>
+          <a:ln>
+            <a:noFill/>
+          </a:ln>
+        </p:spPr>
+        <p:style>
+          <a:lnRef idx="1">
+            <a:schemeClr val="accent1"/>
+          </a:lnRef>
+          <a:fillRef idx="3">
+            <a:schemeClr val="accent1"/>
+          </a:fillRef>
+          <a:effectRef idx="2">
+            <a:schemeClr val="accent1"/>
+          </a:effectRef>
+          <a:fontRef idx="minor">
+            <a:schemeClr val="lt1"/>
+          </a:fontRef>
+        </p:style>
+        <p:txBody>
+          <a:bodyPr rtlCol="0" anchor="ctr"/>
+          <a:lstStyle/>
+          <a:p>
+            <a:pPr algn="ctr"/>
+          </a:p>
+        </p:txBody>
+      </p:sp>
+      <p:sp>
+        <p:nvSpPr>
+          <p:cNvPr id="43" name="TextBox 42"/>
+          <p:cNvSpPr txBox="1"/>
+          <p:nvPr/>
+        </p:nvSpPr>
+        <p:spPr>
+          <a:xfrm>
+            <a:off x="713232" y="3557016"/>
+            <a:ext cx="960120" cy="320040"/>
+          </a:xfrm>
+          <a:prstGeom prst="rect">
+            <a:avLst/>
+          </a:prstGeom>
+          <a:noFill/>
+        </p:spPr>
+        <p:txBody>
+          <a:bodyPr wrap="square" lIns="0" rIns="0" tIns="0" bIns="0" anchor="ctr">
+            <a:spAutoFit/>
+          </a:bodyPr>
+          <a:lstStyle/>
+          <a:p>
+            <a:pPr algn="l">
+              <a:spcBef>
+                <a:spcPts val="0"/>
+              </a:spcBef>
+              <a:spcAft>
+                <a:spcPts val="0"/>
+              </a:spcAft>
+            </a:pPr>
+            <a:r>
+              <a:rPr sz="869" b="1">
+                <a:solidFill>
+                  <a:srgbClr val="185FA5"/>
+                </a:solidFill>
+                <a:latin typeface="Noto Sans KR"/>
+                <a:ea typeface="Noto Sans KR"/>
+                <a:cs typeface="Noto Sans KR"/>
+              </a:rPr>
+              <a:t>S548</a:t>
+            </a:r>
+          </a:p>
+        </p:txBody>
+      </p:sp>
+      <p:sp>
+        <p:nvSpPr>
+          <p:cNvPr id="44" name="TextBox 43"/>
+          <p:cNvSpPr txBox="1"/>
+          <p:nvPr/>
+        </p:nvSpPr>
+        <p:spPr>
+          <a:xfrm>
+            <a:off x="1673352" y="3557016"/>
+            <a:ext cx="1143000" cy="320040"/>
+          </a:xfrm>
+          <a:prstGeom prst="rect">
+            <a:avLst/>
+          </a:prstGeom>
+          <a:noFill/>
+        </p:spPr>
+        <p:txBody>
+          <a:bodyPr wrap="square" lIns="0" rIns="0" tIns="0" bIns="0" anchor="ctr">
+            <a:spAutoFit/>
+          </a:bodyPr>
+          <a:lstStyle/>
+          <a:p>
+            <a:pPr algn="l">
+              <a:spcBef>
+                <a:spcPts val="0"/>
+              </a:spcBef>
+              <a:spcAft>
+                <a:spcPts val="0"/>
+              </a:spcAft>
+            </a:pPr>
+            <a:r>
+              <a:rPr sz="869" b="1">
+                <a:solidFill>
+                  <a:srgbClr val="D85A30"/>
+                </a:solidFill>
+                <a:latin typeface="Noto Sans KR"/>
+                <a:ea typeface="Noto Sans KR"/>
+                <a:cs typeface="Noto Sans KR"/>
+              </a:rPr>
+              <a:t>요청외</a:t>
+            </a:r>
+          </a:p>
+        </p:txBody>
+      </p:sp>
+      <p:sp>
+        <p:nvSpPr>
+          <p:cNvPr id="45" name="TextBox 44"/>
+          <p:cNvSpPr txBox="1"/>
+          <p:nvPr/>
+        </p:nvSpPr>
+        <p:spPr>
+          <a:xfrm>
+            <a:off x="2816352" y="3557016"/>
+            <a:ext cx="7818120" cy="320040"/>
+          </a:xfrm>
+          <a:prstGeom prst="rect">
+            <a:avLst/>
+          </a:prstGeom>
+          <a:noFill/>
+        </p:spPr>
+        <p:txBody>
+          <a:bodyPr wrap="square" lIns="0" rIns="0" tIns="0" bIns="0" anchor="ctr">
+            <a:spAutoFit/>
+          </a:bodyPr>
+          <a:lstStyle/>
+          <a:p>
+            <a:pPr algn="l">
+              <a:spcBef>
+                <a:spcPts val="0"/>
+              </a:spcBef>
+              <a:spcAft>
+                <a:spcPts val="0"/>
+              </a:spcAft>
+            </a:pPr>
+            <a:r>
+              <a:rPr sz="840" b="0">
+                <a:solidFill>
+                  <a:srgbClr val="121A2A"/>
+                </a:solidFill>
+                <a:latin typeface="Noto Sans KR"/>
+                <a:ea typeface="Noto Sans KR"/>
+                <a:cs typeface="Noto Sans KR"/>
+              </a:rPr>
+              <a:t>Clalen O2O2 M_6P</a:t>
+            </a:r>
+          </a:p>
+        </p:txBody>
+      </p:sp>
+      <p:sp>
+        <p:nvSpPr>
+          <p:cNvPr id="46" name="TextBox 45"/>
+          <p:cNvSpPr txBox="1"/>
+          <p:nvPr/>
+        </p:nvSpPr>
+        <p:spPr>
+          <a:xfrm>
+            <a:off x="10634472" y="3557016"/>
+            <a:ext cx="868680" cy="320040"/>
+          </a:xfrm>
+          <a:prstGeom prst="rect">
+            <a:avLst/>
+          </a:prstGeom>
+          <a:noFill/>
+        </p:spPr>
+        <p:txBody>
+          <a:bodyPr wrap="square" lIns="0" rIns="0" tIns="0" bIns="0" anchor="ctr">
+            <a:spAutoFit/>
+          </a:bodyPr>
+          <a:lstStyle/>
+          <a:p>
+            <a:pPr algn="r">
+              <a:spcBef>
+                <a:spcPts val="0"/>
+              </a:spcBef>
+              <a:spcAft>
+                <a:spcPts val="0"/>
+              </a:spcAft>
+            </a:pPr>
+            <a:r>
+              <a:rPr sz="869" b="1">
+                <a:solidFill>
+                  <a:srgbClr val="D85A30"/>
+                </a:solidFill>
+                <a:latin typeface="Noto Sans KR"/>
+                <a:ea typeface="Noto Sans KR"/>
+                <a:cs typeface="Noto Sans KR"/>
+              </a:rPr>
+              <a:t>3</a:t>
+            </a:r>
+          </a:p>
+        </p:txBody>
+      </p:sp>
+      <p:sp>
+        <p:nvSpPr>
+          <p:cNvPr id="47" name="Rectangle 46"/>
+          <p:cNvSpPr/>
+          <p:nvPr/>
+        </p:nvSpPr>
+        <p:spPr>
+          <a:xfrm>
+            <a:off x="658368" y="3895344"/>
+            <a:ext cx="10881360" cy="9144"/>
+          </a:xfrm>
+          <a:prstGeom prst="rect">
+            <a:avLst/>
+          </a:prstGeom>
+          <a:solidFill>
+            <a:srgbClr val="F1F4F8"/>
+          </a:solidFill>
+          <a:ln>
+            <a:noFill/>
+          </a:ln>
+        </p:spPr>
+        <p:style>
+          <a:lnRef idx="1">
+            <a:schemeClr val="accent1"/>
+          </a:lnRef>
+          <a:fillRef idx="3">
+            <a:schemeClr val="accent1"/>
+          </a:fillRef>
+          <a:effectRef idx="2">
+            <a:schemeClr val="accent1"/>
+          </a:effectRef>
+          <a:fontRef idx="minor">
+            <a:schemeClr val="lt1"/>
+          </a:fontRef>
+        </p:style>
+        <p:txBody>
+          <a:bodyPr rtlCol="0" anchor="ctr"/>
+          <a:lstStyle/>
+          <a:p>
+            <a:pPr algn="ctr"/>
+          </a:p>
+        </p:txBody>
+      </p:sp>
+      <p:sp>
+        <p:nvSpPr>
+          <p:cNvPr id="48" name="TextBox 47"/>
+          <p:cNvSpPr txBox="1"/>
+          <p:nvPr/>
+        </p:nvSpPr>
+        <p:spPr>
+          <a:xfrm>
+            <a:off x="713232" y="3913631"/>
+            <a:ext cx="960120" cy="320040"/>
+          </a:xfrm>
+          <a:prstGeom prst="rect">
+            <a:avLst/>
+          </a:prstGeom>
+          <a:noFill/>
+        </p:spPr>
+        <p:txBody>
+          <a:bodyPr wrap="square" lIns="0" rIns="0" tIns="0" bIns="0" anchor="ctr">
+            <a:spAutoFit/>
+          </a:bodyPr>
+          <a:lstStyle/>
+          <a:p>
+            <a:pPr algn="l">
+              <a:spcBef>
+                <a:spcPts val="0"/>
+              </a:spcBef>
+              <a:spcAft>
+                <a:spcPts val="0"/>
+              </a:spcAft>
+            </a:pPr>
+            <a:r>
+              <a:rPr sz="869" b="1">
+                <a:solidFill>
+                  <a:srgbClr val="185FA5"/>
+                </a:solidFill>
+                <a:latin typeface="Noto Sans KR"/>
+                <a:ea typeface="Noto Sans KR"/>
+                <a:cs typeface="Noto Sans KR"/>
+              </a:rPr>
+              <a:t>S611</a:t>
+            </a:r>
+          </a:p>
+        </p:txBody>
+      </p:sp>
+      <p:sp>
+        <p:nvSpPr>
+          <p:cNvPr id="49" name="TextBox 48"/>
+          <p:cNvSpPr txBox="1"/>
+          <p:nvPr/>
+        </p:nvSpPr>
+        <p:spPr>
+          <a:xfrm>
+            <a:off x="1673352" y="3913631"/>
+            <a:ext cx="1143000" cy="320040"/>
+          </a:xfrm>
+          <a:prstGeom prst="rect">
+            <a:avLst/>
+          </a:prstGeom>
+          <a:noFill/>
+        </p:spPr>
+        <p:txBody>
+          <a:bodyPr wrap="square" lIns="0" rIns="0" tIns="0" bIns="0" anchor="ctr">
+            <a:spAutoFit/>
+          </a:bodyPr>
+          <a:lstStyle/>
+          <a:p>
+            <a:pPr algn="l">
+              <a:spcBef>
+                <a:spcPts val="0"/>
+              </a:spcBef>
+              <a:spcAft>
+                <a:spcPts val="0"/>
+              </a:spcAft>
+            </a:pPr>
+            <a:r>
+              <a:rPr sz="869" b="1">
+                <a:solidFill>
+                  <a:srgbClr val="1D9E75"/>
+                </a:solidFill>
+                <a:latin typeface="Noto Sans KR"/>
+                <a:ea typeface="Noto Sans KR"/>
+                <a:cs typeface="Noto Sans KR"/>
+              </a:rPr>
+              <a:t>요청내</a:t>
+            </a:r>
+          </a:p>
+        </p:txBody>
+      </p:sp>
+      <p:sp>
+        <p:nvSpPr>
+          <p:cNvPr id="50" name="TextBox 49"/>
+          <p:cNvSpPr txBox="1"/>
+          <p:nvPr/>
+        </p:nvSpPr>
+        <p:spPr>
+          <a:xfrm>
+            <a:off x="2816352" y="3913631"/>
+            <a:ext cx="7818120" cy="320040"/>
+          </a:xfrm>
+          <a:prstGeom prst="rect">
+            <a:avLst/>
+          </a:prstGeom>
+          <a:noFill/>
+        </p:spPr>
+        <p:txBody>
+          <a:bodyPr wrap="square" lIns="0" rIns="0" tIns="0" bIns="0" anchor="ctr">
+            <a:spAutoFit/>
+          </a:bodyPr>
+          <a:lstStyle/>
+          <a:p>
+            <a:pPr algn="l">
+              <a:spcBef>
+                <a:spcPts val="0"/>
+              </a:spcBef>
+              <a:spcAft>
+                <a:spcPts val="0"/>
+              </a:spcAft>
+            </a:pPr>
+            <a:r>
+              <a:rPr sz="840" b="0">
+                <a:solidFill>
+                  <a:srgbClr val="121A2A"/>
+                </a:solidFill>
+                <a:latin typeface="Noto Sans KR"/>
+                <a:ea typeface="Noto Sans KR"/>
+                <a:cs typeface="Noto Sans KR"/>
+              </a:rPr>
+              <a:t>Clalen O2O2 M_Natural Chocolat EX_2P</a:t>
+            </a:r>
+          </a:p>
+        </p:txBody>
+      </p:sp>
+      <p:sp>
+        <p:nvSpPr>
+          <p:cNvPr id="51" name="TextBox 50"/>
+          <p:cNvSpPr txBox="1"/>
+          <p:nvPr/>
+        </p:nvSpPr>
+        <p:spPr>
+          <a:xfrm>
+            <a:off x="10634472" y="3913631"/>
+            <a:ext cx="868680" cy="320040"/>
+          </a:xfrm>
+          <a:prstGeom prst="rect">
+            <a:avLst/>
+          </a:prstGeom>
+          <a:noFill/>
+        </p:spPr>
+        <p:txBody>
+          <a:bodyPr wrap="square" lIns="0" rIns="0" tIns="0" bIns="0" anchor="ctr">
+            <a:spAutoFit/>
+          </a:bodyPr>
+          <a:lstStyle/>
+          <a:p>
+            <a:pPr algn="r">
+              <a:spcBef>
+                <a:spcPts val="0"/>
+              </a:spcBef>
+              <a:spcAft>
+                <a:spcPts val="0"/>
+              </a:spcAft>
+            </a:pPr>
+            <a:r>
+              <a:rPr sz="869" b="1">
+                <a:solidFill>
+                  <a:srgbClr val="D85A30"/>
+                </a:solidFill>
+                <a:latin typeface="Noto Sans KR"/>
+                <a:ea typeface="Noto Sans KR"/>
+                <a:cs typeface="Noto Sans KR"/>
+              </a:rPr>
+              <a:t>2</a:t>
+            </a:r>
+          </a:p>
+        </p:txBody>
+      </p:sp>
+      <p:sp>
+        <p:nvSpPr>
+          <p:cNvPr id="52" name="Rectangle 51"/>
+          <p:cNvSpPr/>
+          <p:nvPr/>
+        </p:nvSpPr>
+        <p:spPr>
+          <a:xfrm>
+            <a:off x="658368" y="4251959"/>
+            <a:ext cx="10881360" cy="9144"/>
+          </a:xfrm>
+          <a:prstGeom prst="rect">
+            <a:avLst/>
+          </a:prstGeom>
+          <a:solidFill>
+            <a:srgbClr val="F1F4F8"/>
+          </a:solidFill>
+          <a:ln>
+            <a:noFill/>
+          </a:ln>
+        </p:spPr>
+        <p:style>
+          <a:lnRef idx="1">
+            <a:schemeClr val="accent1"/>
+          </a:lnRef>
+          <a:fillRef idx="3">
+            <a:schemeClr val="accent1"/>
+          </a:fillRef>
+          <a:effectRef idx="2">
+            <a:schemeClr val="accent1"/>
+          </a:effectRef>
+          <a:fontRef idx="minor">
+            <a:schemeClr val="lt1"/>
+          </a:fontRef>
+        </p:style>
+        <p:txBody>
+          <a:bodyPr rtlCol="0" anchor="ctr"/>
+          <a:lstStyle/>
+          <a:p>
+            <a:pPr algn="ctr"/>
+          </a:p>
+        </p:txBody>
+      </p:sp>
+      <p:sp>
+        <p:nvSpPr>
+          <p:cNvPr id="53" name="Rectangle 52"/>
+          <p:cNvSpPr/>
+          <p:nvPr/>
+        </p:nvSpPr>
+        <p:spPr>
+          <a:xfrm>
+            <a:off x="640080" y="4251960"/>
+            <a:ext cx="10917936" cy="356616"/>
+          </a:xfrm>
+          <a:prstGeom prst="rect">
+            <a:avLst/>
+          </a:prstGeom>
+          <a:solidFill>
+            <a:srgbClr val="F8FAFC"/>
+          </a:solidFill>
+          <a:ln>
+            <a:noFill/>
+          </a:ln>
+        </p:spPr>
+        <p:style>
+          <a:lnRef idx="1">
+            <a:schemeClr val="accent1"/>
+          </a:lnRef>
+          <a:fillRef idx="3">
+            <a:schemeClr val="accent1"/>
+          </a:fillRef>
+          <a:effectRef idx="2">
+            <a:schemeClr val="accent1"/>
+          </a:effectRef>
+          <a:fontRef idx="minor">
+            <a:schemeClr val="lt1"/>
+          </a:fontRef>
+        </p:style>
+        <p:txBody>
+          <a:bodyPr rtlCol="0" anchor="ctr"/>
+          <a:lstStyle/>
+          <a:p>
+            <a:pPr algn="ctr"/>
+          </a:p>
+        </p:txBody>
+      </p:sp>
+      <p:sp>
+        <p:nvSpPr>
+          <p:cNvPr id="54" name="TextBox 53"/>
+          <p:cNvSpPr txBox="1"/>
+          <p:nvPr/>
+        </p:nvSpPr>
+        <p:spPr>
+          <a:xfrm>
+            <a:off x="713232" y="4270248"/>
+            <a:ext cx="960120" cy="320040"/>
+          </a:xfrm>
+          <a:prstGeom prst="rect">
+            <a:avLst/>
+          </a:prstGeom>
+          <a:noFill/>
+        </p:spPr>
+        <p:txBody>
+          <a:bodyPr wrap="square" lIns="0" rIns="0" tIns="0" bIns="0" anchor="ctr">
+            <a:spAutoFit/>
+          </a:bodyPr>
+          <a:lstStyle/>
+          <a:p>
+            <a:pPr algn="l">
+              <a:spcBef>
+                <a:spcPts val="0"/>
+              </a:spcBef>
+              <a:spcAft>
+                <a:spcPts val="0"/>
+              </a:spcAft>
+            </a:pPr>
+            <a:r>
+              <a:rPr sz="869" b="1">
+                <a:solidFill>
+                  <a:srgbClr val="185FA5"/>
+                </a:solidFill>
+                <a:latin typeface="Noto Sans KR"/>
+                <a:ea typeface="Noto Sans KR"/>
+                <a:cs typeface="Noto Sans KR"/>
+              </a:rPr>
+              <a:t>S147</a:t>
+            </a:r>
+          </a:p>
+        </p:txBody>
+      </p:sp>
+      <p:sp>
+        <p:nvSpPr>
+          <p:cNvPr id="55" name="TextBox 54"/>
+          <p:cNvSpPr txBox="1"/>
+          <p:nvPr/>
+        </p:nvSpPr>
+        <p:spPr>
+          <a:xfrm>
+            <a:off x="1673352" y="4270248"/>
+            <a:ext cx="1143000" cy="320040"/>
+          </a:xfrm>
+          <a:prstGeom prst="rect">
+            <a:avLst/>
+          </a:prstGeom>
+          <a:noFill/>
+        </p:spPr>
+        <p:txBody>
+          <a:bodyPr wrap="square" lIns="0" rIns="0" tIns="0" bIns="0" anchor="ctr">
+            <a:spAutoFit/>
+          </a:bodyPr>
+          <a:lstStyle/>
+          <a:p>
+            <a:pPr algn="l">
+              <a:spcBef>
+                <a:spcPts val="0"/>
+              </a:spcBef>
+              <a:spcAft>
+                <a:spcPts val="0"/>
+              </a:spcAft>
+            </a:pPr>
+            <a:r>
+              <a:rPr sz="869" b="1">
+                <a:solidFill>
+                  <a:srgbClr val="1D9E75"/>
+                </a:solidFill>
+                <a:latin typeface="Noto Sans KR"/>
+                <a:ea typeface="Noto Sans KR"/>
+                <a:cs typeface="Noto Sans KR"/>
+              </a:rPr>
+              <a:t>요청내</a:t>
+            </a:r>
+          </a:p>
+        </p:txBody>
+      </p:sp>
+      <p:sp>
+        <p:nvSpPr>
+          <p:cNvPr id="56" name="TextBox 55"/>
+          <p:cNvSpPr txBox="1"/>
+          <p:nvPr/>
+        </p:nvSpPr>
+        <p:spPr>
+          <a:xfrm>
+            <a:off x="2816352" y="4270248"/>
+            <a:ext cx="7818120" cy="320040"/>
+          </a:xfrm>
+          <a:prstGeom prst="rect">
+            <a:avLst/>
+          </a:prstGeom>
+          <a:noFill/>
+        </p:spPr>
+        <p:txBody>
+          <a:bodyPr wrap="square" lIns="0" rIns="0" tIns="0" bIns="0" anchor="ctr">
+            <a:spAutoFit/>
+          </a:bodyPr>
+          <a:lstStyle/>
+          <a:p>
+            <a:pPr algn="l">
+              <a:spcBef>
+                <a:spcPts val="0"/>
+              </a:spcBef>
+              <a:spcAft>
+                <a:spcPts val="0"/>
+              </a:spcAft>
+            </a:pPr>
+            <a:r>
+              <a:rPr sz="840" b="0">
+                <a:solidFill>
+                  <a:srgbClr val="121A2A"/>
+                </a:solidFill>
+                <a:latin typeface="Noto Sans KR"/>
+                <a:ea typeface="Noto Sans KR"/>
+                <a:cs typeface="Noto Sans KR"/>
+              </a:rPr>
+              <a:t>Iris Toric Alicia Brown_30팩</a:t>
+            </a:r>
+          </a:p>
+        </p:txBody>
+      </p:sp>
+      <p:sp>
+        <p:nvSpPr>
+          <p:cNvPr id="57" name="TextBox 56"/>
+          <p:cNvSpPr txBox="1"/>
+          <p:nvPr/>
+        </p:nvSpPr>
+        <p:spPr>
+          <a:xfrm>
+            <a:off x="10634472" y="4270248"/>
+            <a:ext cx="868680" cy="320040"/>
+          </a:xfrm>
+          <a:prstGeom prst="rect">
+            <a:avLst/>
+          </a:prstGeom>
+          <a:noFill/>
+        </p:spPr>
+        <p:txBody>
+          <a:bodyPr wrap="square" lIns="0" rIns="0" tIns="0" bIns="0" anchor="ctr">
+            <a:spAutoFit/>
+          </a:bodyPr>
+          <a:lstStyle/>
+          <a:p>
+            <a:pPr algn="r">
+              <a:spcBef>
+                <a:spcPts val="0"/>
+              </a:spcBef>
+              <a:spcAft>
+                <a:spcPts val="0"/>
+              </a:spcAft>
+            </a:pPr>
+            <a:r>
+              <a:rPr sz="869" b="1">
+                <a:solidFill>
+                  <a:srgbClr val="D85A30"/>
+                </a:solidFill>
+                <a:latin typeface="Noto Sans KR"/>
+                <a:ea typeface="Noto Sans KR"/>
+                <a:cs typeface="Noto Sans KR"/>
+              </a:rPr>
+              <a:t>1</a:t>
+            </a:r>
+          </a:p>
+        </p:txBody>
+      </p:sp>
+      <p:sp>
+        <p:nvSpPr>
+          <p:cNvPr id="58" name="Rectangle 57"/>
+          <p:cNvSpPr/>
+          <p:nvPr/>
+        </p:nvSpPr>
+        <p:spPr>
+          <a:xfrm>
+            <a:off x="658368" y="4608576"/>
+            <a:ext cx="10881360" cy="9144"/>
+          </a:xfrm>
+          <a:prstGeom prst="rect">
+            <a:avLst/>
+          </a:prstGeom>
+          <a:solidFill>
+            <a:srgbClr val="F1F4F8"/>
+          </a:solidFill>
+          <a:ln>
+            <a:noFill/>
+          </a:ln>
+        </p:spPr>
+        <p:style>
+          <a:lnRef idx="1">
+            <a:schemeClr val="accent1"/>
+          </a:lnRef>
+          <a:fillRef idx="3">
+            <a:schemeClr val="accent1"/>
+          </a:fillRef>
+          <a:effectRef idx="2">
+            <a:schemeClr val="accent1"/>
+          </a:effectRef>
+          <a:fontRef idx="minor">
+            <a:schemeClr val="lt1"/>
+          </a:fontRef>
+        </p:style>
+        <p:txBody>
+          <a:bodyPr rtlCol="0" anchor="ctr"/>
+          <a:lstStyle/>
+          <a:p>
+            <a:pPr algn="ctr"/>
+          </a:p>
+        </p:txBody>
+      </p:sp>
+      <p:sp>
+        <p:nvSpPr>
+          <p:cNvPr id="59" name="TextBox 58"/>
+          <p:cNvSpPr txBox="1"/>
+          <p:nvPr/>
+        </p:nvSpPr>
+        <p:spPr>
+          <a:xfrm>
+            <a:off x="713232" y="4626864"/>
+            <a:ext cx="960120" cy="320040"/>
+          </a:xfrm>
+          <a:prstGeom prst="rect">
+            <a:avLst/>
+          </a:prstGeom>
+          <a:noFill/>
+        </p:spPr>
+        <p:txBody>
+          <a:bodyPr wrap="square" lIns="0" rIns="0" tIns="0" bIns="0" anchor="ctr">
+            <a:spAutoFit/>
+          </a:bodyPr>
+          <a:lstStyle/>
+          <a:p>
+            <a:pPr algn="l">
+              <a:spcBef>
+                <a:spcPts val="0"/>
+              </a:spcBef>
+              <a:spcAft>
+                <a:spcPts val="0"/>
+              </a:spcAft>
+            </a:pPr>
+            <a:r>
+              <a:rPr sz="869" b="1">
+                <a:solidFill>
+                  <a:srgbClr val="185FA5"/>
+                </a:solidFill>
+                <a:latin typeface="Noto Sans KR"/>
+                <a:ea typeface="Noto Sans KR"/>
+                <a:cs typeface="Noto Sans KR"/>
+              </a:rPr>
+              <a:t>S162</a:t>
+            </a:r>
+          </a:p>
+        </p:txBody>
+      </p:sp>
+      <p:sp>
+        <p:nvSpPr>
+          <p:cNvPr id="60" name="TextBox 59"/>
+          <p:cNvSpPr txBox="1"/>
+          <p:nvPr/>
+        </p:nvSpPr>
+        <p:spPr>
+          <a:xfrm>
+            <a:off x="1673352" y="4626864"/>
+            <a:ext cx="1143000" cy="320040"/>
+          </a:xfrm>
+          <a:prstGeom prst="rect">
+            <a:avLst/>
+          </a:prstGeom>
+          <a:noFill/>
+        </p:spPr>
+        <p:txBody>
+          <a:bodyPr wrap="square" lIns="0" rIns="0" tIns="0" bIns="0" anchor="ctr">
+            <a:spAutoFit/>
+          </a:bodyPr>
+          <a:lstStyle/>
+          <a:p>
+            <a:pPr algn="l">
+              <a:spcBef>
+                <a:spcPts val="0"/>
+              </a:spcBef>
+              <a:spcAft>
+                <a:spcPts val="0"/>
+              </a:spcAft>
+            </a:pPr>
+            <a:r>
+              <a:rPr sz="869" b="1">
+                <a:solidFill>
+                  <a:srgbClr val="D85A30"/>
+                </a:solidFill>
+                <a:latin typeface="Noto Sans KR"/>
+                <a:ea typeface="Noto Sans KR"/>
+                <a:cs typeface="Noto Sans KR"/>
+              </a:rPr>
+              <a:t>요청외</a:t>
+            </a:r>
+          </a:p>
+        </p:txBody>
+      </p:sp>
+      <p:sp>
+        <p:nvSpPr>
+          <p:cNvPr id="61" name="TextBox 60"/>
+          <p:cNvSpPr txBox="1"/>
+          <p:nvPr/>
+        </p:nvSpPr>
+        <p:spPr>
+          <a:xfrm>
+            <a:off x="2816352" y="4626864"/>
+            <a:ext cx="7818120" cy="320040"/>
+          </a:xfrm>
+          <a:prstGeom prst="rect">
+            <a:avLst/>
+          </a:prstGeom>
+          <a:noFill/>
+        </p:spPr>
+        <p:txBody>
+          <a:bodyPr wrap="square" lIns="0" rIns="0" tIns="0" bIns="0" anchor="ctr">
+            <a:spAutoFit/>
+          </a:bodyPr>
+          <a:lstStyle/>
+          <a:p>
+            <a:pPr algn="l">
+              <a:spcBef>
+                <a:spcPts val="0"/>
+              </a:spcBef>
+              <a:spcAft>
+                <a:spcPts val="0"/>
+              </a:spcAft>
+            </a:pPr>
+            <a:r>
+              <a:rPr sz="840" b="0">
+                <a:solidFill>
+                  <a:srgbClr val="121A2A"/>
+                </a:solidFill>
+                <a:latin typeface="Noto Sans KR"/>
+                <a:ea typeface="Noto Sans KR"/>
+                <a:cs typeface="Noto Sans KR"/>
+              </a:rPr>
+              <a:t>Iris BlueMoon_40팩</a:t>
+            </a:r>
+          </a:p>
+        </p:txBody>
+      </p:sp>
+      <p:sp>
+        <p:nvSpPr>
+          <p:cNvPr id="62" name="TextBox 61"/>
+          <p:cNvSpPr txBox="1"/>
+          <p:nvPr/>
+        </p:nvSpPr>
+        <p:spPr>
+          <a:xfrm>
+            <a:off x="10634472" y="4626864"/>
+            <a:ext cx="868680" cy="320040"/>
+          </a:xfrm>
+          <a:prstGeom prst="rect">
+            <a:avLst/>
+          </a:prstGeom>
+          <a:noFill/>
+        </p:spPr>
+        <p:txBody>
+          <a:bodyPr wrap="square" lIns="0" rIns="0" tIns="0" bIns="0" anchor="ctr">
+            <a:spAutoFit/>
+          </a:bodyPr>
+          <a:lstStyle/>
+          <a:p>
+            <a:pPr algn="r">
+              <a:spcBef>
+                <a:spcPts val="0"/>
+              </a:spcBef>
+              <a:spcAft>
+                <a:spcPts val="0"/>
+              </a:spcAft>
+            </a:pPr>
+            <a:r>
+              <a:rPr sz="869" b="1">
+                <a:solidFill>
+                  <a:srgbClr val="D85A30"/>
+                </a:solidFill>
+                <a:latin typeface="Noto Sans KR"/>
+                <a:ea typeface="Noto Sans KR"/>
+                <a:cs typeface="Noto Sans KR"/>
+              </a:rPr>
+              <a:t>1</a:t>
+            </a:r>
+          </a:p>
+        </p:txBody>
+      </p:sp>
+      <p:sp>
+        <p:nvSpPr>
+          <p:cNvPr id="63" name="Rectangle 62"/>
+          <p:cNvSpPr/>
+          <p:nvPr/>
+        </p:nvSpPr>
+        <p:spPr>
+          <a:xfrm>
+            <a:off x="658368" y="4965192"/>
+            <a:ext cx="10881360" cy="9144"/>
+          </a:xfrm>
+          <a:prstGeom prst="rect">
+            <a:avLst/>
+          </a:prstGeom>
+          <a:solidFill>
+            <a:srgbClr val="F1F4F8"/>
+          </a:solidFill>
+          <a:ln>
+            <a:noFill/>
+          </a:ln>
+        </p:spPr>
+        <p:style>
+          <a:lnRef idx="1">
+            <a:schemeClr val="accent1"/>
+          </a:lnRef>
+          <a:fillRef idx="3">
+            <a:schemeClr val="accent1"/>
+          </a:fillRef>
+          <a:effectRef idx="2">
+            <a:schemeClr val="accent1"/>
+          </a:effectRef>
+          <a:fontRef idx="minor">
+            <a:schemeClr val="lt1"/>
+          </a:fontRef>
+        </p:style>
+        <p:txBody>
+          <a:bodyPr rtlCol="0" anchor="ctr"/>
+          <a:lstStyle/>
+          <a:p>
+            <a:pPr algn="ctr"/>
+          </a:p>
+        </p:txBody>
+      </p:sp>
+      <p:sp>
+        <p:nvSpPr>
+          <p:cNvPr id="64" name="Rectangle 63"/>
+          <p:cNvSpPr/>
+          <p:nvPr/>
+        </p:nvSpPr>
+        <p:spPr>
+          <a:xfrm>
+            <a:off x="640080" y="4965192"/>
+            <a:ext cx="10917936" cy="356616"/>
+          </a:xfrm>
+          <a:prstGeom prst="rect">
+            <a:avLst/>
+          </a:prstGeom>
+          <a:solidFill>
+            <a:srgbClr val="F8FAFC"/>
+          </a:solidFill>
+          <a:ln>
+            <a:noFill/>
+          </a:ln>
+        </p:spPr>
+        <p:style>
+          <a:lnRef idx="1">
+            <a:schemeClr val="accent1"/>
+          </a:lnRef>
+          <a:fillRef idx="3">
+            <a:schemeClr val="accent1"/>
+          </a:fillRef>
+          <a:effectRef idx="2">
+            <a:schemeClr val="accent1"/>
+          </a:effectRef>
+          <a:fontRef idx="minor">
+            <a:schemeClr val="lt1"/>
+          </a:fontRef>
+        </p:style>
+        <p:txBody>
+          <a:bodyPr rtlCol="0" anchor="ctr"/>
+          <a:lstStyle/>
+          <a:p>
+            <a:pPr algn="ctr"/>
+          </a:p>
+        </p:txBody>
+      </p:sp>
+      <p:sp>
+        <p:nvSpPr>
+          <p:cNvPr id="65" name="TextBox 64"/>
+          <p:cNvSpPr txBox="1"/>
+          <p:nvPr/>
+        </p:nvSpPr>
+        <p:spPr>
+          <a:xfrm>
+            <a:off x="713232" y="4983479"/>
+            <a:ext cx="960120" cy="320040"/>
+          </a:xfrm>
+          <a:prstGeom prst="rect">
+            <a:avLst/>
+          </a:prstGeom>
+          <a:noFill/>
+        </p:spPr>
+        <p:txBody>
+          <a:bodyPr wrap="square" lIns="0" rIns="0" tIns="0" bIns="0" anchor="ctr">
+            <a:spAutoFit/>
+          </a:bodyPr>
+          <a:lstStyle/>
+          <a:p>
+            <a:pPr algn="l">
+              <a:spcBef>
+                <a:spcPts val="0"/>
+              </a:spcBef>
+              <a:spcAft>
+                <a:spcPts val="0"/>
+              </a:spcAft>
+            </a:pPr>
+            <a:r>
+              <a:rPr sz="869" b="1">
+                <a:solidFill>
+                  <a:srgbClr val="185FA5"/>
+                </a:solidFill>
+                <a:latin typeface="Noto Sans KR"/>
+                <a:ea typeface="Noto Sans KR"/>
+                <a:cs typeface="Noto Sans KR"/>
+              </a:rPr>
+              <a:t>S318</a:t>
+            </a:r>
+          </a:p>
+        </p:txBody>
+      </p:sp>
+      <p:sp>
+        <p:nvSpPr>
+          <p:cNvPr id="66" name="TextBox 65"/>
+          <p:cNvSpPr txBox="1"/>
+          <p:nvPr/>
+        </p:nvSpPr>
+        <p:spPr>
+          <a:xfrm>
+            <a:off x="1673352" y="4983479"/>
+            <a:ext cx="1143000" cy="320040"/>
+          </a:xfrm>
+          <a:prstGeom prst="rect">
+            <a:avLst/>
+          </a:prstGeom>
+          <a:noFill/>
+        </p:spPr>
+        <p:txBody>
+          <a:bodyPr wrap="square" lIns="0" rIns="0" tIns="0" bIns="0" anchor="ctr">
+            <a:spAutoFit/>
+          </a:bodyPr>
+          <a:lstStyle/>
+          <a:p>
+            <a:pPr algn="l">
+              <a:spcBef>
+                <a:spcPts val="0"/>
+              </a:spcBef>
+              <a:spcAft>
+                <a:spcPts val="0"/>
+              </a:spcAft>
+            </a:pPr>
+            <a:r>
+              <a:rPr sz="869" b="1">
+                <a:solidFill>
+                  <a:srgbClr val="1D9E75"/>
+                </a:solidFill>
+                <a:latin typeface="Noto Sans KR"/>
+                <a:ea typeface="Noto Sans KR"/>
+                <a:cs typeface="Noto Sans KR"/>
+              </a:rPr>
+              <a:t>요청내</a:t>
+            </a:r>
+          </a:p>
+        </p:txBody>
+      </p:sp>
+      <p:sp>
+        <p:nvSpPr>
+          <p:cNvPr id="67" name="TextBox 66"/>
+          <p:cNvSpPr txBox="1"/>
+          <p:nvPr/>
+        </p:nvSpPr>
+        <p:spPr>
+          <a:xfrm>
+            <a:off x="2816352" y="4983479"/>
+            <a:ext cx="7818120" cy="320040"/>
+          </a:xfrm>
+          <a:prstGeom prst="rect">
+            <a:avLst/>
+          </a:prstGeom>
+          <a:noFill/>
+        </p:spPr>
+        <p:txBody>
+          <a:bodyPr wrap="square" lIns="0" rIns="0" tIns="0" bIns="0" anchor="ctr">
+            <a:spAutoFit/>
+          </a:bodyPr>
+          <a:lstStyle/>
+          <a:p>
+            <a:pPr algn="l">
+              <a:spcBef>
+                <a:spcPts val="0"/>
+              </a:spcBef>
+              <a:spcAft>
+                <a:spcPts val="0"/>
+              </a:spcAft>
+            </a:pPr>
+            <a:r>
+              <a:rPr sz="840" b="0">
+                <a:solidFill>
+                  <a:srgbClr val="121A2A"/>
+                </a:solidFill>
+                <a:latin typeface="Noto Sans KR"/>
+                <a:ea typeface="Noto Sans KR"/>
+                <a:cs typeface="Noto Sans KR"/>
+              </a:rPr>
+              <a:t>Clalen O2O2 M_Micelia_Deep Black_45%_2P</a:t>
+            </a:r>
+          </a:p>
+        </p:txBody>
+      </p:sp>
+      <p:sp>
+        <p:nvSpPr>
+          <p:cNvPr id="68" name="TextBox 67"/>
+          <p:cNvSpPr txBox="1"/>
+          <p:nvPr/>
+        </p:nvSpPr>
+        <p:spPr>
+          <a:xfrm>
+            <a:off x="10634472" y="4983479"/>
+            <a:ext cx="868680" cy="320040"/>
+          </a:xfrm>
+          <a:prstGeom prst="rect">
+            <a:avLst/>
+          </a:prstGeom>
+          <a:noFill/>
+        </p:spPr>
+        <p:txBody>
+          <a:bodyPr wrap="square" lIns="0" rIns="0" tIns="0" bIns="0" anchor="ctr">
+            <a:spAutoFit/>
+          </a:bodyPr>
+          <a:lstStyle/>
+          <a:p>
+            <a:pPr algn="r">
+              <a:spcBef>
+                <a:spcPts val="0"/>
+              </a:spcBef>
+              <a:spcAft>
+                <a:spcPts val="0"/>
+              </a:spcAft>
+            </a:pPr>
+            <a:r>
+              <a:rPr sz="869" b="1">
+                <a:solidFill>
+                  <a:srgbClr val="D85A30"/>
+                </a:solidFill>
+                <a:latin typeface="Noto Sans KR"/>
+                <a:ea typeface="Noto Sans KR"/>
+                <a:cs typeface="Noto Sans KR"/>
+              </a:rPr>
+              <a:t>1</a:t>
+            </a:r>
+          </a:p>
+        </p:txBody>
+      </p:sp>
+      <p:sp>
+        <p:nvSpPr>
+          <p:cNvPr id="69" name="Rectangle 68"/>
+          <p:cNvSpPr/>
+          <p:nvPr/>
+        </p:nvSpPr>
+        <p:spPr>
+          <a:xfrm>
+            <a:off x="658368" y="5321807"/>
+            <a:ext cx="10881360" cy="9144"/>
+          </a:xfrm>
+          <a:prstGeom prst="rect">
+            <a:avLst/>
+          </a:prstGeom>
+          <a:solidFill>
+            <a:srgbClr val="F1F4F8"/>
+          </a:solidFill>
+          <a:ln>
+            <a:noFill/>
+          </a:ln>
+        </p:spPr>
+        <p:style>
+          <a:lnRef idx="1">
+            <a:schemeClr val="accent1"/>
+          </a:lnRef>
+          <a:fillRef idx="3">
+            <a:schemeClr val="accent1"/>
+          </a:fillRef>
+          <a:effectRef idx="2">
+            <a:schemeClr val="accent1"/>
+          </a:effectRef>
+          <a:fontRef idx="minor">
+            <a:schemeClr val="lt1"/>
+          </a:fontRef>
+        </p:style>
+        <p:txBody>
+          <a:bodyPr rtlCol="0" anchor="ctr"/>
+          <a:lstStyle/>
+          <a:p>
+            <a:pPr algn="ctr"/>
+          </a:p>
+        </p:txBody>
+      </p:sp>
+      <p:sp>
+        <p:nvSpPr>
+          <p:cNvPr id="70" name="TextBox 69"/>
+          <p:cNvSpPr txBox="1"/>
+          <p:nvPr/>
+        </p:nvSpPr>
+        <p:spPr>
+          <a:xfrm>
+            <a:off x="713232" y="5340096"/>
+            <a:ext cx="960120" cy="320040"/>
+          </a:xfrm>
+          <a:prstGeom prst="rect">
+            <a:avLst/>
+          </a:prstGeom>
+          <a:noFill/>
+        </p:spPr>
+        <p:txBody>
+          <a:bodyPr wrap="square" lIns="0" rIns="0" tIns="0" bIns="0" anchor="ctr">
+            <a:spAutoFit/>
+          </a:bodyPr>
+          <a:lstStyle/>
+          <a:p>
+            <a:pPr algn="l">
+              <a:spcBef>
+                <a:spcPts val="0"/>
+              </a:spcBef>
+              <a:spcAft>
+                <a:spcPts val="0"/>
+              </a:spcAft>
+            </a:pPr>
+            <a:r>
+              <a:rPr sz="869" b="1">
+                <a:solidFill>
+                  <a:srgbClr val="185FA5"/>
+                </a:solidFill>
+                <a:latin typeface="Noto Sans KR"/>
+                <a:ea typeface="Noto Sans KR"/>
+                <a:cs typeface="Noto Sans KR"/>
+              </a:rPr>
+              <a:t>S547</a:t>
+            </a:r>
+          </a:p>
+        </p:txBody>
+      </p:sp>
+      <p:sp>
+        <p:nvSpPr>
+          <p:cNvPr id="71" name="TextBox 70"/>
+          <p:cNvSpPr txBox="1"/>
+          <p:nvPr/>
+        </p:nvSpPr>
+        <p:spPr>
+          <a:xfrm>
+            <a:off x="1673352" y="5340096"/>
+            <a:ext cx="1143000" cy="320040"/>
+          </a:xfrm>
+          <a:prstGeom prst="rect">
+            <a:avLst/>
+          </a:prstGeom>
+          <a:noFill/>
+        </p:spPr>
+        <p:txBody>
+          <a:bodyPr wrap="square" lIns="0" rIns="0" tIns="0" bIns="0" anchor="ctr">
+            <a:spAutoFit/>
+          </a:bodyPr>
+          <a:lstStyle/>
+          <a:p>
+            <a:pPr algn="l">
+              <a:spcBef>
+                <a:spcPts val="0"/>
+              </a:spcBef>
+              <a:spcAft>
+                <a:spcPts val="0"/>
+              </a:spcAft>
+            </a:pPr>
+            <a:r>
+              <a:rPr sz="869" b="1">
+                <a:solidFill>
+                  <a:srgbClr val="D85A30"/>
+                </a:solidFill>
+                <a:latin typeface="Noto Sans KR"/>
+                <a:ea typeface="Noto Sans KR"/>
+                <a:cs typeface="Noto Sans KR"/>
+              </a:rPr>
+              <a:t>요청외</a:t>
+            </a:r>
+          </a:p>
+        </p:txBody>
+      </p:sp>
+      <p:sp>
+        <p:nvSpPr>
+          <p:cNvPr id="72" name="TextBox 71"/>
+          <p:cNvSpPr txBox="1"/>
+          <p:nvPr/>
+        </p:nvSpPr>
+        <p:spPr>
+          <a:xfrm>
+            <a:off x="2816352" y="5340096"/>
+            <a:ext cx="7818120" cy="320040"/>
+          </a:xfrm>
+          <a:prstGeom prst="rect">
+            <a:avLst/>
+          </a:prstGeom>
+          <a:noFill/>
+        </p:spPr>
+        <p:txBody>
+          <a:bodyPr wrap="square" lIns="0" rIns="0" tIns="0" bIns="0" anchor="ctr">
+            <a:spAutoFit/>
+          </a:bodyPr>
+          <a:lstStyle/>
+          <a:p>
+            <a:pPr algn="l">
+              <a:spcBef>
+                <a:spcPts val="0"/>
+              </a:spcBef>
+              <a:spcAft>
+                <a:spcPts val="0"/>
+              </a:spcAft>
+            </a:pPr>
+            <a:r>
+              <a:rPr sz="840" b="0">
+                <a:solidFill>
+                  <a:srgbClr val="121A2A"/>
+                </a:solidFill>
+                <a:latin typeface="Noto Sans KR"/>
+                <a:ea typeface="Noto Sans KR"/>
+                <a:cs typeface="Noto Sans KR"/>
+              </a:rPr>
+              <a:t>Clalen O2O2 M_2P</a:t>
+            </a:r>
+          </a:p>
+        </p:txBody>
+      </p:sp>
+      <p:sp>
+        <p:nvSpPr>
+          <p:cNvPr id="73" name="TextBox 72"/>
+          <p:cNvSpPr txBox="1"/>
+          <p:nvPr/>
+        </p:nvSpPr>
+        <p:spPr>
+          <a:xfrm>
+            <a:off x="10634472" y="5340096"/>
+            <a:ext cx="868680" cy="320040"/>
+          </a:xfrm>
+          <a:prstGeom prst="rect">
+            <a:avLst/>
+          </a:prstGeom>
+          <a:noFill/>
+        </p:spPr>
+        <p:txBody>
+          <a:bodyPr wrap="square" lIns="0" rIns="0" tIns="0" bIns="0" anchor="ctr">
+            <a:spAutoFit/>
+          </a:bodyPr>
+          <a:lstStyle/>
+          <a:p>
+            <a:pPr algn="r">
+              <a:spcBef>
+                <a:spcPts val="0"/>
+              </a:spcBef>
+              <a:spcAft>
+                <a:spcPts val="0"/>
+              </a:spcAft>
+            </a:pPr>
+            <a:r>
+              <a:rPr sz="869" b="1">
+                <a:solidFill>
+                  <a:srgbClr val="D85A30"/>
+                </a:solidFill>
+                <a:latin typeface="Noto Sans KR"/>
+                <a:ea typeface="Noto Sans KR"/>
+                <a:cs typeface="Noto Sans KR"/>
+              </a:rPr>
+              <a:t>1</a:t>
+            </a:r>
+          </a:p>
+        </p:txBody>
+      </p:sp>
+      <p:sp>
+        <p:nvSpPr>
+          <p:cNvPr id="74" name="Rectangle 73"/>
+          <p:cNvSpPr/>
+          <p:nvPr/>
+        </p:nvSpPr>
+        <p:spPr>
+          <a:xfrm>
+            <a:off x="658368" y="5678424"/>
+            <a:ext cx="10881360" cy="9144"/>
+          </a:xfrm>
+          <a:prstGeom prst="rect">
+            <a:avLst/>
+          </a:prstGeom>
+          <a:solidFill>
+            <a:srgbClr val="F1F4F8"/>
+          </a:solidFill>
+          <a:ln>
+            <a:noFill/>
+          </a:ln>
+        </p:spPr>
+        <p:style>
+          <a:lnRef idx="1">
+            <a:schemeClr val="accent1"/>
+          </a:lnRef>
+          <a:fillRef idx="3">
+            <a:schemeClr val="accent1"/>
+          </a:fillRef>
+          <a:effectRef idx="2">
+            <a:schemeClr val="accent1"/>
+          </a:effectRef>
+          <a:fontRef idx="minor">
+            <a:schemeClr val="lt1"/>
+          </a:fontRef>
+        </p:style>
+        <p:txBody>
+          <a:bodyPr rtlCol="0" anchor="ctr"/>
+          <a:lstStyle/>
+          <a:p>
+            <a:pPr algn="ctr"/>
           </a:p>
         </p:txBody>
       </p:sp>

--- a/exports/ppt_design_preview.pptx
+++ b/exports/ppt_design_preview.pptx
@@ -6,7 +6,6 @@
   </p:sldMasterIdLst>
   <p:sldIdLst>
     <p:sldId id="256" r:id="rId7"/>
-    <p:sldId id="257" r:id="rId8"/>
   </p:sldIdLst>
   <p:sldSz cx="12191695" cy="6858000" type="screen4x3"/>
   <p:notesSz cx="6858000" cy="9144000"/>
@@ -3356,7 +3355,7 @@
                 <a:ea typeface="Noto Sans KR"/>
                 <a:cs typeface="Noto Sans KR"/>
               </a:rPr>
-              <a:t>산출시각: 2026-06-25 13:49</a:t>
+              <a:t>산출시각: 2026-06-25 14:03</a:t>
             </a:r>
           </a:p>
         </p:txBody>
@@ -5576,7 +5575,7 @@
         </p:nvSpPr>
         <p:spPr>
           <a:xfrm>
-            <a:off x="8183879" y="3090672"/>
+            <a:off x="8183879" y="3054096"/>
             <a:ext cx="3611880" cy="201168"/>
           </a:xfrm>
           <a:prstGeom prst="rect">
@@ -5607,7 +5606,7 @@
                 <a:ea typeface="Noto Sans KR"/>
                 <a:cs typeface="Noto Sans KR"/>
               </a:rPr>
-              <a:t>일일 재고표 기준 예외 대응</a:t>
+              <a:t>요청 긴급 S코드 요약</a:t>
             </a:r>
           </a:p>
         </p:txBody>
@@ -7945,8 +7944,8 @@
         </p:nvSpPr>
         <p:spPr>
           <a:xfrm>
-            <a:off x="8183879" y="3310128"/>
-            <a:ext cx="3611880" cy="2999232"/>
+            <a:off x="8183879" y="3255264"/>
+            <a:ext cx="3611880" cy="3172968"/>
           </a:xfrm>
           <a:prstGeom prst="roundRect">
             <a:avLst/>
@@ -7990,8 +7989,8 @@
         </p:nvSpPr>
         <p:spPr>
           <a:xfrm>
-            <a:off x="8183879" y="3310128"/>
-            <a:ext cx="3611880" cy="347472"/>
+            <a:off x="8183879" y="3255264"/>
+            <a:ext cx="3611880" cy="329184"/>
           </a:xfrm>
           <a:prstGeom prst="rect">
             <a:avLst/>
@@ -8035,8 +8034,8 @@
         </p:nvSpPr>
         <p:spPr>
           <a:xfrm>
-            <a:off x="8293607" y="3346704"/>
-            <a:ext cx="658368" cy="274320"/>
+            <a:off x="8293607" y="3291840"/>
+            <a:ext cx="530352" cy="246888"/>
           </a:xfrm>
           <a:prstGeom prst="rect">
             <a:avLst/>
@@ -8058,7 +8057,7 @@
               </a:spcAft>
             </a:pPr>
             <a:r>
-              <a:rPr sz="780" b="1">
+              <a:rPr sz="720" b="1">
                 <a:solidFill>
                   <a:srgbClr val="FFFFFF"/>
                 </a:solidFill>
@@ -8066,7 +8065,7 @@
                 <a:ea typeface="Noto Sans KR"/>
                 <a:cs typeface="Noto Sans KR"/>
               </a:rPr>
-              <a:t>품목</a:t>
+              <a:t>S코드</a:t>
             </a:r>
           </a:p>
         </p:txBody>
@@ -8079,8 +8078,8 @@
         </p:nvSpPr>
         <p:spPr>
           <a:xfrm>
-            <a:off x="8951976" y="3346704"/>
-            <a:ext cx="1481328" cy="274320"/>
+            <a:off x="8823959" y="3291840"/>
+            <a:ext cx="530352" cy="246888"/>
           </a:xfrm>
           <a:prstGeom prst="rect">
             <a:avLst/>
@@ -8102,7 +8101,7 @@
               </a:spcAft>
             </a:pPr>
             <a:r>
-              <a:rPr sz="780" b="1">
+              <a:rPr sz="720" b="1">
                 <a:solidFill>
                   <a:srgbClr val="FFFFFF"/>
                 </a:solidFill>
@@ -8110,6 +8109,50 @@
                 <a:ea typeface="Noto Sans KR"/>
                 <a:cs typeface="Noto Sans KR"/>
               </a:rPr>
+              <a:t>구분</a:t>
+            </a:r>
+          </a:p>
+        </p:txBody>
+      </p:sp>
+      <p:sp>
+        <p:nvSpPr>
+          <p:cNvPr id="116" name="TextBox 115"/>
+          <p:cNvSpPr txBox="1"/>
+          <p:nvPr/>
+        </p:nvSpPr>
+        <p:spPr>
+          <a:xfrm>
+            <a:off x="9354311" y="3291840"/>
+            <a:ext cx="1938528" cy="246888"/>
+          </a:xfrm>
+          <a:prstGeom prst="rect">
+            <a:avLst/>
+          </a:prstGeom>
+          <a:noFill/>
+        </p:spPr>
+        <p:txBody>
+          <a:bodyPr wrap="square" lIns="0" rIns="0" tIns="0" bIns="0" anchor="ctr">
+            <a:spAutoFit/>
+          </a:bodyPr>
+          <a:lstStyle/>
+          <a:p>
+            <a:pPr algn="l">
+              <a:spcBef>
+                <a:spcPts val="0"/>
+              </a:spcBef>
+              <a:spcAft>
+                <a:spcPts val="0"/>
+              </a:spcAft>
+            </a:pPr>
+            <a:r>
+              <a:rPr sz="720" b="1">
+                <a:solidFill>
+                  <a:srgbClr val="FFFFFF"/>
+                </a:solidFill>
+                <a:latin typeface="Noto Sans KR"/>
+                <a:ea typeface="Noto Sans KR"/>
+                <a:cs typeface="Noto Sans KR"/>
+              </a:rPr>
               <a:t>제품명</a:t>
             </a:r>
           </a:p>
@@ -8117,14 +8160,14 @@
       </p:sp>
       <p:sp>
         <p:nvSpPr>
-          <p:cNvPr id="116" name="TextBox 115"/>
-          <p:cNvSpPr txBox="1"/>
-          <p:nvPr/>
-        </p:nvSpPr>
-        <p:spPr>
-          <a:xfrm>
-            <a:off x="10433304" y="3346704"/>
-            <a:ext cx="512064" cy="274320"/>
+          <p:cNvPr id="117" name="TextBox 116"/>
+          <p:cNvSpPr txBox="1"/>
+          <p:nvPr/>
+        </p:nvSpPr>
+        <p:spPr>
+          <a:xfrm>
+            <a:off x="11292839" y="3291840"/>
+            <a:ext cx="347472" cy="246888"/>
           </a:xfrm>
           <a:prstGeom prst="rect">
             <a:avLst/>
@@ -8146,7 +8189,7 @@
               </a:spcAft>
             </a:pPr>
             <a:r>
-              <a:rPr sz="780" b="1">
+              <a:rPr sz="720" b="1">
                 <a:solidFill>
                   <a:srgbClr val="FFFFFF"/>
                 </a:solidFill>
@@ -8154,21 +8197,153 @@
                 <a:ea typeface="Noto Sans KR"/>
                 <a:cs typeface="Noto Sans KR"/>
               </a:rPr>
-              <a:t>재고</a:t>
-            </a:r>
-          </a:p>
-        </p:txBody>
-      </p:sp>
-      <p:sp>
-        <p:nvSpPr>
-          <p:cNvPr id="117" name="TextBox 116"/>
-          <p:cNvSpPr txBox="1"/>
-          <p:nvPr/>
-        </p:nvSpPr>
-        <p:spPr>
-          <a:xfrm>
-            <a:off x="10945368" y="3346704"/>
-            <a:ext cx="713232" cy="274320"/>
+              <a:t>SKU</a:t>
+            </a:r>
+          </a:p>
+        </p:txBody>
+      </p:sp>
+      <p:sp>
+        <p:nvSpPr>
+          <p:cNvPr id="118" name="TextBox 117"/>
+          <p:cNvSpPr txBox="1"/>
+          <p:nvPr/>
+        </p:nvSpPr>
+        <p:spPr>
+          <a:xfrm>
+            <a:off x="8293607" y="3593591"/>
+            <a:ext cx="530352" cy="221949"/>
+          </a:xfrm>
+          <a:prstGeom prst="rect">
+            <a:avLst/>
+          </a:prstGeom>
+          <a:noFill/>
+        </p:spPr>
+        <p:txBody>
+          <a:bodyPr wrap="square" lIns="0" rIns="0" tIns="0" bIns="0" anchor="ctr">
+            <a:spAutoFit/>
+          </a:bodyPr>
+          <a:lstStyle/>
+          <a:p>
+            <a:pPr algn="l">
+              <a:spcBef>
+                <a:spcPts val="0"/>
+              </a:spcBef>
+              <a:spcAft>
+                <a:spcPts val="0"/>
+              </a:spcAft>
+            </a:pPr>
+            <a:r>
+              <a:rPr sz="650" b="1">
+                <a:solidFill>
+                  <a:srgbClr val="185FA5"/>
+                </a:solidFill>
+                <a:latin typeface="Noto Sans KR"/>
+                <a:ea typeface="Noto Sans KR"/>
+                <a:cs typeface="Noto Sans KR"/>
+              </a:rPr>
+              <a:t>S129</a:t>
+            </a:r>
+          </a:p>
+        </p:txBody>
+      </p:sp>
+      <p:sp>
+        <p:nvSpPr>
+          <p:cNvPr id="119" name="TextBox 118"/>
+          <p:cNvSpPr txBox="1"/>
+          <p:nvPr/>
+        </p:nvSpPr>
+        <p:spPr>
+          <a:xfrm>
+            <a:off x="8823959" y="3593591"/>
+            <a:ext cx="530352" cy="221949"/>
+          </a:xfrm>
+          <a:prstGeom prst="rect">
+            <a:avLst/>
+          </a:prstGeom>
+          <a:noFill/>
+        </p:spPr>
+        <p:txBody>
+          <a:bodyPr wrap="square" lIns="0" rIns="0" tIns="0" bIns="0" anchor="ctr">
+            <a:spAutoFit/>
+          </a:bodyPr>
+          <a:lstStyle/>
+          <a:p>
+            <a:pPr algn="l">
+              <a:spcBef>
+                <a:spcPts val="0"/>
+              </a:spcBef>
+              <a:spcAft>
+                <a:spcPts val="0"/>
+              </a:spcAft>
+            </a:pPr>
+            <a:r>
+              <a:rPr sz="650" b="1">
+                <a:solidFill>
+                  <a:srgbClr val="D85A30"/>
+                </a:solidFill>
+                <a:latin typeface="Noto Sans KR"/>
+                <a:ea typeface="Noto Sans KR"/>
+                <a:cs typeface="Noto Sans KR"/>
+              </a:rPr>
+              <a:t>요청외</a:t>
+            </a:r>
+          </a:p>
+        </p:txBody>
+      </p:sp>
+      <p:sp>
+        <p:nvSpPr>
+          <p:cNvPr id="120" name="TextBox 119"/>
+          <p:cNvSpPr txBox="1"/>
+          <p:nvPr/>
+        </p:nvSpPr>
+        <p:spPr>
+          <a:xfrm>
+            <a:off x="9354311" y="3593591"/>
+            <a:ext cx="1938528" cy="221949"/>
+          </a:xfrm>
+          <a:prstGeom prst="rect">
+            <a:avLst/>
+          </a:prstGeom>
+          <a:noFill/>
+        </p:spPr>
+        <p:txBody>
+          <a:bodyPr wrap="square" lIns="0" rIns="0" tIns="0" bIns="0" anchor="ctr">
+            <a:spAutoFit/>
+          </a:bodyPr>
+          <a:lstStyle/>
+          <a:p>
+            <a:pPr algn="l">
+              <a:spcBef>
+                <a:spcPts val="0"/>
+              </a:spcBef>
+              <a:spcAft>
+                <a:spcPts val="0"/>
+              </a:spcAft>
+            </a:pPr>
+            <a:r>
+              <a:rPr sz="610" b="0">
+                <a:solidFill>
+                  <a:srgbClr val="121A2A"/>
+                </a:solidFill>
+                <a:latin typeface="Noto Sans KR"/>
+                <a:ea typeface="Noto Sans KR"/>
+                <a:cs typeface="Noto Sans KR"/>
+              </a:rPr>
+              <a:t>Iris SoulBrown_40팩</a:t>
+            </a:r>
+          </a:p>
+        </p:txBody>
+      </p:sp>
+      <p:sp>
+        <p:nvSpPr>
+          <p:cNvPr id="121" name="TextBox 120"/>
+          <p:cNvSpPr txBox="1"/>
+          <p:nvPr/>
+        </p:nvSpPr>
+        <p:spPr>
+          <a:xfrm>
+            <a:off x="11292839" y="3593591"/>
+            <a:ext cx="347472" cy="221949"/>
           </a:xfrm>
           <a:prstGeom prst="rect">
             <a:avLst/>
@@ -8190,139 +8365,7 @@
               </a:spcAft>
             </a:pPr>
             <a:r>
-              <a:rPr sz="780" b="1">
-                <a:solidFill>
-                  <a:srgbClr val="FFFFFF"/>
-                </a:solidFill>
-                <a:latin typeface="Noto Sans KR"/>
-                <a:ea typeface="Noto Sans KR"/>
-                <a:cs typeface="Noto Sans KR"/>
-              </a:rPr>
-              <a:t>가용 PCS</a:t>
-            </a:r>
-          </a:p>
-        </p:txBody>
-      </p:sp>
-      <p:sp>
-        <p:nvSpPr>
-          <p:cNvPr id="118" name="TextBox 117"/>
-          <p:cNvSpPr txBox="1"/>
-          <p:nvPr/>
-        </p:nvSpPr>
-        <p:spPr>
-          <a:xfrm>
-            <a:off x="8293607" y="3685032"/>
-            <a:ext cx="658368" cy="384048"/>
-          </a:xfrm>
-          <a:prstGeom prst="rect">
-            <a:avLst/>
-          </a:prstGeom>
-          <a:noFill/>
-        </p:spPr>
-        <p:txBody>
-          <a:bodyPr wrap="square" lIns="0" rIns="0" tIns="0" bIns="0" anchor="ctr">
-            <a:spAutoFit/>
-          </a:bodyPr>
-          <a:lstStyle/>
-          <a:p>
-            <a:pPr algn="l">
-              <a:spcBef>
-                <a:spcPts val="0"/>
-              </a:spcBef>
-              <a:spcAft>
-                <a:spcPts val="0"/>
-              </a:spcAft>
-            </a:pPr>
-            <a:r>
-              <a:rPr sz="770" b="0">
-                <a:solidFill>
-                  <a:srgbClr val="121A2A"/>
-                </a:solidFill>
-                <a:latin typeface="Noto Sans KR"/>
-                <a:ea typeface="Noto Sans KR"/>
-                <a:cs typeface="Noto Sans KR"/>
-              </a:rPr>
-              <a:t>S129-06.50</a:t>
-            </a:r>
-          </a:p>
-        </p:txBody>
-      </p:sp>
-      <p:sp>
-        <p:nvSpPr>
-          <p:cNvPr id="119" name="TextBox 118"/>
-          <p:cNvSpPr txBox="1"/>
-          <p:nvPr/>
-        </p:nvSpPr>
-        <p:spPr>
-          <a:xfrm>
-            <a:off x="8951976" y="3685032"/>
-            <a:ext cx="1481328" cy="384048"/>
-          </a:xfrm>
-          <a:prstGeom prst="rect">
-            <a:avLst/>
-          </a:prstGeom>
-          <a:noFill/>
-        </p:spPr>
-        <p:txBody>
-          <a:bodyPr wrap="square" lIns="0" rIns="0" tIns="0" bIns="0" anchor="ctr">
-            <a:spAutoFit/>
-          </a:bodyPr>
-          <a:lstStyle/>
-          <a:p>
-            <a:pPr algn="l">
-              <a:spcBef>
-                <a:spcPts val="0"/>
-              </a:spcBef>
-              <a:spcAft>
-                <a:spcPts val="0"/>
-              </a:spcAft>
-            </a:pPr>
-            <a:r>
-              <a:rPr sz="790" b="0">
-                <a:solidFill>
-                  <a:srgbClr val="121A2A"/>
-                </a:solidFill>
-                <a:latin typeface="Noto Sans KR"/>
-                <a:ea typeface="Noto Sans KR"/>
-                <a:cs typeface="Noto Sans KR"/>
-              </a:rPr>
-              <a:t>Iris SoulBrown_40팩</a:t>
-            </a:r>
-          </a:p>
-        </p:txBody>
-      </p:sp>
-      <p:sp>
-        <p:nvSpPr>
-          <p:cNvPr id="120" name="TextBox 119"/>
-          <p:cNvSpPr txBox="1"/>
-          <p:nvPr/>
-        </p:nvSpPr>
-        <p:spPr>
-          <a:xfrm>
-            <a:off x="10433304" y="3685032"/>
-            <a:ext cx="512064" cy="384048"/>
-          </a:xfrm>
-          <a:prstGeom prst="rect">
-            <a:avLst/>
-          </a:prstGeom>
-          <a:noFill/>
-        </p:spPr>
-        <p:txBody>
-          <a:bodyPr wrap="square" lIns="0" rIns="0" tIns="0" bIns="0" anchor="ctr">
-            <a:spAutoFit/>
-          </a:bodyPr>
-          <a:lstStyle/>
-          <a:p>
-            <a:pPr algn="r">
-              <a:spcBef>
-                <a:spcPts val="0"/>
-              </a:spcBef>
-              <a:spcAft>
-                <a:spcPts val="0"/>
-              </a:spcAft>
-            </a:pPr>
-            <a:r>
-              <a:rPr sz="770" b="1">
+              <a:rPr sz="650" b="1">
                 <a:solidFill>
                   <a:srgbClr val="D85A30"/>
                 </a:solidFill>
@@ -8330,51 +8373,7 @@
                 <a:ea typeface="Noto Sans KR"/>
                 <a:cs typeface="Noto Sans KR"/>
               </a:rPr>
-              <a:t>-92</a:t>
-            </a:r>
-          </a:p>
-        </p:txBody>
-      </p:sp>
-      <p:sp>
-        <p:nvSpPr>
-          <p:cNvPr id="121" name="TextBox 120"/>
-          <p:cNvSpPr txBox="1"/>
-          <p:nvPr/>
-        </p:nvSpPr>
-        <p:spPr>
-          <a:xfrm>
-            <a:off x="10945368" y="3685032"/>
-            <a:ext cx="713232" cy="384048"/>
-          </a:xfrm>
-          <a:prstGeom prst="rect">
-            <a:avLst/>
-          </a:prstGeom>
-          <a:noFill/>
-        </p:spPr>
-        <p:txBody>
-          <a:bodyPr wrap="square" lIns="0" rIns="0" tIns="0" bIns="0" anchor="ctr">
-            <a:spAutoFit/>
-          </a:bodyPr>
-          <a:lstStyle/>
-          <a:p>
-            <a:pPr algn="r">
-              <a:spcBef>
-                <a:spcPts val="0"/>
-              </a:spcBef>
-              <a:spcAft>
-                <a:spcPts val="0"/>
-              </a:spcAft>
-            </a:pPr>
-            <a:r>
-              <a:rPr sz="770" b="0">
-                <a:solidFill>
-                  <a:srgbClr val="121A2A"/>
-                </a:solidFill>
-                <a:latin typeface="Noto Sans KR"/>
-                <a:ea typeface="Noto Sans KR"/>
-                <a:cs typeface="Noto Sans KR"/>
-              </a:rPr>
-              <a:t>0</a:t>
+              <a:t>12</a:t>
             </a:r>
           </a:p>
         </p:txBody>
@@ -8387,14 +8386,14 @@
         </p:nvSpPr>
         <p:spPr>
           <a:xfrm>
-            <a:off x="8257031" y="4096512"/>
+            <a:off x="8257031" y="3824685"/>
             <a:ext cx="3465576" cy="9144"/>
           </a:xfrm>
           <a:prstGeom prst="rect">
             <a:avLst/>
           </a:prstGeom>
           <a:solidFill>
-            <a:srgbClr val="DDE3EA"/>
+            <a:srgbClr val="F1F4F8"/>
           </a:solidFill>
           <a:ln>
             <a:noFill/>
@@ -8430,8 +8429,8 @@
         </p:nvSpPr>
         <p:spPr>
           <a:xfrm>
-            <a:off x="8211311" y="4096512"/>
-            <a:ext cx="3557016" cy="438912"/>
+            <a:off x="8220455" y="3824685"/>
+            <a:ext cx="3538728" cy="240237"/>
           </a:xfrm>
           <a:prstGeom prst="rect">
             <a:avLst/>
@@ -8473,8 +8472,8 @@
         </p:nvSpPr>
         <p:spPr>
           <a:xfrm>
-            <a:off x="8293607" y="4123944"/>
-            <a:ext cx="658368" cy="384048"/>
+            <a:off x="8293607" y="3833829"/>
+            <a:ext cx="530352" cy="221949"/>
           </a:xfrm>
           <a:prstGeom prst="rect">
             <a:avLst/>
@@ -8496,7 +8495,95 @@
               </a:spcAft>
             </a:pPr>
             <a:r>
-              <a:rPr sz="770" b="0">
+              <a:rPr sz="650" b="1">
+                <a:solidFill>
+                  <a:srgbClr val="185FA5"/>
+                </a:solidFill>
+                <a:latin typeface="Noto Sans KR"/>
+                <a:ea typeface="Noto Sans KR"/>
+                <a:cs typeface="Noto Sans KR"/>
+              </a:rPr>
+              <a:t>S320</a:t>
+            </a:r>
+          </a:p>
+        </p:txBody>
+      </p:sp>
+      <p:sp>
+        <p:nvSpPr>
+          <p:cNvPr id="125" name="TextBox 124"/>
+          <p:cNvSpPr txBox="1"/>
+          <p:nvPr/>
+        </p:nvSpPr>
+        <p:spPr>
+          <a:xfrm>
+            <a:off x="8823959" y="3833829"/>
+            <a:ext cx="530352" cy="221949"/>
+          </a:xfrm>
+          <a:prstGeom prst="rect">
+            <a:avLst/>
+          </a:prstGeom>
+          <a:noFill/>
+        </p:spPr>
+        <p:txBody>
+          <a:bodyPr wrap="square" lIns="0" rIns="0" tIns="0" bIns="0" anchor="ctr">
+            <a:spAutoFit/>
+          </a:bodyPr>
+          <a:lstStyle/>
+          <a:p>
+            <a:pPr algn="l">
+              <a:spcBef>
+                <a:spcPts val="0"/>
+              </a:spcBef>
+              <a:spcAft>
+                <a:spcPts val="0"/>
+              </a:spcAft>
+            </a:pPr>
+            <a:r>
+              <a:rPr sz="650" b="1">
+                <a:solidFill>
+                  <a:srgbClr val="1D9E75"/>
+                </a:solidFill>
+                <a:latin typeface="Noto Sans KR"/>
+                <a:ea typeface="Noto Sans KR"/>
+                <a:cs typeface="Noto Sans KR"/>
+              </a:rPr>
+              <a:t>요청내</a:t>
+            </a:r>
+          </a:p>
+        </p:txBody>
+      </p:sp>
+      <p:sp>
+        <p:nvSpPr>
+          <p:cNvPr id="126" name="TextBox 125"/>
+          <p:cNvSpPr txBox="1"/>
+          <p:nvPr/>
+        </p:nvSpPr>
+        <p:spPr>
+          <a:xfrm>
+            <a:off x="9354311" y="3833829"/>
+            <a:ext cx="1938528" cy="221949"/>
+          </a:xfrm>
+          <a:prstGeom prst="rect">
+            <a:avLst/>
+          </a:prstGeom>
+          <a:noFill/>
+        </p:spPr>
+        <p:txBody>
+          <a:bodyPr wrap="square" lIns="0" rIns="0" tIns="0" bIns="0" anchor="ctr">
+            <a:spAutoFit/>
+          </a:bodyPr>
+          <a:lstStyle/>
+          <a:p>
+            <a:pPr algn="l">
+              <a:spcBef>
+                <a:spcPts val="0"/>
+              </a:spcBef>
+              <a:spcAft>
+                <a:spcPts val="0"/>
+              </a:spcAft>
+            </a:pPr>
+            <a:r>
+              <a:rPr sz="610" b="0">
                 <a:solidFill>
                   <a:srgbClr val="121A2A"/>
                 </a:solidFill>
@@ -8504,65 +8591,21 @@
                 <a:ea typeface="Noto Sans KR"/>
                 <a:cs typeface="Noto Sans KR"/>
               </a:rPr>
-              <a:t>S129-02.00</a:t>
-            </a:r>
-          </a:p>
-        </p:txBody>
-      </p:sp>
-      <p:sp>
-        <p:nvSpPr>
-          <p:cNvPr id="125" name="TextBox 124"/>
-          <p:cNvSpPr txBox="1"/>
-          <p:nvPr/>
-        </p:nvSpPr>
-        <p:spPr>
-          <a:xfrm>
-            <a:off x="8951976" y="4123944"/>
-            <a:ext cx="1481328" cy="384048"/>
-          </a:xfrm>
-          <a:prstGeom prst="rect">
-            <a:avLst/>
-          </a:prstGeom>
-          <a:noFill/>
-        </p:spPr>
-        <p:txBody>
-          <a:bodyPr wrap="square" lIns="0" rIns="0" tIns="0" bIns="0" anchor="ctr">
-            <a:spAutoFit/>
-          </a:bodyPr>
-          <a:lstStyle/>
-          <a:p>
-            <a:pPr algn="l">
-              <a:spcBef>
-                <a:spcPts val="0"/>
-              </a:spcBef>
-              <a:spcAft>
-                <a:spcPts val="0"/>
-              </a:spcAft>
-            </a:pPr>
-            <a:r>
-              <a:rPr sz="790" b="0">
-                <a:solidFill>
-                  <a:srgbClr val="121A2A"/>
-                </a:solidFill>
-                <a:latin typeface="Noto Sans KR"/>
-                <a:ea typeface="Noto Sans KR"/>
-                <a:cs typeface="Noto Sans KR"/>
-              </a:rPr>
-              <a:t>Iris SoulBrown_40팩</a:t>
-            </a:r>
-          </a:p>
-        </p:txBody>
-      </p:sp>
-      <p:sp>
-        <p:nvSpPr>
-          <p:cNvPr id="126" name="TextBox 125"/>
-          <p:cNvSpPr txBox="1"/>
-          <p:nvPr/>
-        </p:nvSpPr>
-        <p:spPr>
-          <a:xfrm>
-            <a:off x="10433304" y="4123944"/>
-            <a:ext cx="512064" cy="384048"/>
+              <a:t>Clalen O2O2 M_Micelia...</a:t>
+            </a:r>
+          </a:p>
+        </p:txBody>
+      </p:sp>
+      <p:sp>
+        <p:nvSpPr>
+          <p:cNvPr id="127" name="TextBox 126"/>
+          <p:cNvSpPr txBox="1"/>
+          <p:nvPr/>
+        </p:nvSpPr>
+        <p:spPr>
+          <a:xfrm>
+            <a:off x="11292839" y="3833829"/>
+            <a:ext cx="347472" cy="221949"/>
           </a:xfrm>
           <a:prstGeom prst="rect">
             <a:avLst/>
@@ -8584,7 +8627,7 @@
               </a:spcAft>
             </a:pPr>
             <a:r>
-              <a:rPr sz="770" b="1">
+              <a:rPr sz="650" b="1">
                 <a:solidFill>
                   <a:srgbClr val="D85A30"/>
                 </a:solidFill>
@@ -8592,51 +8635,7 @@
                 <a:ea typeface="Noto Sans KR"/>
                 <a:cs typeface="Noto Sans KR"/>
               </a:rPr>
-              <a:t>-54</a:t>
-            </a:r>
-          </a:p>
-        </p:txBody>
-      </p:sp>
-      <p:sp>
-        <p:nvSpPr>
-          <p:cNvPr id="127" name="TextBox 126"/>
-          <p:cNvSpPr txBox="1"/>
-          <p:nvPr/>
-        </p:nvSpPr>
-        <p:spPr>
-          <a:xfrm>
-            <a:off x="10945368" y="4123944"/>
-            <a:ext cx="713232" cy="384048"/>
-          </a:xfrm>
-          <a:prstGeom prst="rect">
-            <a:avLst/>
-          </a:prstGeom>
-          <a:noFill/>
-        </p:spPr>
-        <p:txBody>
-          <a:bodyPr wrap="square" lIns="0" rIns="0" tIns="0" bIns="0" anchor="ctr">
-            <a:spAutoFit/>
-          </a:bodyPr>
-          <a:lstStyle/>
-          <a:p>
-            <a:pPr algn="r">
-              <a:spcBef>
-                <a:spcPts val="0"/>
-              </a:spcBef>
-              <a:spcAft>
-                <a:spcPts val="0"/>
-              </a:spcAft>
-            </a:pPr>
-            <a:r>
-              <a:rPr sz="770" b="0">
-                <a:solidFill>
-                  <a:srgbClr val="121A2A"/>
-                </a:solidFill>
-                <a:latin typeface="Noto Sans KR"/>
-                <a:ea typeface="Noto Sans KR"/>
-                <a:cs typeface="Noto Sans KR"/>
-              </a:rPr>
-              <a:t>0</a:t>
+              <a:t>9</a:t>
             </a:r>
           </a:p>
         </p:txBody>
@@ -8649,14 +8648,14 @@
         </p:nvSpPr>
         <p:spPr>
           <a:xfrm>
-            <a:off x="8257031" y="4535424"/>
+            <a:off x="8257031" y="4064923"/>
             <a:ext cx="3465576" cy="9144"/>
           </a:xfrm>
           <a:prstGeom prst="rect">
             <a:avLst/>
           </a:prstGeom>
           <a:solidFill>
-            <a:srgbClr val="DDE3EA"/>
+            <a:srgbClr val="F1F4F8"/>
           </a:solidFill>
           <a:ln>
             <a:noFill/>
@@ -8692,8 +8691,8 @@
         </p:nvSpPr>
         <p:spPr>
           <a:xfrm>
-            <a:off x="8293607" y="4562856"/>
-            <a:ext cx="658368" cy="384048"/>
+            <a:off x="8293607" y="4074067"/>
+            <a:ext cx="530352" cy="221949"/>
           </a:xfrm>
           <a:prstGeom prst="rect">
             <a:avLst/>
@@ -8715,7 +8714,95 @@
               </a:spcAft>
             </a:pPr>
             <a:r>
-              <a:rPr sz="770" b="0">
+              <a:rPr sz="650" b="1">
+                <a:solidFill>
+                  <a:srgbClr val="185FA5"/>
+                </a:solidFill>
+                <a:latin typeface="Noto Sans KR"/>
+                <a:ea typeface="Noto Sans KR"/>
+                <a:cs typeface="Noto Sans KR"/>
+              </a:rPr>
+              <a:t>S154</a:t>
+            </a:r>
+          </a:p>
+        </p:txBody>
+      </p:sp>
+      <p:sp>
+        <p:nvSpPr>
+          <p:cNvPr id="130" name="TextBox 129"/>
+          <p:cNvSpPr txBox="1"/>
+          <p:nvPr/>
+        </p:nvSpPr>
+        <p:spPr>
+          <a:xfrm>
+            <a:off x="8823959" y="4074067"/>
+            <a:ext cx="530352" cy="221949"/>
+          </a:xfrm>
+          <a:prstGeom prst="rect">
+            <a:avLst/>
+          </a:prstGeom>
+          <a:noFill/>
+        </p:spPr>
+        <p:txBody>
+          <a:bodyPr wrap="square" lIns="0" rIns="0" tIns="0" bIns="0" anchor="ctr">
+            <a:spAutoFit/>
+          </a:bodyPr>
+          <a:lstStyle/>
+          <a:p>
+            <a:pPr algn="l">
+              <a:spcBef>
+                <a:spcPts val="0"/>
+              </a:spcBef>
+              <a:spcAft>
+                <a:spcPts val="0"/>
+              </a:spcAft>
+            </a:pPr>
+            <a:r>
+              <a:rPr sz="650" b="1">
+                <a:solidFill>
+                  <a:srgbClr val="1D9E75"/>
+                </a:solidFill>
+                <a:latin typeface="Noto Sans KR"/>
+                <a:ea typeface="Noto Sans KR"/>
+                <a:cs typeface="Noto Sans KR"/>
+              </a:rPr>
+              <a:t>요청내</a:t>
+            </a:r>
+          </a:p>
+        </p:txBody>
+      </p:sp>
+      <p:sp>
+        <p:nvSpPr>
+          <p:cNvPr id="131" name="TextBox 130"/>
+          <p:cNvSpPr txBox="1"/>
+          <p:nvPr/>
+        </p:nvSpPr>
+        <p:spPr>
+          <a:xfrm>
+            <a:off x="9354311" y="4074067"/>
+            <a:ext cx="1938528" cy="221949"/>
+          </a:xfrm>
+          <a:prstGeom prst="rect">
+            <a:avLst/>
+          </a:prstGeom>
+          <a:noFill/>
+        </p:spPr>
+        <p:txBody>
+          <a:bodyPr wrap="square" lIns="0" rIns="0" tIns="0" bIns="0" anchor="ctr">
+            <a:spAutoFit/>
+          </a:bodyPr>
+          <a:lstStyle/>
+          <a:p>
+            <a:pPr algn="l">
+              <a:spcBef>
+                <a:spcPts val="0"/>
+              </a:spcBef>
+              <a:spcAft>
+                <a:spcPts val="0"/>
+              </a:spcAft>
+            </a:pPr>
+            <a:r>
+              <a:rPr sz="610" b="0">
                 <a:solidFill>
                   <a:srgbClr val="121A2A"/>
                 </a:solidFill>
@@ -8723,65 +8810,21 @@
                 <a:ea typeface="Noto Sans KR"/>
                 <a:cs typeface="Noto Sans KR"/>
               </a:rPr>
-              <a:t>S129-02.25</a:t>
-            </a:r>
-          </a:p>
-        </p:txBody>
-      </p:sp>
-      <p:sp>
-        <p:nvSpPr>
-          <p:cNvPr id="130" name="TextBox 129"/>
-          <p:cNvSpPr txBox="1"/>
-          <p:nvPr/>
-        </p:nvSpPr>
-        <p:spPr>
-          <a:xfrm>
-            <a:off x="8951976" y="4562856"/>
-            <a:ext cx="1481328" cy="384048"/>
-          </a:xfrm>
-          <a:prstGeom prst="rect">
-            <a:avLst/>
-          </a:prstGeom>
-          <a:noFill/>
-        </p:spPr>
-        <p:txBody>
-          <a:bodyPr wrap="square" lIns="0" rIns="0" tIns="0" bIns="0" anchor="ctr">
-            <a:spAutoFit/>
-          </a:bodyPr>
-          <a:lstStyle/>
-          <a:p>
-            <a:pPr algn="l">
-              <a:spcBef>
-                <a:spcPts val="0"/>
-              </a:spcBef>
-              <a:spcAft>
-                <a:spcPts val="0"/>
-              </a:spcAft>
-            </a:pPr>
-            <a:r>
-              <a:rPr sz="790" b="0">
-                <a:solidFill>
-                  <a:srgbClr val="121A2A"/>
-                </a:solidFill>
-                <a:latin typeface="Noto Sans KR"/>
-                <a:ea typeface="Noto Sans KR"/>
-                <a:cs typeface="Noto Sans KR"/>
-              </a:rPr>
-              <a:t>Iris SoulBrown_40팩</a:t>
-            </a:r>
-          </a:p>
-        </p:txBody>
-      </p:sp>
-      <p:sp>
-        <p:nvSpPr>
-          <p:cNvPr id="131" name="TextBox 130"/>
-          <p:cNvSpPr txBox="1"/>
-          <p:nvPr/>
-        </p:nvSpPr>
-        <p:spPr>
-          <a:xfrm>
-            <a:off x="10433304" y="4562856"/>
-            <a:ext cx="512064" cy="384048"/>
+              <a:t>Iris Toric Halo Brown...</a:t>
+            </a:r>
+          </a:p>
+        </p:txBody>
+      </p:sp>
+      <p:sp>
+        <p:nvSpPr>
+          <p:cNvPr id="132" name="TextBox 131"/>
+          <p:cNvSpPr txBox="1"/>
+          <p:nvPr/>
+        </p:nvSpPr>
+        <p:spPr>
+          <a:xfrm>
+            <a:off x="11292839" y="4074067"/>
+            <a:ext cx="347472" cy="221949"/>
           </a:xfrm>
           <a:prstGeom prst="rect">
             <a:avLst/>
@@ -8803,7 +8846,7 @@
               </a:spcAft>
             </a:pPr>
             <a:r>
-              <a:rPr sz="770" b="1">
+              <a:rPr sz="650" b="1">
                 <a:solidFill>
                   <a:srgbClr val="D85A30"/>
                 </a:solidFill>
@@ -8811,51 +8854,7 @@
                 <a:ea typeface="Noto Sans KR"/>
                 <a:cs typeface="Noto Sans KR"/>
               </a:rPr>
-              <a:t>-47</a:t>
-            </a:r>
-          </a:p>
-        </p:txBody>
-      </p:sp>
-      <p:sp>
-        <p:nvSpPr>
-          <p:cNvPr id="132" name="TextBox 131"/>
-          <p:cNvSpPr txBox="1"/>
-          <p:nvPr/>
-        </p:nvSpPr>
-        <p:spPr>
-          <a:xfrm>
-            <a:off x="10945368" y="4562856"/>
-            <a:ext cx="713232" cy="384048"/>
-          </a:xfrm>
-          <a:prstGeom prst="rect">
-            <a:avLst/>
-          </a:prstGeom>
-          <a:noFill/>
-        </p:spPr>
-        <p:txBody>
-          <a:bodyPr wrap="square" lIns="0" rIns="0" tIns="0" bIns="0" anchor="ctr">
-            <a:spAutoFit/>
-          </a:bodyPr>
-          <a:lstStyle/>
-          <a:p>
-            <a:pPr algn="r">
-              <a:spcBef>
-                <a:spcPts val="0"/>
-              </a:spcBef>
-              <a:spcAft>
-                <a:spcPts val="0"/>
-              </a:spcAft>
-            </a:pPr>
-            <a:r>
-              <a:rPr sz="770" b="0">
-                <a:solidFill>
-                  <a:srgbClr val="121A2A"/>
-                </a:solidFill>
-                <a:latin typeface="Noto Sans KR"/>
-                <a:ea typeface="Noto Sans KR"/>
-                <a:cs typeface="Noto Sans KR"/>
-              </a:rPr>
-              <a:t>0</a:t>
+              <a:t>5</a:t>
             </a:r>
           </a:p>
         </p:txBody>
@@ -8868,14 +8867,14 @@
         </p:nvSpPr>
         <p:spPr>
           <a:xfrm>
-            <a:off x="8257031" y="4974336"/>
+            <a:off x="8257031" y="4305161"/>
             <a:ext cx="3465576" cy="9144"/>
           </a:xfrm>
           <a:prstGeom prst="rect">
             <a:avLst/>
           </a:prstGeom>
           <a:solidFill>
-            <a:srgbClr val="DDE3EA"/>
+            <a:srgbClr val="F1F4F8"/>
           </a:solidFill>
           <a:ln>
             <a:noFill/>
@@ -8911,8 +8910,8 @@
         </p:nvSpPr>
         <p:spPr>
           <a:xfrm>
-            <a:off x="8211311" y="4974336"/>
-            <a:ext cx="3557016" cy="438912"/>
+            <a:off x="8220455" y="4305161"/>
+            <a:ext cx="3538728" cy="240237"/>
           </a:xfrm>
           <a:prstGeom prst="rect">
             <a:avLst/>
@@ -8954,8 +8953,8 @@
         </p:nvSpPr>
         <p:spPr>
           <a:xfrm>
-            <a:off x="8293607" y="5001768"/>
-            <a:ext cx="658368" cy="384048"/>
+            <a:off x="8293607" y="4314305"/>
+            <a:ext cx="530352" cy="221949"/>
           </a:xfrm>
           <a:prstGeom prst="rect">
             <a:avLst/>
@@ -8977,7 +8976,95 @@
               </a:spcAft>
             </a:pPr>
             <a:r>
-              <a:rPr sz="770" b="0">
+              <a:rPr sz="650" b="1">
+                <a:solidFill>
+                  <a:srgbClr val="185FA5"/>
+                </a:solidFill>
+                <a:latin typeface="Noto Sans KR"/>
+                <a:ea typeface="Noto Sans KR"/>
+                <a:cs typeface="Noto Sans KR"/>
+              </a:rPr>
+              <a:t>S309</a:t>
+            </a:r>
+          </a:p>
+        </p:txBody>
+      </p:sp>
+      <p:sp>
+        <p:nvSpPr>
+          <p:cNvPr id="136" name="TextBox 135"/>
+          <p:cNvSpPr txBox="1"/>
+          <p:nvPr/>
+        </p:nvSpPr>
+        <p:spPr>
+          <a:xfrm>
+            <a:off x="8823959" y="4314305"/>
+            <a:ext cx="530352" cy="221949"/>
+          </a:xfrm>
+          <a:prstGeom prst="rect">
+            <a:avLst/>
+          </a:prstGeom>
+          <a:noFill/>
+        </p:spPr>
+        <p:txBody>
+          <a:bodyPr wrap="square" lIns="0" rIns="0" tIns="0" bIns="0" anchor="ctr">
+            <a:spAutoFit/>
+          </a:bodyPr>
+          <a:lstStyle/>
+          <a:p>
+            <a:pPr algn="l">
+              <a:spcBef>
+                <a:spcPts val="0"/>
+              </a:spcBef>
+              <a:spcAft>
+                <a:spcPts val="0"/>
+              </a:spcAft>
+            </a:pPr>
+            <a:r>
+              <a:rPr sz="650" b="1">
+                <a:solidFill>
+                  <a:srgbClr val="1D9E75"/>
+                </a:solidFill>
+                <a:latin typeface="Noto Sans KR"/>
+                <a:ea typeface="Noto Sans KR"/>
+                <a:cs typeface="Noto Sans KR"/>
+              </a:rPr>
+              <a:t>요청내</a:t>
+            </a:r>
+          </a:p>
+        </p:txBody>
+      </p:sp>
+      <p:sp>
+        <p:nvSpPr>
+          <p:cNvPr id="137" name="TextBox 136"/>
+          <p:cNvSpPr txBox="1"/>
+          <p:nvPr/>
+        </p:nvSpPr>
+        <p:spPr>
+          <a:xfrm>
+            <a:off x="9354311" y="4314305"/>
+            <a:ext cx="1938528" cy="221949"/>
+          </a:xfrm>
+          <a:prstGeom prst="rect">
+            <a:avLst/>
+          </a:prstGeom>
+          <a:noFill/>
+        </p:spPr>
+        <p:txBody>
+          <a:bodyPr wrap="square" lIns="0" rIns="0" tIns="0" bIns="0" anchor="ctr">
+            <a:spAutoFit/>
+          </a:bodyPr>
+          <a:lstStyle/>
+          <a:p>
+            <a:pPr algn="l">
+              <a:spcBef>
+                <a:spcPts val="0"/>
+              </a:spcBef>
+              <a:spcAft>
+                <a:spcPts val="0"/>
+              </a:spcAft>
+            </a:pPr>
+            <a:r>
+              <a:rPr sz="610" b="0">
                 <a:solidFill>
                   <a:srgbClr val="121A2A"/>
                 </a:solidFill>
@@ -8985,65 +9072,21 @@
                 <a:ea typeface="Noto Sans KR"/>
                 <a:cs typeface="Noto Sans KR"/>
               </a:rPr>
-              <a:t>S129-01.50</a:t>
-            </a:r>
-          </a:p>
-        </p:txBody>
-      </p:sp>
-      <p:sp>
-        <p:nvSpPr>
-          <p:cNvPr id="136" name="TextBox 135"/>
-          <p:cNvSpPr txBox="1"/>
-          <p:nvPr/>
-        </p:nvSpPr>
-        <p:spPr>
-          <a:xfrm>
-            <a:off x="8951976" y="5001768"/>
-            <a:ext cx="1481328" cy="384048"/>
-          </a:xfrm>
-          <a:prstGeom prst="rect">
-            <a:avLst/>
-          </a:prstGeom>
-          <a:noFill/>
-        </p:spPr>
-        <p:txBody>
-          <a:bodyPr wrap="square" lIns="0" rIns="0" tIns="0" bIns="0" anchor="ctr">
-            <a:spAutoFit/>
-          </a:bodyPr>
-          <a:lstStyle/>
-          <a:p>
-            <a:pPr algn="l">
-              <a:spcBef>
-                <a:spcPts val="0"/>
-              </a:spcBef>
-              <a:spcAft>
-                <a:spcPts val="0"/>
-              </a:spcAft>
-            </a:pPr>
-            <a:r>
-              <a:rPr sz="790" b="0">
-                <a:solidFill>
-                  <a:srgbClr val="121A2A"/>
-                </a:solidFill>
-                <a:latin typeface="Noto Sans KR"/>
-                <a:ea typeface="Noto Sans KR"/>
-                <a:cs typeface="Noto Sans KR"/>
-              </a:rPr>
-              <a:t>Iris SoulBrown_40팩</a:t>
-            </a:r>
-          </a:p>
-        </p:txBody>
-      </p:sp>
-      <p:sp>
-        <p:nvSpPr>
-          <p:cNvPr id="137" name="TextBox 136"/>
-          <p:cNvSpPr txBox="1"/>
-          <p:nvPr/>
-        </p:nvSpPr>
-        <p:spPr>
-          <a:xfrm>
-            <a:off x="10433304" y="5001768"/>
-            <a:ext cx="512064" cy="384048"/>
+              <a:t>Clalen O2O2 D_Micelia...</a:t>
+            </a:r>
+          </a:p>
+        </p:txBody>
+      </p:sp>
+      <p:sp>
+        <p:nvSpPr>
+          <p:cNvPr id="138" name="TextBox 137"/>
+          <p:cNvSpPr txBox="1"/>
+          <p:nvPr/>
+        </p:nvSpPr>
+        <p:spPr>
+          <a:xfrm>
+            <a:off x="11292839" y="4314305"/>
+            <a:ext cx="347472" cy="221949"/>
           </a:xfrm>
           <a:prstGeom prst="rect">
             <a:avLst/>
@@ -9065,7 +9108,7 @@
               </a:spcAft>
             </a:pPr>
             <a:r>
-              <a:rPr sz="770" b="1">
+              <a:rPr sz="650" b="1">
                 <a:solidFill>
                   <a:srgbClr val="D85A30"/>
                 </a:solidFill>
@@ -9073,51 +9116,7 @@
                 <a:ea typeface="Noto Sans KR"/>
                 <a:cs typeface="Noto Sans KR"/>
               </a:rPr>
-              <a:t>-33</a:t>
-            </a:r>
-          </a:p>
-        </p:txBody>
-      </p:sp>
-      <p:sp>
-        <p:nvSpPr>
-          <p:cNvPr id="138" name="TextBox 137"/>
-          <p:cNvSpPr txBox="1"/>
-          <p:nvPr/>
-        </p:nvSpPr>
-        <p:spPr>
-          <a:xfrm>
-            <a:off x="10945368" y="5001768"/>
-            <a:ext cx="713232" cy="384048"/>
-          </a:xfrm>
-          <a:prstGeom prst="rect">
-            <a:avLst/>
-          </a:prstGeom>
-          <a:noFill/>
-        </p:spPr>
-        <p:txBody>
-          <a:bodyPr wrap="square" lIns="0" rIns="0" tIns="0" bIns="0" anchor="ctr">
-            <a:spAutoFit/>
-          </a:bodyPr>
-          <a:lstStyle/>
-          <a:p>
-            <a:pPr algn="r">
-              <a:spcBef>
-                <a:spcPts val="0"/>
-              </a:spcBef>
-              <a:spcAft>
-                <a:spcPts val="0"/>
-              </a:spcAft>
-            </a:pPr>
-            <a:r>
-              <a:rPr sz="770" b="0">
-                <a:solidFill>
-                  <a:srgbClr val="121A2A"/>
-                </a:solidFill>
-                <a:latin typeface="Noto Sans KR"/>
-                <a:ea typeface="Noto Sans KR"/>
-                <a:cs typeface="Noto Sans KR"/>
-              </a:rPr>
-              <a:t>0</a:t>
+              <a:t>4</a:t>
             </a:r>
           </a:p>
         </p:txBody>
@@ -9130,1090 +9129,8 @@
         </p:nvSpPr>
         <p:spPr>
           <a:xfrm>
-            <a:off x="8257031" y="5413248"/>
+            <a:off x="8257031" y="4545399"/>
             <a:ext cx="3465576" cy="9144"/>
-          </a:xfrm>
-          <a:prstGeom prst="rect">
-            <a:avLst/>
-          </a:prstGeom>
-          <a:solidFill>
-            <a:srgbClr val="DDE3EA"/>
-          </a:solidFill>
-          <a:ln>
-            <a:noFill/>
-          </a:ln>
-        </p:spPr>
-        <p:style>
-          <a:lnRef idx="1">
-            <a:schemeClr val="accent1"/>
-          </a:lnRef>
-          <a:fillRef idx="3">
-            <a:schemeClr val="accent1"/>
-          </a:fillRef>
-          <a:effectRef idx="2">
-            <a:schemeClr val="accent1"/>
-          </a:effectRef>
-          <a:fontRef idx="minor">
-            <a:schemeClr val="lt1"/>
-          </a:fontRef>
-        </p:style>
-        <p:txBody>
-          <a:bodyPr rtlCol="0" anchor="ctr"/>
-          <a:lstStyle/>
-          <a:p>
-            <a:pPr algn="ctr"/>
-          </a:p>
-        </p:txBody>
-      </p:sp>
-      <p:sp>
-        <p:nvSpPr>
-          <p:cNvPr id="140" name="TextBox 139"/>
-          <p:cNvSpPr txBox="1"/>
-          <p:nvPr/>
-        </p:nvSpPr>
-        <p:spPr>
-          <a:xfrm>
-            <a:off x="8293607" y="5440680"/>
-            <a:ext cx="658368" cy="384048"/>
-          </a:xfrm>
-          <a:prstGeom prst="rect">
-            <a:avLst/>
-          </a:prstGeom>
-          <a:noFill/>
-        </p:spPr>
-        <p:txBody>
-          <a:bodyPr wrap="square" lIns="0" rIns="0" tIns="0" bIns="0" anchor="ctr">
-            <a:spAutoFit/>
-          </a:bodyPr>
-          <a:lstStyle/>
-          <a:p>
-            <a:pPr algn="l">
-              <a:spcBef>
-                <a:spcPts val="0"/>
-              </a:spcBef>
-              <a:spcAft>
-                <a:spcPts val="0"/>
-              </a:spcAft>
-            </a:pPr>
-            <a:r>
-              <a:rPr sz="770" b="0">
-                <a:solidFill>
-                  <a:srgbClr val="121A2A"/>
-                </a:solidFill>
-                <a:latin typeface="Noto Sans KR"/>
-                <a:ea typeface="Noto Sans KR"/>
-                <a:cs typeface="Noto Sans KR"/>
-              </a:rPr>
-              <a:t>S129-05.50</a:t>
-            </a:r>
-          </a:p>
-        </p:txBody>
-      </p:sp>
-      <p:sp>
-        <p:nvSpPr>
-          <p:cNvPr id="141" name="TextBox 140"/>
-          <p:cNvSpPr txBox="1"/>
-          <p:nvPr/>
-        </p:nvSpPr>
-        <p:spPr>
-          <a:xfrm>
-            <a:off x="8951976" y="5440680"/>
-            <a:ext cx="1481328" cy="384048"/>
-          </a:xfrm>
-          <a:prstGeom prst="rect">
-            <a:avLst/>
-          </a:prstGeom>
-          <a:noFill/>
-        </p:spPr>
-        <p:txBody>
-          <a:bodyPr wrap="square" lIns="0" rIns="0" tIns="0" bIns="0" anchor="ctr">
-            <a:spAutoFit/>
-          </a:bodyPr>
-          <a:lstStyle/>
-          <a:p>
-            <a:pPr algn="l">
-              <a:spcBef>
-                <a:spcPts val="0"/>
-              </a:spcBef>
-              <a:spcAft>
-                <a:spcPts val="0"/>
-              </a:spcAft>
-            </a:pPr>
-            <a:r>
-              <a:rPr sz="790" b="0">
-                <a:solidFill>
-                  <a:srgbClr val="121A2A"/>
-                </a:solidFill>
-                <a:latin typeface="Noto Sans KR"/>
-                <a:ea typeface="Noto Sans KR"/>
-                <a:cs typeface="Noto Sans KR"/>
-              </a:rPr>
-              <a:t>Iris SoulBrown_40팩</a:t>
-            </a:r>
-          </a:p>
-        </p:txBody>
-      </p:sp>
-      <p:sp>
-        <p:nvSpPr>
-          <p:cNvPr id="142" name="TextBox 141"/>
-          <p:cNvSpPr txBox="1"/>
-          <p:nvPr/>
-        </p:nvSpPr>
-        <p:spPr>
-          <a:xfrm>
-            <a:off x="10433304" y="5440680"/>
-            <a:ext cx="512064" cy="384048"/>
-          </a:xfrm>
-          <a:prstGeom prst="rect">
-            <a:avLst/>
-          </a:prstGeom>
-          <a:noFill/>
-        </p:spPr>
-        <p:txBody>
-          <a:bodyPr wrap="square" lIns="0" rIns="0" tIns="0" bIns="0" anchor="ctr">
-            <a:spAutoFit/>
-          </a:bodyPr>
-          <a:lstStyle/>
-          <a:p>
-            <a:pPr algn="r">
-              <a:spcBef>
-                <a:spcPts val="0"/>
-              </a:spcBef>
-              <a:spcAft>
-                <a:spcPts val="0"/>
-              </a:spcAft>
-            </a:pPr>
-            <a:r>
-              <a:rPr sz="770" b="1">
-                <a:solidFill>
-                  <a:srgbClr val="D85A30"/>
-                </a:solidFill>
-                <a:latin typeface="Noto Sans KR"/>
-                <a:ea typeface="Noto Sans KR"/>
-                <a:cs typeface="Noto Sans KR"/>
-              </a:rPr>
-              <a:t>-30</a:t>
-            </a:r>
-          </a:p>
-        </p:txBody>
-      </p:sp>
-      <p:sp>
-        <p:nvSpPr>
-          <p:cNvPr id="143" name="TextBox 142"/>
-          <p:cNvSpPr txBox="1"/>
-          <p:nvPr/>
-        </p:nvSpPr>
-        <p:spPr>
-          <a:xfrm>
-            <a:off x="10945368" y="5440680"/>
-            <a:ext cx="713232" cy="384048"/>
-          </a:xfrm>
-          <a:prstGeom prst="rect">
-            <a:avLst/>
-          </a:prstGeom>
-          <a:noFill/>
-        </p:spPr>
-        <p:txBody>
-          <a:bodyPr wrap="square" lIns="0" rIns="0" tIns="0" bIns="0" anchor="ctr">
-            <a:spAutoFit/>
-          </a:bodyPr>
-          <a:lstStyle/>
-          <a:p>
-            <a:pPr algn="r">
-              <a:spcBef>
-                <a:spcPts val="0"/>
-              </a:spcBef>
-              <a:spcAft>
-                <a:spcPts val="0"/>
-              </a:spcAft>
-            </a:pPr>
-            <a:r>
-              <a:rPr sz="770" b="0">
-                <a:solidFill>
-                  <a:srgbClr val="121A2A"/>
-                </a:solidFill>
-                <a:latin typeface="Noto Sans KR"/>
-                <a:ea typeface="Noto Sans KR"/>
-                <a:cs typeface="Noto Sans KR"/>
-              </a:rPr>
-              <a:t>0</a:t>
-            </a:r>
-          </a:p>
-        </p:txBody>
-      </p:sp>
-      <p:sp>
-        <p:nvSpPr>
-          <p:cNvPr id="144" name="Rectangle 143"/>
-          <p:cNvSpPr/>
-          <p:nvPr/>
-        </p:nvSpPr>
-        <p:spPr>
-          <a:xfrm>
-            <a:off x="8257031" y="5852160"/>
-            <a:ext cx="3465576" cy="9144"/>
-          </a:xfrm>
-          <a:prstGeom prst="rect">
-            <a:avLst/>
-          </a:prstGeom>
-          <a:solidFill>
-            <a:srgbClr val="DDE3EA"/>
-          </a:solidFill>
-          <a:ln>
-            <a:noFill/>
-          </a:ln>
-        </p:spPr>
-        <p:style>
-          <a:lnRef idx="1">
-            <a:schemeClr val="accent1"/>
-          </a:lnRef>
-          <a:fillRef idx="3">
-            <a:schemeClr val="accent1"/>
-          </a:fillRef>
-          <a:effectRef idx="2">
-            <a:schemeClr val="accent1"/>
-          </a:effectRef>
-          <a:fontRef idx="minor">
-            <a:schemeClr val="lt1"/>
-          </a:fontRef>
-        </p:style>
-        <p:txBody>
-          <a:bodyPr rtlCol="0" anchor="ctr"/>
-          <a:lstStyle/>
-          <a:p>
-            <a:pPr algn="ctr"/>
-          </a:p>
-        </p:txBody>
-      </p:sp>
-      <p:sp>
-        <p:nvSpPr>
-          <p:cNvPr id="145" name="TextBox 144"/>
-          <p:cNvSpPr txBox="1"/>
-          <p:nvPr/>
-        </p:nvSpPr>
-        <p:spPr>
-          <a:xfrm>
-            <a:off x="411480" y="6547104"/>
-            <a:ext cx="11338560" cy="201168"/>
-          </a:xfrm>
-          <a:prstGeom prst="rect">
-            <a:avLst/>
-          </a:prstGeom>
-          <a:noFill/>
-        </p:spPr>
-        <p:txBody>
-          <a:bodyPr wrap="square" lIns="0" rIns="0" tIns="0" bIns="0" anchor="ctr">
-            <a:spAutoFit/>
-          </a:bodyPr>
-          <a:lstStyle/>
-          <a:p>
-            <a:pPr algn="l">
-              <a:spcBef>
-                <a:spcPts val="0"/>
-              </a:spcBef>
-              <a:spcAft>
-                <a:spcPts val="0"/>
-              </a:spcAft>
-            </a:pPr>
-            <a:r>
-              <a:rPr sz="750" b="0">
-                <a:solidFill>
-                  <a:srgbClr val="6B7280"/>
-                </a:solidFill>
-                <a:latin typeface="Noto Sans KR"/>
-                <a:ea typeface="Noto Sans KR"/>
-                <a:cs typeface="Noto Sans KR"/>
-              </a:rPr>
-              <a:t>진도율은 생산요청 기준이며, 요청/긴급 대응 품목은 일일 재고표 기준으로 산출됩니다.</a:t>
-            </a:r>
-          </a:p>
-        </p:txBody>
-      </p:sp>
-    </p:spTree>
-  </p:cSld>
-  <p:clrMapOvr>
-    <a:masterClrMapping/>
-  </p:clrMapOvr>
-</p:sld>
-</file>
-
-<file path=ppt/slides/slide2.xml><?xml version="1.0" encoding="utf-8"?>
-<p:sld xmlns:a="http://schemas.openxmlformats.org/drawingml/2006/main" xmlns:p="http://schemas.openxmlformats.org/presentationml/2006/main" xmlns:r="http://schemas.openxmlformats.org/officeDocument/2006/relationships">
-  <p:cSld>
-    <p:bg>
-      <p:bgPr>
-        <a:solidFill>
-          <a:srgbClr val="F6F7F9"/>
-        </a:solidFill>
-        <a:effectLst/>
-      </p:bgPr>
-    </p:bg>
-    <p:spTree>
-      <p:nvGrpSpPr>
-        <p:cNvPr id="1" name=""/>
-        <p:cNvGrpSpPr/>
-        <p:nvPr/>
-      </p:nvGrpSpPr>
-      <p:grpSpPr/>
-      <p:sp>
-        <p:nvSpPr>
-          <p:cNvPr id="2" name="Rectangle 1"/>
-          <p:cNvSpPr/>
-          <p:nvPr/>
-        </p:nvSpPr>
-        <p:spPr>
-          <a:xfrm>
-            <a:off x="0" y="0"/>
-            <a:ext cx="12191695" cy="804672"/>
-          </a:xfrm>
-          <a:prstGeom prst="rect">
-            <a:avLst/>
-          </a:prstGeom>
-          <a:solidFill>
-            <a:srgbClr val="172033"/>
-          </a:solidFill>
-          <a:ln>
-            <a:noFill/>
-          </a:ln>
-        </p:spPr>
-        <p:style>
-          <a:lnRef idx="1">
-            <a:schemeClr val="accent1"/>
-          </a:lnRef>
-          <a:fillRef idx="3">
-            <a:schemeClr val="accent1"/>
-          </a:fillRef>
-          <a:effectRef idx="2">
-            <a:schemeClr val="accent1"/>
-          </a:effectRef>
-          <a:fontRef idx="minor">
-            <a:schemeClr val="lt1"/>
-          </a:fontRef>
-        </p:style>
-        <p:txBody>
-          <a:bodyPr rtlCol="0" anchor="ctr"/>
-          <a:lstStyle/>
-          <a:p>
-            <a:pPr algn="ctr"/>
-          </a:p>
-        </p:txBody>
-      </p:sp>
-      <p:sp>
-        <p:nvSpPr>
-          <p:cNvPr id="3" name="Rectangle 2"/>
-          <p:cNvSpPr/>
-          <p:nvPr/>
-        </p:nvSpPr>
-        <p:spPr>
-          <a:xfrm>
-            <a:off x="0" y="786384"/>
-            <a:ext cx="12191695" cy="27432"/>
-          </a:xfrm>
-          <a:prstGeom prst="rect">
-            <a:avLst/>
-          </a:prstGeom>
-          <a:solidFill>
-            <a:srgbClr val="D85A30"/>
-          </a:solidFill>
-          <a:ln w="6350">
-            <a:solidFill>
-              <a:srgbClr val="D85A30"/>
-            </a:solidFill>
-          </a:ln>
-        </p:spPr>
-        <p:style>
-          <a:lnRef idx="1">
-            <a:schemeClr val="accent1"/>
-          </a:lnRef>
-          <a:fillRef idx="3">
-            <a:schemeClr val="accent1"/>
-          </a:fillRef>
-          <a:effectRef idx="2">
-            <a:schemeClr val="accent1"/>
-          </a:effectRef>
-          <a:fontRef idx="minor">
-            <a:schemeClr val="lt1"/>
-          </a:fontRef>
-        </p:style>
-        <p:txBody>
-          <a:bodyPr rtlCol="0" anchor="ctr"/>
-          <a:lstStyle/>
-          <a:p>
-            <a:pPr algn="ctr"/>
-          </a:p>
-        </p:txBody>
-      </p:sp>
-      <p:sp>
-        <p:nvSpPr>
-          <p:cNvPr id="4" name="TextBox 3"/>
-          <p:cNvSpPr txBox="1"/>
-          <p:nvPr/>
-        </p:nvSpPr>
-        <p:spPr>
-          <a:xfrm>
-            <a:off x="411480" y="146304"/>
-            <a:ext cx="6217920" cy="292608"/>
-          </a:xfrm>
-          <a:prstGeom prst="rect">
-            <a:avLst/>
-          </a:prstGeom>
-          <a:noFill/>
-        </p:spPr>
-        <p:txBody>
-          <a:bodyPr wrap="square" lIns="0" rIns="0" tIns="0" bIns="0" anchor="ctr">
-            <a:spAutoFit/>
-          </a:bodyPr>
-          <a:lstStyle/>
-          <a:p>
-            <a:pPr algn="l">
-              <a:spcBef>
-                <a:spcPts val="0"/>
-              </a:spcBef>
-              <a:spcAft>
-                <a:spcPts val="0"/>
-              </a:spcAft>
-            </a:pPr>
-            <a:r>
-              <a:rPr sz="1800" b="1">
-                <a:solidFill>
-                  <a:srgbClr val="FFFFFF"/>
-                </a:solidFill>
-                <a:latin typeface="Noto Sans KR"/>
-                <a:ea typeface="Noto Sans KR"/>
-                <a:cs typeface="Noto Sans KR"/>
-              </a:rPr>
-              <a:t>요청 긴급 S코드 요약</a:t>
-            </a:r>
-          </a:p>
-        </p:txBody>
-      </p:sp>
-      <p:sp>
-        <p:nvSpPr>
-          <p:cNvPr id="5" name="TextBox 4"/>
-          <p:cNvSpPr txBox="1"/>
-          <p:nvPr/>
-        </p:nvSpPr>
-        <p:spPr>
-          <a:xfrm>
-            <a:off x="411480" y="466344"/>
-            <a:ext cx="6583680" cy="164592"/>
-          </a:xfrm>
-          <a:prstGeom prst="rect">
-            <a:avLst/>
-          </a:prstGeom>
-          <a:noFill/>
-        </p:spPr>
-        <p:txBody>
-          <a:bodyPr wrap="square" lIns="0" rIns="0" tIns="0" bIns="0" anchor="ctr">
-            <a:spAutoFit/>
-          </a:bodyPr>
-          <a:lstStyle/>
-          <a:p>
-            <a:pPr algn="l">
-              <a:spcBef>
-                <a:spcPts val="0"/>
-              </a:spcBef>
-              <a:spcAft>
-                <a:spcPts val="0"/>
-              </a:spcAft>
-            </a:pPr>
-            <a:r>
-              <a:rPr sz="830" b="0">
-                <a:solidFill>
-                  <a:srgbClr val="CBD5E1"/>
-                </a:solidFill>
-                <a:latin typeface="Noto Sans KR"/>
-                <a:ea typeface="Noto Sans KR"/>
-                <a:cs typeface="Noto Sans KR"/>
-              </a:rPr>
-              <a:t>일일 재고표 기준 긴급요청 품목을 S코드 단위로 집계</a:t>
-            </a:r>
-          </a:p>
-        </p:txBody>
-      </p:sp>
-      <p:sp>
-        <p:nvSpPr>
-          <p:cNvPr id="6" name="TextBox 5"/>
-          <p:cNvSpPr txBox="1"/>
-          <p:nvPr/>
-        </p:nvSpPr>
-        <p:spPr>
-          <a:xfrm>
-            <a:off x="7406640" y="301752"/>
-            <a:ext cx="4343400" cy="182880"/>
-          </a:xfrm>
-          <a:prstGeom prst="rect">
-            <a:avLst/>
-          </a:prstGeom>
-          <a:noFill/>
-        </p:spPr>
-        <p:txBody>
-          <a:bodyPr wrap="square" lIns="0" rIns="0" tIns="0" bIns="0" anchor="ctr">
-            <a:spAutoFit/>
-          </a:bodyPr>
-          <a:lstStyle/>
-          <a:p>
-            <a:pPr algn="r">
-              <a:spcBef>
-                <a:spcPts val="0"/>
-              </a:spcBef>
-              <a:spcAft>
-                <a:spcPts val="0"/>
-              </a:spcAft>
-            </a:pPr>
-            <a:r>
-              <a:rPr sz="780" b="0">
-                <a:solidFill>
-                  <a:srgbClr val="E5E7EB"/>
-                </a:solidFill>
-                <a:latin typeface="Noto Sans KR"/>
-                <a:ea typeface="Noto Sans KR"/>
-                <a:cs typeface="Noto Sans KR"/>
-              </a:rPr>
-              <a:t>기준: ?? / 산출시각: 2026-06-25 13:49</a:t>
-            </a:r>
-          </a:p>
-        </p:txBody>
-      </p:sp>
-      <p:sp>
-        <p:nvSpPr>
-          <p:cNvPr id="7" name="TextBox 6"/>
-          <p:cNvSpPr txBox="1"/>
-          <p:nvPr/>
-        </p:nvSpPr>
-        <p:spPr>
-          <a:xfrm>
-            <a:off x="566928" y="1024128"/>
-            <a:ext cx="7315200" cy="219456"/>
-          </a:xfrm>
-          <a:prstGeom prst="rect">
-            <a:avLst/>
-          </a:prstGeom>
-          <a:noFill/>
-        </p:spPr>
-        <p:txBody>
-          <a:bodyPr wrap="square" lIns="0" rIns="0" tIns="0" bIns="0" anchor="ctr">
-            <a:spAutoFit/>
-          </a:bodyPr>
-          <a:lstStyle/>
-          <a:p>
-            <a:pPr algn="l">
-              <a:spcBef>
-                <a:spcPts val="0"/>
-              </a:spcBef>
-              <a:spcAft>
-                <a:spcPts val="0"/>
-              </a:spcAft>
-            </a:pPr>
-            <a:r>
-              <a:rPr sz="1000" b="1">
-                <a:solidFill>
-                  <a:srgbClr val="121A2A"/>
-                </a:solidFill>
-                <a:latin typeface="Noto Sans KR"/>
-                <a:ea typeface="Noto Sans KR"/>
-                <a:cs typeface="Noto Sans KR"/>
-              </a:rPr>
-              <a:t>S코드 11개 / SKU 42개 / 요청외 S코드 4개</a:t>
-            </a:r>
-          </a:p>
-        </p:txBody>
-      </p:sp>
-      <p:sp>
-        <p:nvSpPr>
-          <p:cNvPr id="8" name="TextBox 7"/>
-          <p:cNvSpPr txBox="1"/>
-          <p:nvPr/>
-        </p:nvSpPr>
-        <p:spPr>
-          <a:xfrm>
-            <a:off x="566928" y="6382512"/>
-            <a:ext cx="10789920" cy="182880"/>
-          </a:xfrm>
-          <a:prstGeom prst="rect">
-            <a:avLst/>
-          </a:prstGeom>
-          <a:noFill/>
-        </p:spPr>
-        <p:txBody>
-          <a:bodyPr wrap="square" lIns="0" rIns="0" tIns="0" bIns="0" anchor="ctr">
-            <a:spAutoFit/>
-          </a:bodyPr>
-          <a:lstStyle/>
-          <a:p>
-            <a:pPr algn="l">
-              <a:spcBef>
-                <a:spcPts val="0"/>
-              </a:spcBef>
-              <a:spcAft>
-                <a:spcPts val="0"/>
-              </a:spcAft>
-            </a:pPr>
-            <a:r>
-              <a:rPr sz="750" b="0">
-                <a:solidFill>
-                  <a:srgbClr val="6B7280"/>
-                </a:solidFill>
-                <a:latin typeface="Noto Sans KR"/>
-                <a:ea typeface="Noto Sans KR"/>
-                <a:cs typeface="Noto Sans KR"/>
-              </a:rPr>
-              <a:t>요청외는 해당 S코드 안에 요청외 긴급 SKU가 1개 이상 포함된 경우로 분류합니다.</a:t>
-            </a:r>
-          </a:p>
-        </p:txBody>
-      </p:sp>
-      <p:sp>
-        <p:nvSpPr>
-          <p:cNvPr id="9" name="Rounded Rectangle 8"/>
-          <p:cNvSpPr/>
-          <p:nvPr/>
-        </p:nvSpPr>
-        <p:spPr>
-          <a:xfrm>
-            <a:off x="566928" y="1371600"/>
-            <a:ext cx="11064240" cy="4846320"/>
-          </a:xfrm>
-          <a:prstGeom prst="roundRect">
-            <a:avLst/>
-          </a:prstGeom>
-          <a:solidFill>
-            <a:srgbClr val="FFFFFF"/>
-          </a:solidFill>
-          <a:ln w="6350">
-            <a:solidFill>
-              <a:srgbClr val="DDE3EA"/>
-            </a:solidFill>
-          </a:ln>
-        </p:spPr>
-        <p:style>
-          <a:lnRef idx="1">
-            <a:schemeClr val="accent1"/>
-          </a:lnRef>
-          <a:fillRef idx="3">
-            <a:schemeClr val="accent1"/>
-          </a:fillRef>
-          <a:effectRef idx="2">
-            <a:schemeClr val="accent1"/>
-          </a:effectRef>
-          <a:fontRef idx="minor">
-            <a:schemeClr val="lt1"/>
-          </a:fontRef>
-        </p:style>
-        <p:txBody>
-          <a:bodyPr rtlCol="0" anchor="ctr"/>
-          <a:lstStyle/>
-          <a:p>
-            <a:pPr algn="ctr"/>
-          </a:p>
-        </p:txBody>
-      </p:sp>
-      <p:sp>
-        <p:nvSpPr>
-          <p:cNvPr id="10" name="Rectangle 9"/>
-          <p:cNvSpPr/>
-          <p:nvPr/>
-        </p:nvSpPr>
-        <p:spPr>
-          <a:xfrm>
-            <a:off x="566928" y="1371600"/>
-            <a:ext cx="11064240" cy="384048"/>
-          </a:xfrm>
-          <a:prstGeom prst="rect">
-            <a:avLst/>
-          </a:prstGeom>
-          <a:solidFill>
-            <a:srgbClr val="172033"/>
-          </a:solidFill>
-          <a:ln w="6350">
-            <a:solidFill>
-              <a:srgbClr val="172033"/>
-            </a:solidFill>
-          </a:ln>
-        </p:spPr>
-        <p:style>
-          <a:lnRef idx="1">
-            <a:schemeClr val="accent1"/>
-          </a:lnRef>
-          <a:fillRef idx="3">
-            <a:schemeClr val="accent1"/>
-          </a:fillRef>
-          <a:effectRef idx="2">
-            <a:schemeClr val="accent1"/>
-          </a:effectRef>
-          <a:fontRef idx="minor">
-            <a:schemeClr val="lt1"/>
-          </a:fontRef>
-        </p:style>
-        <p:txBody>
-          <a:bodyPr rtlCol="0" anchor="ctr"/>
-          <a:lstStyle/>
-          <a:p>
-            <a:pPr algn="ctr"/>
-          </a:p>
-        </p:txBody>
-      </p:sp>
-      <p:sp>
-        <p:nvSpPr>
-          <p:cNvPr id="11" name="TextBox 10"/>
-          <p:cNvSpPr txBox="1"/>
-          <p:nvPr/>
-        </p:nvSpPr>
-        <p:spPr>
-          <a:xfrm>
-            <a:off x="713232" y="1426464"/>
-            <a:ext cx="960120" cy="274320"/>
-          </a:xfrm>
-          <a:prstGeom prst="rect">
-            <a:avLst/>
-          </a:prstGeom>
-          <a:noFill/>
-        </p:spPr>
-        <p:txBody>
-          <a:bodyPr wrap="square" lIns="0" rIns="0" tIns="0" bIns="0" anchor="ctr">
-            <a:spAutoFit/>
-          </a:bodyPr>
-          <a:lstStyle/>
-          <a:p>
-            <a:pPr algn="l">
-              <a:spcBef>
-                <a:spcPts val="0"/>
-              </a:spcBef>
-              <a:spcAft>
-                <a:spcPts val="0"/>
-              </a:spcAft>
-            </a:pPr>
-            <a:r>
-              <a:rPr sz="850" b="1">
-                <a:solidFill>
-                  <a:srgbClr val="FFFFFF"/>
-                </a:solidFill>
-                <a:latin typeface="Noto Sans KR"/>
-                <a:ea typeface="Noto Sans KR"/>
-                <a:cs typeface="Noto Sans KR"/>
-              </a:rPr>
-              <a:t>S코드</a:t>
-            </a:r>
-          </a:p>
-        </p:txBody>
-      </p:sp>
-      <p:sp>
-        <p:nvSpPr>
-          <p:cNvPr id="12" name="TextBox 11"/>
-          <p:cNvSpPr txBox="1"/>
-          <p:nvPr/>
-        </p:nvSpPr>
-        <p:spPr>
-          <a:xfrm>
-            <a:off x="1673352" y="1426464"/>
-            <a:ext cx="1143000" cy="274320"/>
-          </a:xfrm>
-          <a:prstGeom prst="rect">
-            <a:avLst/>
-          </a:prstGeom>
-          <a:noFill/>
-        </p:spPr>
-        <p:txBody>
-          <a:bodyPr wrap="square" lIns="0" rIns="0" tIns="0" bIns="0" anchor="ctr">
-            <a:spAutoFit/>
-          </a:bodyPr>
-          <a:lstStyle/>
-          <a:p>
-            <a:pPr algn="l">
-              <a:spcBef>
-                <a:spcPts val="0"/>
-              </a:spcBef>
-              <a:spcAft>
-                <a:spcPts val="0"/>
-              </a:spcAft>
-            </a:pPr>
-            <a:r>
-              <a:rPr sz="850" b="1">
-                <a:solidFill>
-                  <a:srgbClr val="FFFFFF"/>
-                </a:solidFill>
-                <a:latin typeface="Noto Sans KR"/>
-                <a:ea typeface="Noto Sans KR"/>
-                <a:cs typeface="Noto Sans KR"/>
-              </a:rPr>
-              <a:t>요청구분</a:t>
-            </a:r>
-          </a:p>
-        </p:txBody>
-      </p:sp>
-      <p:sp>
-        <p:nvSpPr>
-          <p:cNvPr id="13" name="TextBox 12"/>
-          <p:cNvSpPr txBox="1"/>
-          <p:nvPr/>
-        </p:nvSpPr>
-        <p:spPr>
-          <a:xfrm>
-            <a:off x="2816352" y="1426464"/>
-            <a:ext cx="7818120" cy="274320"/>
-          </a:xfrm>
-          <a:prstGeom prst="rect">
-            <a:avLst/>
-          </a:prstGeom>
-          <a:noFill/>
-        </p:spPr>
-        <p:txBody>
-          <a:bodyPr wrap="square" lIns="0" rIns="0" tIns="0" bIns="0" anchor="ctr">
-            <a:spAutoFit/>
-          </a:bodyPr>
-          <a:lstStyle/>
-          <a:p>
-            <a:pPr algn="l">
-              <a:spcBef>
-                <a:spcPts val="0"/>
-              </a:spcBef>
-              <a:spcAft>
-                <a:spcPts val="0"/>
-              </a:spcAft>
-            </a:pPr>
-            <a:r>
-              <a:rPr sz="850" b="1">
-                <a:solidFill>
-                  <a:srgbClr val="FFFFFF"/>
-                </a:solidFill>
-                <a:latin typeface="Noto Sans KR"/>
-                <a:ea typeface="Noto Sans KR"/>
-                <a:cs typeface="Noto Sans KR"/>
-              </a:rPr>
-              <a:t>제품명</a:t>
-            </a:r>
-          </a:p>
-        </p:txBody>
-      </p:sp>
-      <p:sp>
-        <p:nvSpPr>
-          <p:cNvPr id="14" name="TextBox 13"/>
-          <p:cNvSpPr txBox="1"/>
-          <p:nvPr/>
-        </p:nvSpPr>
-        <p:spPr>
-          <a:xfrm>
-            <a:off x="10634472" y="1426464"/>
-            <a:ext cx="868680" cy="274320"/>
-          </a:xfrm>
-          <a:prstGeom prst="rect">
-            <a:avLst/>
-          </a:prstGeom>
-          <a:noFill/>
-        </p:spPr>
-        <p:txBody>
-          <a:bodyPr wrap="square" lIns="0" rIns="0" tIns="0" bIns="0" anchor="ctr">
-            <a:spAutoFit/>
-          </a:bodyPr>
-          <a:lstStyle/>
-          <a:p>
-            <a:pPr algn="r">
-              <a:spcBef>
-                <a:spcPts val="0"/>
-              </a:spcBef>
-              <a:spcAft>
-                <a:spcPts val="0"/>
-              </a:spcAft>
-            </a:pPr>
-            <a:r>
-              <a:rPr sz="850" b="1">
-                <a:solidFill>
-                  <a:srgbClr val="FFFFFF"/>
-                </a:solidFill>
-                <a:latin typeface="Noto Sans KR"/>
-                <a:ea typeface="Noto Sans KR"/>
-                <a:cs typeface="Noto Sans KR"/>
-              </a:rPr>
-              <a:t>SKU 수</a:t>
-            </a:r>
-          </a:p>
-        </p:txBody>
-      </p:sp>
-      <p:sp>
-        <p:nvSpPr>
-          <p:cNvPr id="15" name="TextBox 14"/>
-          <p:cNvSpPr txBox="1"/>
-          <p:nvPr/>
-        </p:nvSpPr>
-        <p:spPr>
-          <a:xfrm>
-            <a:off x="713232" y="1773936"/>
-            <a:ext cx="960120" cy="320040"/>
-          </a:xfrm>
-          <a:prstGeom prst="rect">
-            <a:avLst/>
-          </a:prstGeom>
-          <a:noFill/>
-        </p:spPr>
-        <p:txBody>
-          <a:bodyPr wrap="square" lIns="0" rIns="0" tIns="0" bIns="0" anchor="ctr">
-            <a:spAutoFit/>
-          </a:bodyPr>
-          <a:lstStyle/>
-          <a:p>
-            <a:pPr algn="l">
-              <a:spcBef>
-                <a:spcPts val="0"/>
-              </a:spcBef>
-              <a:spcAft>
-                <a:spcPts val="0"/>
-              </a:spcAft>
-            </a:pPr>
-            <a:r>
-              <a:rPr sz="869" b="1">
-                <a:solidFill>
-                  <a:srgbClr val="185FA5"/>
-                </a:solidFill>
-                <a:latin typeface="Noto Sans KR"/>
-                <a:ea typeface="Noto Sans KR"/>
-                <a:cs typeface="Noto Sans KR"/>
-              </a:rPr>
-              <a:t>S129</a:t>
-            </a:r>
-          </a:p>
-        </p:txBody>
-      </p:sp>
-      <p:sp>
-        <p:nvSpPr>
-          <p:cNvPr id="16" name="TextBox 15"/>
-          <p:cNvSpPr txBox="1"/>
-          <p:nvPr/>
-        </p:nvSpPr>
-        <p:spPr>
-          <a:xfrm>
-            <a:off x="1673352" y="1773936"/>
-            <a:ext cx="1143000" cy="320040"/>
-          </a:xfrm>
-          <a:prstGeom prst="rect">
-            <a:avLst/>
-          </a:prstGeom>
-          <a:noFill/>
-        </p:spPr>
-        <p:txBody>
-          <a:bodyPr wrap="square" lIns="0" rIns="0" tIns="0" bIns="0" anchor="ctr">
-            <a:spAutoFit/>
-          </a:bodyPr>
-          <a:lstStyle/>
-          <a:p>
-            <a:pPr algn="l">
-              <a:spcBef>
-                <a:spcPts val="0"/>
-              </a:spcBef>
-              <a:spcAft>
-                <a:spcPts val="0"/>
-              </a:spcAft>
-            </a:pPr>
-            <a:r>
-              <a:rPr sz="869" b="1">
-                <a:solidFill>
-                  <a:srgbClr val="D85A30"/>
-                </a:solidFill>
-                <a:latin typeface="Noto Sans KR"/>
-                <a:ea typeface="Noto Sans KR"/>
-                <a:cs typeface="Noto Sans KR"/>
-              </a:rPr>
-              <a:t>요청외</a:t>
-            </a:r>
-          </a:p>
-        </p:txBody>
-      </p:sp>
-      <p:sp>
-        <p:nvSpPr>
-          <p:cNvPr id="17" name="TextBox 16"/>
-          <p:cNvSpPr txBox="1"/>
-          <p:nvPr/>
-        </p:nvSpPr>
-        <p:spPr>
-          <a:xfrm>
-            <a:off x="2816352" y="1773936"/>
-            <a:ext cx="7818120" cy="320040"/>
-          </a:xfrm>
-          <a:prstGeom prst="rect">
-            <a:avLst/>
-          </a:prstGeom>
-          <a:noFill/>
-        </p:spPr>
-        <p:txBody>
-          <a:bodyPr wrap="square" lIns="0" rIns="0" tIns="0" bIns="0" anchor="ctr">
-            <a:spAutoFit/>
-          </a:bodyPr>
-          <a:lstStyle/>
-          <a:p>
-            <a:pPr algn="l">
-              <a:spcBef>
-                <a:spcPts val="0"/>
-              </a:spcBef>
-              <a:spcAft>
-                <a:spcPts val="0"/>
-              </a:spcAft>
-            </a:pPr>
-            <a:r>
-              <a:rPr sz="840" b="0">
-                <a:solidFill>
-                  <a:srgbClr val="121A2A"/>
-                </a:solidFill>
-                <a:latin typeface="Noto Sans KR"/>
-                <a:ea typeface="Noto Sans KR"/>
-                <a:cs typeface="Noto Sans KR"/>
-              </a:rPr>
-              <a:t>Iris SoulBrown_40팩</a:t>
-            </a:r>
-          </a:p>
-        </p:txBody>
-      </p:sp>
-      <p:sp>
-        <p:nvSpPr>
-          <p:cNvPr id="18" name="TextBox 17"/>
-          <p:cNvSpPr txBox="1"/>
-          <p:nvPr/>
-        </p:nvSpPr>
-        <p:spPr>
-          <a:xfrm>
-            <a:off x="10634472" y="1773936"/>
-            <a:ext cx="868680" cy="320040"/>
-          </a:xfrm>
-          <a:prstGeom prst="rect">
-            <a:avLst/>
-          </a:prstGeom>
-          <a:noFill/>
-        </p:spPr>
-        <p:txBody>
-          <a:bodyPr wrap="square" lIns="0" rIns="0" tIns="0" bIns="0" anchor="ctr">
-            <a:spAutoFit/>
-          </a:bodyPr>
-          <a:lstStyle/>
-          <a:p>
-            <a:pPr algn="r">
-              <a:spcBef>
-                <a:spcPts val="0"/>
-              </a:spcBef>
-              <a:spcAft>
-                <a:spcPts val="0"/>
-              </a:spcAft>
-            </a:pPr>
-            <a:r>
-              <a:rPr sz="869" b="1">
-                <a:solidFill>
-                  <a:srgbClr val="D85A30"/>
-                </a:solidFill>
-                <a:latin typeface="Noto Sans KR"/>
-                <a:ea typeface="Noto Sans KR"/>
-                <a:cs typeface="Noto Sans KR"/>
-              </a:rPr>
-              <a:t>12</a:t>
-            </a:r>
-          </a:p>
-        </p:txBody>
-      </p:sp>
-      <p:sp>
-        <p:nvSpPr>
-          <p:cNvPr id="19" name="Rectangle 18"/>
-          <p:cNvSpPr/>
-          <p:nvPr/>
-        </p:nvSpPr>
-        <p:spPr>
-          <a:xfrm>
-            <a:off x="658368" y="2112264"/>
-            <a:ext cx="10881360" cy="9144"/>
           </a:xfrm>
           <a:prstGeom prst="rect">
             <a:avLst/>
@@ -10249,14 +9166,233 @@
       </p:sp>
       <p:sp>
         <p:nvSpPr>
-          <p:cNvPr id="20" name="Rectangle 19"/>
+          <p:cNvPr id="140" name="TextBox 139"/>
+          <p:cNvSpPr txBox="1"/>
+          <p:nvPr/>
+        </p:nvSpPr>
+        <p:spPr>
+          <a:xfrm>
+            <a:off x="8293607" y="4554543"/>
+            <a:ext cx="530352" cy="221949"/>
+          </a:xfrm>
+          <a:prstGeom prst="rect">
+            <a:avLst/>
+          </a:prstGeom>
+          <a:noFill/>
+        </p:spPr>
+        <p:txBody>
+          <a:bodyPr wrap="square" lIns="0" rIns="0" tIns="0" bIns="0" anchor="ctr">
+            <a:spAutoFit/>
+          </a:bodyPr>
+          <a:lstStyle/>
+          <a:p>
+            <a:pPr algn="l">
+              <a:spcBef>
+                <a:spcPts val="0"/>
+              </a:spcBef>
+              <a:spcAft>
+                <a:spcPts val="0"/>
+              </a:spcAft>
+            </a:pPr>
+            <a:r>
+              <a:rPr sz="650" b="1">
+                <a:solidFill>
+                  <a:srgbClr val="185FA5"/>
+                </a:solidFill>
+                <a:latin typeface="Noto Sans KR"/>
+                <a:ea typeface="Noto Sans KR"/>
+                <a:cs typeface="Noto Sans KR"/>
+              </a:rPr>
+              <a:t>S159</a:t>
+            </a:r>
+          </a:p>
+        </p:txBody>
+      </p:sp>
+      <p:sp>
+        <p:nvSpPr>
+          <p:cNvPr id="141" name="TextBox 140"/>
+          <p:cNvSpPr txBox="1"/>
+          <p:nvPr/>
+        </p:nvSpPr>
+        <p:spPr>
+          <a:xfrm>
+            <a:off x="8823959" y="4554543"/>
+            <a:ext cx="530352" cy="221949"/>
+          </a:xfrm>
+          <a:prstGeom prst="rect">
+            <a:avLst/>
+          </a:prstGeom>
+          <a:noFill/>
+        </p:spPr>
+        <p:txBody>
+          <a:bodyPr wrap="square" lIns="0" rIns="0" tIns="0" bIns="0" anchor="ctr">
+            <a:spAutoFit/>
+          </a:bodyPr>
+          <a:lstStyle/>
+          <a:p>
+            <a:pPr algn="l">
+              <a:spcBef>
+                <a:spcPts val="0"/>
+              </a:spcBef>
+              <a:spcAft>
+                <a:spcPts val="0"/>
+              </a:spcAft>
+            </a:pPr>
+            <a:r>
+              <a:rPr sz="650" b="1">
+                <a:solidFill>
+                  <a:srgbClr val="1D9E75"/>
+                </a:solidFill>
+                <a:latin typeface="Noto Sans KR"/>
+                <a:ea typeface="Noto Sans KR"/>
+                <a:cs typeface="Noto Sans KR"/>
+              </a:rPr>
+              <a:t>요청내</a:t>
+            </a:r>
+          </a:p>
+        </p:txBody>
+      </p:sp>
+      <p:sp>
+        <p:nvSpPr>
+          <p:cNvPr id="142" name="TextBox 141"/>
+          <p:cNvSpPr txBox="1"/>
+          <p:nvPr/>
+        </p:nvSpPr>
+        <p:spPr>
+          <a:xfrm>
+            <a:off x="9354311" y="4554543"/>
+            <a:ext cx="1938528" cy="221949"/>
+          </a:xfrm>
+          <a:prstGeom prst="rect">
+            <a:avLst/>
+          </a:prstGeom>
+          <a:noFill/>
+        </p:spPr>
+        <p:txBody>
+          <a:bodyPr wrap="square" lIns="0" rIns="0" tIns="0" bIns="0" anchor="ctr">
+            <a:spAutoFit/>
+          </a:bodyPr>
+          <a:lstStyle/>
+          <a:p>
+            <a:pPr algn="l">
+              <a:spcBef>
+                <a:spcPts val="0"/>
+              </a:spcBef>
+              <a:spcAft>
+                <a:spcPts val="0"/>
+              </a:spcAft>
+            </a:pPr>
+            <a:r>
+              <a:rPr sz="610" b="0">
+                <a:solidFill>
+                  <a:srgbClr val="121A2A"/>
+                </a:solidFill>
+                <a:latin typeface="Noto Sans KR"/>
+                <a:ea typeface="Noto Sans KR"/>
+                <a:cs typeface="Noto Sans KR"/>
+              </a:rPr>
+              <a:t>Iris Toric Halo Gray_...</a:t>
+            </a:r>
+          </a:p>
+        </p:txBody>
+      </p:sp>
+      <p:sp>
+        <p:nvSpPr>
+          <p:cNvPr id="143" name="TextBox 142"/>
+          <p:cNvSpPr txBox="1"/>
+          <p:nvPr/>
+        </p:nvSpPr>
+        <p:spPr>
+          <a:xfrm>
+            <a:off x="11292839" y="4554543"/>
+            <a:ext cx="347472" cy="221949"/>
+          </a:xfrm>
+          <a:prstGeom prst="rect">
+            <a:avLst/>
+          </a:prstGeom>
+          <a:noFill/>
+        </p:spPr>
+        <p:txBody>
+          <a:bodyPr wrap="square" lIns="0" rIns="0" tIns="0" bIns="0" anchor="ctr">
+            <a:spAutoFit/>
+          </a:bodyPr>
+          <a:lstStyle/>
+          <a:p>
+            <a:pPr algn="r">
+              <a:spcBef>
+                <a:spcPts val="0"/>
+              </a:spcBef>
+              <a:spcAft>
+                <a:spcPts val="0"/>
+              </a:spcAft>
+            </a:pPr>
+            <a:r>
+              <a:rPr sz="650" b="1">
+                <a:solidFill>
+                  <a:srgbClr val="D85A30"/>
+                </a:solidFill>
+                <a:latin typeface="Noto Sans KR"/>
+                <a:ea typeface="Noto Sans KR"/>
+                <a:cs typeface="Noto Sans KR"/>
+              </a:rPr>
+              <a:t>3</a:t>
+            </a:r>
+          </a:p>
+        </p:txBody>
+      </p:sp>
+      <p:sp>
+        <p:nvSpPr>
+          <p:cNvPr id="144" name="Rectangle 143"/>
           <p:cNvSpPr/>
           <p:nvPr/>
         </p:nvSpPr>
         <p:spPr>
           <a:xfrm>
-            <a:off x="640080" y="2112264"/>
-            <a:ext cx="10917936" cy="356616"/>
+            <a:off x="8257031" y="4785637"/>
+            <a:ext cx="3465576" cy="9144"/>
+          </a:xfrm>
+          <a:prstGeom prst="rect">
+            <a:avLst/>
+          </a:prstGeom>
+          <a:solidFill>
+            <a:srgbClr val="F1F4F8"/>
+          </a:solidFill>
+          <a:ln>
+            <a:noFill/>
+          </a:ln>
+        </p:spPr>
+        <p:style>
+          <a:lnRef idx="1">
+            <a:schemeClr val="accent1"/>
+          </a:lnRef>
+          <a:fillRef idx="3">
+            <a:schemeClr val="accent1"/>
+          </a:fillRef>
+          <a:effectRef idx="2">
+            <a:schemeClr val="accent1"/>
+          </a:effectRef>
+          <a:fontRef idx="minor">
+            <a:schemeClr val="lt1"/>
+          </a:fontRef>
+        </p:style>
+        <p:txBody>
+          <a:bodyPr rtlCol="0" anchor="ctr"/>
+          <a:lstStyle/>
+          <a:p>
+            <a:pPr algn="ctr"/>
+          </a:p>
+        </p:txBody>
+      </p:sp>
+      <p:sp>
+        <p:nvSpPr>
+          <p:cNvPr id="145" name="Rectangle 144"/>
+          <p:cNvSpPr/>
+          <p:nvPr/>
+        </p:nvSpPr>
+        <p:spPr>
+          <a:xfrm>
+            <a:off x="8220455" y="4785637"/>
+            <a:ext cx="3538728" cy="240237"/>
           </a:xfrm>
           <a:prstGeom prst="rect">
             <a:avLst/>
@@ -10292,14 +9428,14 @@
       </p:sp>
       <p:sp>
         <p:nvSpPr>
-          <p:cNvPr id="21" name="TextBox 20"/>
-          <p:cNvSpPr txBox="1"/>
-          <p:nvPr/>
-        </p:nvSpPr>
-        <p:spPr>
-          <a:xfrm>
-            <a:off x="713232" y="2130552"/>
-            <a:ext cx="960120" cy="320040"/>
+          <p:cNvPr id="146" name="TextBox 145"/>
+          <p:cNvSpPr txBox="1"/>
+          <p:nvPr/>
+        </p:nvSpPr>
+        <p:spPr>
+          <a:xfrm>
+            <a:off x="8293607" y="4794781"/>
+            <a:ext cx="530352" cy="221949"/>
           </a:xfrm>
           <a:prstGeom prst="rect">
             <a:avLst/>
@@ -10321,7 +9457,7 @@
               </a:spcAft>
             </a:pPr>
             <a:r>
-              <a:rPr sz="869" b="1">
+              <a:rPr sz="650" b="1">
                 <a:solidFill>
                   <a:srgbClr val="185FA5"/>
                 </a:solidFill>
@@ -10329,21 +9465,21 @@
                 <a:ea typeface="Noto Sans KR"/>
                 <a:cs typeface="Noto Sans KR"/>
               </a:rPr>
-              <a:t>S320</a:t>
-            </a:r>
-          </a:p>
-        </p:txBody>
-      </p:sp>
-      <p:sp>
-        <p:nvSpPr>
-          <p:cNvPr id="22" name="TextBox 21"/>
-          <p:cNvSpPr txBox="1"/>
-          <p:nvPr/>
-        </p:nvSpPr>
-        <p:spPr>
-          <a:xfrm>
-            <a:off x="1673352" y="2130552"/>
-            <a:ext cx="1143000" cy="320040"/>
+              <a:t>S548</a:t>
+            </a:r>
+          </a:p>
+        </p:txBody>
+      </p:sp>
+      <p:sp>
+        <p:nvSpPr>
+          <p:cNvPr id="147" name="TextBox 146"/>
+          <p:cNvSpPr txBox="1"/>
+          <p:nvPr/>
+        </p:nvSpPr>
+        <p:spPr>
+          <a:xfrm>
+            <a:off x="8823959" y="4794781"/>
+            <a:ext cx="530352" cy="221949"/>
           </a:xfrm>
           <a:prstGeom prst="rect">
             <a:avLst/>
@@ -10365,29 +9501,29 @@
               </a:spcAft>
             </a:pPr>
             <a:r>
-              <a:rPr sz="869" b="1">
-                <a:solidFill>
-                  <a:srgbClr val="1D9E75"/>
-                </a:solidFill>
-                <a:latin typeface="Noto Sans KR"/>
-                <a:ea typeface="Noto Sans KR"/>
-                <a:cs typeface="Noto Sans KR"/>
-              </a:rPr>
-              <a:t>요청내</a:t>
-            </a:r>
-          </a:p>
-        </p:txBody>
-      </p:sp>
-      <p:sp>
-        <p:nvSpPr>
-          <p:cNvPr id="23" name="TextBox 22"/>
-          <p:cNvSpPr txBox="1"/>
-          <p:nvPr/>
-        </p:nvSpPr>
-        <p:spPr>
-          <a:xfrm>
-            <a:off x="2816352" y="2130552"/>
-            <a:ext cx="7818120" cy="320040"/>
+              <a:rPr sz="650" b="1">
+                <a:solidFill>
+                  <a:srgbClr val="D85A30"/>
+                </a:solidFill>
+                <a:latin typeface="Noto Sans KR"/>
+                <a:ea typeface="Noto Sans KR"/>
+                <a:cs typeface="Noto Sans KR"/>
+              </a:rPr>
+              <a:t>요청외</a:t>
+            </a:r>
+          </a:p>
+        </p:txBody>
+      </p:sp>
+      <p:sp>
+        <p:nvSpPr>
+          <p:cNvPr id="148" name="TextBox 147"/>
+          <p:cNvSpPr txBox="1"/>
+          <p:nvPr/>
+        </p:nvSpPr>
+        <p:spPr>
+          <a:xfrm>
+            <a:off x="9354311" y="4794781"/>
+            <a:ext cx="1938528" cy="221949"/>
           </a:xfrm>
           <a:prstGeom prst="rect">
             <a:avLst/>
@@ -10409,7 +9545,7 @@
               </a:spcAft>
             </a:pPr>
             <a:r>
-              <a:rPr sz="840" b="0">
+              <a:rPr sz="610" b="0">
                 <a:solidFill>
                   <a:srgbClr val="121A2A"/>
                 </a:solidFill>
@@ -10417,21 +9553,21 @@
                 <a:ea typeface="Noto Sans KR"/>
                 <a:cs typeface="Noto Sans KR"/>
               </a:rPr>
-              <a:t>Clalen O2O2 M_Micelia_Mute Brown_45%_2P</a:t>
-            </a:r>
-          </a:p>
-        </p:txBody>
-      </p:sp>
-      <p:sp>
-        <p:nvSpPr>
-          <p:cNvPr id="24" name="TextBox 23"/>
-          <p:cNvSpPr txBox="1"/>
-          <p:nvPr/>
-        </p:nvSpPr>
-        <p:spPr>
-          <a:xfrm>
-            <a:off x="10634472" y="2130552"/>
-            <a:ext cx="868680" cy="320040"/>
+              <a:t>Clalen O2O2 M_6P</a:t>
+            </a:r>
+          </a:p>
+        </p:txBody>
+      </p:sp>
+      <p:sp>
+        <p:nvSpPr>
+          <p:cNvPr id="149" name="TextBox 148"/>
+          <p:cNvSpPr txBox="1"/>
+          <p:nvPr/>
+        </p:nvSpPr>
+        <p:spPr>
+          <a:xfrm>
+            <a:off x="11292839" y="4794781"/>
+            <a:ext cx="347472" cy="221949"/>
           </a:xfrm>
           <a:prstGeom prst="rect">
             <a:avLst/>
@@ -10453,7 +9589,7 @@
               </a:spcAft>
             </a:pPr>
             <a:r>
-              <a:rPr sz="869" b="1">
+              <a:rPr sz="650" b="1">
                 <a:solidFill>
                   <a:srgbClr val="D85A30"/>
                 </a:solidFill>
@@ -10461,21 +9597,21 @@
                 <a:ea typeface="Noto Sans KR"/>
                 <a:cs typeface="Noto Sans KR"/>
               </a:rPr>
-              <a:t>9</a:t>
-            </a:r>
-          </a:p>
-        </p:txBody>
-      </p:sp>
-      <p:sp>
-        <p:nvSpPr>
-          <p:cNvPr id="25" name="Rectangle 24"/>
+              <a:t>3</a:t>
+            </a:r>
+          </a:p>
+        </p:txBody>
+      </p:sp>
+      <p:sp>
+        <p:nvSpPr>
+          <p:cNvPr id="150" name="Rectangle 149"/>
           <p:cNvSpPr/>
           <p:nvPr/>
         </p:nvSpPr>
         <p:spPr>
           <a:xfrm>
-            <a:off x="658368" y="2468880"/>
-            <a:ext cx="10881360" cy="9144"/>
+            <a:off x="8257031" y="5025874"/>
+            <a:ext cx="3465576" cy="9144"/>
           </a:xfrm>
           <a:prstGeom prst="rect">
             <a:avLst/>
@@ -10511,14 +9647,14 @@
       </p:sp>
       <p:sp>
         <p:nvSpPr>
-          <p:cNvPr id="26" name="TextBox 25"/>
-          <p:cNvSpPr txBox="1"/>
-          <p:nvPr/>
-        </p:nvSpPr>
-        <p:spPr>
-          <a:xfrm>
-            <a:off x="713232" y="2487168"/>
-            <a:ext cx="960120" cy="320040"/>
+          <p:cNvPr id="151" name="TextBox 150"/>
+          <p:cNvSpPr txBox="1"/>
+          <p:nvPr/>
+        </p:nvSpPr>
+        <p:spPr>
+          <a:xfrm>
+            <a:off x="8293607" y="5035018"/>
+            <a:ext cx="530352" cy="221949"/>
           </a:xfrm>
           <a:prstGeom prst="rect">
             <a:avLst/>
@@ -10540,7 +9676,7 @@
               </a:spcAft>
             </a:pPr>
             <a:r>
-              <a:rPr sz="869" b="1">
+              <a:rPr sz="650" b="1">
                 <a:solidFill>
                   <a:srgbClr val="185FA5"/>
                 </a:solidFill>
@@ -10548,21 +9684,21 @@
                 <a:ea typeface="Noto Sans KR"/>
                 <a:cs typeface="Noto Sans KR"/>
               </a:rPr>
-              <a:t>S154</a:t>
-            </a:r>
-          </a:p>
-        </p:txBody>
-      </p:sp>
-      <p:sp>
-        <p:nvSpPr>
-          <p:cNvPr id="27" name="TextBox 26"/>
-          <p:cNvSpPr txBox="1"/>
-          <p:nvPr/>
-        </p:nvSpPr>
-        <p:spPr>
-          <a:xfrm>
-            <a:off x="1673352" y="2487168"/>
-            <a:ext cx="1143000" cy="320040"/>
+              <a:t>S611</a:t>
+            </a:r>
+          </a:p>
+        </p:txBody>
+      </p:sp>
+      <p:sp>
+        <p:nvSpPr>
+          <p:cNvPr id="152" name="TextBox 151"/>
+          <p:cNvSpPr txBox="1"/>
+          <p:nvPr/>
+        </p:nvSpPr>
+        <p:spPr>
+          <a:xfrm>
+            <a:off x="8823959" y="5035018"/>
+            <a:ext cx="530352" cy="221949"/>
           </a:xfrm>
           <a:prstGeom prst="rect">
             <a:avLst/>
@@ -10584,7 +9720,7 @@
               </a:spcAft>
             </a:pPr>
             <a:r>
-              <a:rPr sz="869" b="1">
+              <a:rPr sz="650" b="1">
                 <a:solidFill>
                   <a:srgbClr val="1D9E75"/>
                 </a:solidFill>
@@ -10599,14 +9735,14 @@
       </p:sp>
       <p:sp>
         <p:nvSpPr>
-          <p:cNvPr id="28" name="TextBox 27"/>
-          <p:cNvSpPr txBox="1"/>
-          <p:nvPr/>
-        </p:nvSpPr>
-        <p:spPr>
-          <a:xfrm>
-            <a:off x="2816352" y="2487168"/>
-            <a:ext cx="7818120" cy="320040"/>
+          <p:cNvPr id="153" name="TextBox 152"/>
+          <p:cNvSpPr txBox="1"/>
+          <p:nvPr/>
+        </p:nvSpPr>
+        <p:spPr>
+          <a:xfrm>
+            <a:off x="9354311" y="5035018"/>
+            <a:ext cx="1938528" cy="221949"/>
           </a:xfrm>
           <a:prstGeom prst="rect">
             <a:avLst/>
@@ -10628,7 +9764,7 @@
               </a:spcAft>
             </a:pPr>
             <a:r>
-              <a:rPr sz="840" b="0">
+              <a:rPr sz="610" b="0">
                 <a:solidFill>
                   <a:srgbClr val="121A2A"/>
                 </a:solidFill>
@@ -10636,21 +9772,21 @@
                 <a:ea typeface="Noto Sans KR"/>
                 <a:cs typeface="Noto Sans KR"/>
               </a:rPr>
-              <a:t>Iris Toric Halo Brown_30</a:t>
-            </a:r>
-          </a:p>
-        </p:txBody>
-      </p:sp>
-      <p:sp>
-        <p:nvSpPr>
-          <p:cNvPr id="29" name="TextBox 28"/>
-          <p:cNvSpPr txBox="1"/>
-          <p:nvPr/>
-        </p:nvSpPr>
-        <p:spPr>
-          <a:xfrm>
-            <a:off x="10634472" y="2487168"/>
-            <a:ext cx="868680" cy="320040"/>
+              <a:t>Clalen O2O2 M_Natural...</a:t>
+            </a:r>
+          </a:p>
+        </p:txBody>
+      </p:sp>
+      <p:sp>
+        <p:nvSpPr>
+          <p:cNvPr id="154" name="TextBox 153"/>
+          <p:cNvSpPr txBox="1"/>
+          <p:nvPr/>
+        </p:nvSpPr>
+        <p:spPr>
+          <a:xfrm>
+            <a:off x="11292839" y="5035018"/>
+            <a:ext cx="347472" cy="221949"/>
           </a:xfrm>
           <a:prstGeom prst="rect">
             <a:avLst/>
@@ -10672,7 +9808,7 @@
               </a:spcAft>
             </a:pPr>
             <a:r>
-              <a:rPr sz="869" b="1">
+              <a:rPr sz="650" b="1">
                 <a:solidFill>
                   <a:srgbClr val="D85A30"/>
                 </a:solidFill>
@@ -10680,21 +9816,21 @@
                 <a:ea typeface="Noto Sans KR"/>
                 <a:cs typeface="Noto Sans KR"/>
               </a:rPr>
-              <a:t>5</a:t>
-            </a:r>
-          </a:p>
-        </p:txBody>
-      </p:sp>
-      <p:sp>
-        <p:nvSpPr>
-          <p:cNvPr id="30" name="Rectangle 29"/>
+              <a:t>2</a:t>
+            </a:r>
+          </a:p>
+        </p:txBody>
+      </p:sp>
+      <p:sp>
+        <p:nvSpPr>
+          <p:cNvPr id="155" name="Rectangle 154"/>
           <p:cNvSpPr/>
           <p:nvPr/>
         </p:nvSpPr>
         <p:spPr>
           <a:xfrm>
-            <a:off x="658368" y="2825496"/>
-            <a:ext cx="10881360" cy="9144"/>
+            <a:off x="8257031" y="5266112"/>
+            <a:ext cx="3465576" cy="9144"/>
           </a:xfrm>
           <a:prstGeom prst="rect">
             <a:avLst/>
@@ -10730,14 +9866,14 @@
       </p:sp>
       <p:sp>
         <p:nvSpPr>
-          <p:cNvPr id="31" name="Rectangle 30"/>
+          <p:cNvPr id="156" name="Rectangle 155"/>
           <p:cNvSpPr/>
           <p:nvPr/>
         </p:nvSpPr>
         <p:spPr>
           <a:xfrm>
-            <a:off x="640080" y="2825496"/>
-            <a:ext cx="10917936" cy="356616"/>
+            <a:off x="8220455" y="5266112"/>
+            <a:ext cx="3538728" cy="240237"/>
           </a:xfrm>
           <a:prstGeom prst="rect">
             <a:avLst/>
@@ -10773,14 +9909,14 @@
       </p:sp>
       <p:sp>
         <p:nvSpPr>
-          <p:cNvPr id="32" name="TextBox 31"/>
-          <p:cNvSpPr txBox="1"/>
-          <p:nvPr/>
-        </p:nvSpPr>
-        <p:spPr>
-          <a:xfrm>
-            <a:off x="713232" y="2843784"/>
-            <a:ext cx="960120" cy="320040"/>
+          <p:cNvPr id="157" name="TextBox 156"/>
+          <p:cNvSpPr txBox="1"/>
+          <p:nvPr/>
+        </p:nvSpPr>
+        <p:spPr>
+          <a:xfrm>
+            <a:off x="8293607" y="5275256"/>
+            <a:ext cx="530352" cy="221949"/>
           </a:xfrm>
           <a:prstGeom prst="rect">
             <a:avLst/>
@@ -10802,7 +9938,7 @@
               </a:spcAft>
             </a:pPr>
             <a:r>
-              <a:rPr sz="869" b="1">
+              <a:rPr sz="650" b="1">
                 <a:solidFill>
                   <a:srgbClr val="185FA5"/>
                 </a:solidFill>
@@ -10810,21 +9946,21 @@
                 <a:ea typeface="Noto Sans KR"/>
                 <a:cs typeface="Noto Sans KR"/>
               </a:rPr>
-              <a:t>S309</a:t>
-            </a:r>
-          </a:p>
-        </p:txBody>
-      </p:sp>
-      <p:sp>
-        <p:nvSpPr>
-          <p:cNvPr id="33" name="TextBox 32"/>
-          <p:cNvSpPr txBox="1"/>
-          <p:nvPr/>
-        </p:nvSpPr>
-        <p:spPr>
-          <a:xfrm>
-            <a:off x="1673352" y="2843784"/>
-            <a:ext cx="1143000" cy="320040"/>
+              <a:t>S147</a:t>
+            </a:r>
+          </a:p>
+        </p:txBody>
+      </p:sp>
+      <p:sp>
+        <p:nvSpPr>
+          <p:cNvPr id="158" name="TextBox 157"/>
+          <p:cNvSpPr txBox="1"/>
+          <p:nvPr/>
+        </p:nvSpPr>
+        <p:spPr>
+          <a:xfrm>
+            <a:off x="8823959" y="5275256"/>
+            <a:ext cx="530352" cy="221949"/>
           </a:xfrm>
           <a:prstGeom prst="rect">
             <a:avLst/>
@@ -10846,7 +9982,7 @@
               </a:spcAft>
             </a:pPr>
             <a:r>
-              <a:rPr sz="869" b="1">
+              <a:rPr sz="650" b="1">
                 <a:solidFill>
                   <a:srgbClr val="1D9E75"/>
                 </a:solidFill>
@@ -10861,14 +9997,14 @@
       </p:sp>
       <p:sp>
         <p:nvSpPr>
-          <p:cNvPr id="34" name="TextBox 33"/>
-          <p:cNvSpPr txBox="1"/>
-          <p:nvPr/>
-        </p:nvSpPr>
-        <p:spPr>
-          <a:xfrm>
-            <a:off x="2816352" y="2843784"/>
-            <a:ext cx="7818120" cy="320040"/>
+          <p:cNvPr id="159" name="TextBox 158"/>
+          <p:cNvSpPr txBox="1"/>
+          <p:nvPr/>
+        </p:nvSpPr>
+        <p:spPr>
+          <a:xfrm>
+            <a:off x="9354311" y="5275256"/>
+            <a:ext cx="1938528" cy="221949"/>
           </a:xfrm>
           <a:prstGeom prst="rect">
             <a:avLst/>
@@ -10890,7 +10026,7 @@
               </a:spcAft>
             </a:pPr>
             <a:r>
-              <a:rPr sz="840" b="0">
+              <a:rPr sz="610" b="0">
                 <a:solidFill>
                   <a:srgbClr val="121A2A"/>
                 </a:solidFill>
@@ -10898,21 +10034,21 @@
                 <a:ea typeface="Noto Sans KR"/>
                 <a:cs typeface="Noto Sans KR"/>
               </a:rPr>
-              <a:t>Clalen O2O2 D_Micelia_Mute Brown_10P</a:t>
-            </a:r>
-          </a:p>
-        </p:txBody>
-      </p:sp>
-      <p:sp>
-        <p:nvSpPr>
-          <p:cNvPr id="35" name="TextBox 34"/>
-          <p:cNvSpPr txBox="1"/>
-          <p:nvPr/>
-        </p:nvSpPr>
-        <p:spPr>
-          <a:xfrm>
-            <a:off x="10634472" y="2843784"/>
-            <a:ext cx="868680" cy="320040"/>
+              <a:t>Iris Toric Alicia Bro...</a:t>
+            </a:r>
+          </a:p>
+        </p:txBody>
+      </p:sp>
+      <p:sp>
+        <p:nvSpPr>
+          <p:cNvPr id="160" name="TextBox 159"/>
+          <p:cNvSpPr txBox="1"/>
+          <p:nvPr/>
+        </p:nvSpPr>
+        <p:spPr>
+          <a:xfrm>
+            <a:off x="11292839" y="5275256"/>
+            <a:ext cx="347472" cy="221949"/>
           </a:xfrm>
           <a:prstGeom prst="rect">
             <a:avLst/>
@@ -10934,7 +10070,7 @@
               </a:spcAft>
             </a:pPr>
             <a:r>
-              <a:rPr sz="869" b="1">
+              <a:rPr sz="650" b="1">
                 <a:solidFill>
                   <a:srgbClr val="D85A30"/>
                 </a:solidFill>
@@ -10942,21 +10078,21 @@
                 <a:ea typeface="Noto Sans KR"/>
                 <a:cs typeface="Noto Sans KR"/>
               </a:rPr>
-              <a:t>4</a:t>
-            </a:r>
-          </a:p>
-        </p:txBody>
-      </p:sp>
-      <p:sp>
-        <p:nvSpPr>
-          <p:cNvPr id="36" name="Rectangle 35"/>
+              <a:t>1</a:t>
+            </a:r>
+          </a:p>
+        </p:txBody>
+      </p:sp>
+      <p:sp>
+        <p:nvSpPr>
+          <p:cNvPr id="161" name="Rectangle 160"/>
           <p:cNvSpPr/>
           <p:nvPr/>
         </p:nvSpPr>
         <p:spPr>
           <a:xfrm>
-            <a:off x="658368" y="3182112"/>
-            <a:ext cx="10881360" cy="9144"/>
+            <a:off x="8257031" y="5506350"/>
+            <a:ext cx="3465576" cy="9144"/>
           </a:xfrm>
           <a:prstGeom prst="rect">
             <a:avLst/>
@@ -10992,14 +10128,14 @@
       </p:sp>
       <p:sp>
         <p:nvSpPr>
-          <p:cNvPr id="37" name="TextBox 36"/>
-          <p:cNvSpPr txBox="1"/>
-          <p:nvPr/>
-        </p:nvSpPr>
-        <p:spPr>
-          <a:xfrm>
-            <a:off x="713232" y="3200400"/>
-            <a:ext cx="960120" cy="320040"/>
+          <p:cNvPr id="162" name="TextBox 161"/>
+          <p:cNvSpPr txBox="1"/>
+          <p:nvPr/>
+        </p:nvSpPr>
+        <p:spPr>
+          <a:xfrm>
+            <a:off x="8293607" y="5515494"/>
+            <a:ext cx="530352" cy="221949"/>
           </a:xfrm>
           <a:prstGeom prst="rect">
             <a:avLst/>
@@ -11021,7 +10157,7 @@
               </a:spcAft>
             </a:pPr>
             <a:r>
-              <a:rPr sz="869" b="1">
+              <a:rPr sz="650" b="1">
                 <a:solidFill>
                   <a:srgbClr val="185FA5"/>
                 </a:solidFill>
@@ -11029,21 +10165,21 @@
                 <a:ea typeface="Noto Sans KR"/>
                 <a:cs typeface="Noto Sans KR"/>
               </a:rPr>
-              <a:t>S159</a:t>
-            </a:r>
-          </a:p>
-        </p:txBody>
-      </p:sp>
-      <p:sp>
-        <p:nvSpPr>
-          <p:cNvPr id="38" name="TextBox 37"/>
-          <p:cNvSpPr txBox="1"/>
-          <p:nvPr/>
-        </p:nvSpPr>
-        <p:spPr>
-          <a:xfrm>
-            <a:off x="1673352" y="3200400"/>
-            <a:ext cx="1143000" cy="320040"/>
+              <a:t>S162</a:t>
+            </a:r>
+          </a:p>
+        </p:txBody>
+      </p:sp>
+      <p:sp>
+        <p:nvSpPr>
+          <p:cNvPr id="163" name="TextBox 162"/>
+          <p:cNvSpPr txBox="1"/>
+          <p:nvPr/>
+        </p:nvSpPr>
+        <p:spPr>
+          <a:xfrm>
+            <a:off x="8823959" y="5515494"/>
+            <a:ext cx="530352" cy="221949"/>
           </a:xfrm>
           <a:prstGeom prst="rect">
             <a:avLst/>
@@ -11065,29 +10201,29 @@
               </a:spcAft>
             </a:pPr>
             <a:r>
-              <a:rPr sz="869" b="1">
-                <a:solidFill>
-                  <a:srgbClr val="1D9E75"/>
-                </a:solidFill>
-                <a:latin typeface="Noto Sans KR"/>
-                <a:ea typeface="Noto Sans KR"/>
-                <a:cs typeface="Noto Sans KR"/>
-              </a:rPr>
-              <a:t>요청내</a:t>
-            </a:r>
-          </a:p>
-        </p:txBody>
-      </p:sp>
-      <p:sp>
-        <p:nvSpPr>
-          <p:cNvPr id="39" name="TextBox 38"/>
-          <p:cNvSpPr txBox="1"/>
-          <p:nvPr/>
-        </p:nvSpPr>
-        <p:spPr>
-          <a:xfrm>
-            <a:off x="2816352" y="3200400"/>
-            <a:ext cx="7818120" cy="320040"/>
+              <a:rPr sz="650" b="1">
+                <a:solidFill>
+                  <a:srgbClr val="D85A30"/>
+                </a:solidFill>
+                <a:latin typeface="Noto Sans KR"/>
+                <a:ea typeface="Noto Sans KR"/>
+                <a:cs typeface="Noto Sans KR"/>
+              </a:rPr>
+              <a:t>요청외</a:t>
+            </a:r>
+          </a:p>
+        </p:txBody>
+      </p:sp>
+      <p:sp>
+        <p:nvSpPr>
+          <p:cNvPr id="164" name="TextBox 163"/>
+          <p:cNvSpPr txBox="1"/>
+          <p:nvPr/>
+        </p:nvSpPr>
+        <p:spPr>
+          <a:xfrm>
+            <a:off x="9354311" y="5515494"/>
+            <a:ext cx="1938528" cy="221949"/>
           </a:xfrm>
           <a:prstGeom prst="rect">
             <a:avLst/>
@@ -11109,7 +10245,7 @@
               </a:spcAft>
             </a:pPr>
             <a:r>
-              <a:rPr sz="840" b="0">
+              <a:rPr sz="610" b="0">
                 <a:solidFill>
                   <a:srgbClr val="121A2A"/>
                 </a:solidFill>
@@ -11117,21 +10253,21 @@
                 <a:ea typeface="Noto Sans KR"/>
                 <a:cs typeface="Noto Sans KR"/>
               </a:rPr>
-              <a:t>Iris Toric Halo Gray_30</a:t>
-            </a:r>
-          </a:p>
-        </p:txBody>
-      </p:sp>
-      <p:sp>
-        <p:nvSpPr>
-          <p:cNvPr id="40" name="TextBox 39"/>
-          <p:cNvSpPr txBox="1"/>
-          <p:nvPr/>
-        </p:nvSpPr>
-        <p:spPr>
-          <a:xfrm>
-            <a:off x="10634472" y="3200400"/>
-            <a:ext cx="868680" cy="320040"/>
+              <a:t>Iris BlueMoon_40팩</a:t>
+            </a:r>
+          </a:p>
+        </p:txBody>
+      </p:sp>
+      <p:sp>
+        <p:nvSpPr>
+          <p:cNvPr id="165" name="TextBox 164"/>
+          <p:cNvSpPr txBox="1"/>
+          <p:nvPr/>
+        </p:nvSpPr>
+        <p:spPr>
+          <a:xfrm>
+            <a:off x="11292839" y="5515494"/>
+            <a:ext cx="347472" cy="221949"/>
           </a:xfrm>
           <a:prstGeom prst="rect">
             <a:avLst/>
@@ -11153,7 +10289,7 @@
               </a:spcAft>
             </a:pPr>
             <a:r>
-              <a:rPr sz="869" b="1">
+              <a:rPr sz="650" b="1">
                 <a:solidFill>
                   <a:srgbClr val="D85A30"/>
                 </a:solidFill>
@@ -11161,21 +10297,21 @@
                 <a:ea typeface="Noto Sans KR"/>
                 <a:cs typeface="Noto Sans KR"/>
               </a:rPr>
-              <a:t>3</a:t>
-            </a:r>
-          </a:p>
-        </p:txBody>
-      </p:sp>
-      <p:sp>
-        <p:nvSpPr>
-          <p:cNvPr id="41" name="Rectangle 40"/>
+              <a:t>1</a:t>
+            </a:r>
+          </a:p>
+        </p:txBody>
+      </p:sp>
+      <p:sp>
+        <p:nvSpPr>
+          <p:cNvPr id="166" name="Rectangle 165"/>
           <p:cNvSpPr/>
           <p:nvPr/>
         </p:nvSpPr>
         <p:spPr>
           <a:xfrm>
-            <a:off x="658368" y="3538728"/>
-            <a:ext cx="10881360" cy="9144"/>
+            <a:off x="8257031" y="5746588"/>
+            <a:ext cx="3465576" cy="9144"/>
           </a:xfrm>
           <a:prstGeom prst="rect">
             <a:avLst/>
@@ -11211,14 +10347,14 @@
       </p:sp>
       <p:sp>
         <p:nvSpPr>
-          <p:cNvPr id="42" name="Rectangle 41"/>
+          <p:cNvPr id="167" name="Rectangle 166"/>
           <p:cNvSpPr/>
           <p:nvPr/>
         </p:nvSpPr>
         <p:spPr>
           <a:xfrm>
-            <a:off x="640080" y="3538728"/>
-            <a:ext cx="10917936" cy="356616"/>
+            <a:off x="8220455" y="5746588"/>
+            <a:ext cx="3538728" cy="240237"/>
           </a:xfrm>
           <a:prstGeom prst="rect">
             <a:avLst/>
@@ -11254,14 +10390,14 @@
       </p:sp>
       <p:sp>
         <p:nvSpPr>
-          <p:cNvPr id="43" name="TextBox 42"/>
-          <p:cNvSpPr txBox="1"/>
-          <p:nvPr/>
-        </p:nvSpPr>
-        <p:spPr>
-          <a:xfrm>
-            <a:off x="713232" y="3557016"/>
-            <a:ext cx="960120" cy="320040"/>
+          <p:cNvPr id="168" name="TextBox 167"/>
+          <p:cNvSpPr txBox="1"/>
+          <p:nvPr/>
+        </p:nvSpPr>
+        <p:spPr>
+          <a:xfrm>
+            <a:off x="8293607" y="5755732"/>
+            <a:ext cx="530352" cy="221949"/>
           </a:xfrm>
           <a:prstGeom prst="rect">
             <a:avLst/>
@@ -11283,7 +10419,7 @@
               </a:spcAft>
             </a:pPr>
             <a:r>
-              <a:rPr sz="869" b="1">
+              <a:rPr sz="650" b="1">
                 <a:solidFill>
                   <a:srgbClr val="185FA5"/>
                 </a:solidFill>
@@ -11291,21 +10427,21 @@
                 <a:ea typeface="Noto Sans KR"/>
                 <a:cs typeface="Noto Sans KR"/>
               </a:rPr>
-              <a:t>S548</a:t>
-            </a:r>
-          </a:p>
-        </p:txBody>
-      </p:sp>
-      <p:sp>
-        <p:nvSpPr>
-          <p:cNvPr id="44" name="TextBox 43"/>
-          <p:cNvSpPr txBox="1"/>
-          <p:nvPr/>
-        </p:nvSpPr>
-        <p:spPr>
-          <a:xfrm>
-            <a:off x="1673352" y="3557016"/>
-            <a:ext cx="1143000" cy="320040"/>
+              <a:t>S318</a:t>
+            </a:r>
+          </a:p>
+        </p:txBody>
+      </p:sp>
+      <p:sp>
+        <p:nvSpPr>
+          <p:cNvPr id="169" name="TextBox 168"/>
+          <p:cNvSpPr txBox="1"/>
+          <p:nvPr/>
+        </p:nvSpPr>
+        <p:spPr>
+          <a:xfrm>
+            <a:off x="8823959" y="5755732"/>
+            <a:ext cx="530352" cy="221949"/>
           </a:xfrm>
           <a:prstGeom prst="rect">
             <a:avLst/>
@@ -11327,7 +10463,95 @@
               </a:spcAft>
             </a:pPr>
             <a:r>
-              <a:rPr sz="869" b="1">
+              <a:rPr sz="650" b="1">
+                <a:solidFill>
+                  <a:srgbClr val="1D9E75"/>
+                </a:solidFill>
+                <a:latin typeface="Noto Sans KR"/>
+                <a:ea typeface="Noto Sans KR"/>
+                <a:cs typeface="Noto Sans KR"/>
+              </a:rPr>
+              <a:t>요청내</a:t>
+            </a:r>
+          </a:p>
+        </p:txBody>
+      </p:sp>
+      <p:sp>
+        <p:nvSpPr>
+          <p:cNvPr id="170" name="TextBox 169"/>
+          <p:cNvSpPr txBox="1"/>
+          <p:nvPr/>
+        </p:nvSpPr>
+        <p:spPr>
+          <a:xfrm>
+            <a:off x="9354311" y="5755732"/>
+            <a:ext cx="1938528" cy="221949"/>
+          </a:xfrm>
+          <a:prstGeom prst="rect">
+            <a:avLst/>
+          </a:prstGeom>
+          <a:noFill/>
+        </p:spPr>
+        <p:txBody>
+          <a:bodyPr wrap="square" lIns="0" rIns="0" tIns="0" bIns="0" anchor="ctr">
+            <a:spAutoFit/>
+          </a:bodyPr>
+          <a:lstStyle/>
+          <a:p>
+            <a:pPr algn="l">
+              <a:spcBef>
+                <a:spcPts val="0"/>
+              </a:spcBef>
+              <a:spcAft>
+                <a:spcPts val="0"/>
+              </a:spcAft>
+            </a:pPr>
+            <a:r>
+              <a:rPr sz="610" b="0">
+                <a:solidFill>
+                  <a:srgbClr val="121A2A"/>
+                </a:solidFill>
+                <a:latin typeface="Noto Sans KR"/>
+                <a:ea typeface="Noto Sans KR"/>
+                <a:cs typeface="Noto Sans KR"/>
+              </a:rPr>
+              <a:t>Clalen O2O2 M_Micelia...</a:t>
+            </a:r>
+          </a:p>
+        </p:txBody>
+      </p:sp>
+      <p:sp>
+        <p:nvSpPr>
+          <p:cNvPr id="171" name="TextBox 170"/>
+          <p:cNvSpPr txBox="1"/>
+          <p:nvPr/>
+        </p:nvSpPr>
+        <p:spPr>
+          <a:xfrm>
+            <a:off x="11292839" y="5755732"/>
+            <a:ext cx="347472" cy="221949"/>
+          </a:xfrm>
+          <a:prstGeom prst="rect">
+            <a:avLst/>
+          </a:prstGeom>
+          <a:noFill/>
+        </p:spPr>
+        <p:txBody>
+          <a:bodyPr wrap="square" lIns="0" rIns="0" tIns="0" bIns="0" anchor="ctr">
+            <a:spAutoFit/>
+          </a:bodyPr>
+          <a:lstStyle/>
+          <a:p>
+            <a:pPr algn="r">
+              <a:spcBef>
+                <a:spcPts val="0"/>
+              </a:spcBef>
+              <a:spcAft>
+                <a:spcPts val="0"/>
+              </a:spcAft>
+            </a:pPr>
+            <a:r>
+              <a:rPr sz="650" b="1">
                 <a:solidFill>
                   <a:srgbClr val="D85A30"/>
                 </a:solidFill>
@@ -11335,109 +10559,21 @@
                 <a:ea typeface="Noto Sans KR"/>
                 <a:cs typeface="Noto Sans KR"/>
               </a:rPr>
-              <a:t>요청외</a:t>
-            </a:r>
-          </a:p>
-        </p:txBody>
-      </p:sp>
-      <p:sp>
-        <p:nvSpPr>
-          <p:cNvPr id="45" name="TextBox 44"/>
-          <p:cNvSpPr txBox="1"/>
-          <p:nvPr/>
-        </p:nvSpPr>
-        <p:spPr>
-          <a:xfrm>
-            <a:off x="2816352" y="3557016"/>
-            <a:ext cx="7818120" cy="320040"/>
-          </a:xfrm>
-          <a:prstGeom prst="rect">
-            <a:avLst/>
-          </a:prstGeom>
-          <a:noFill/>
-        </p:spPr>
-        <p:txBody>
-          <a:bodyPr wrap="square" lIns="0" rIns="0" tIns="0" bIns="0" anchor="ctr">
-            <a:spAutoFit/>
-          </a:bodyPr>
-          <a:lstStyle/>
-          <a:p>
-            <a:pPr algn="l">
-              <a:spcBef>
-                <a:spcPts val="0"/>
-              </a:spcBef>
-              <a:spcAft>
-                <a:spcPts val="0"/>
-              </a:spcAft>
-            </a:pPr>
-            <a:r>
-              <a:rPr sz="840" b="0">
-                <a:solidFill>
-                  <a:srgbClr val="121A2A"/>
-                </a:solidFill>
-                <a:latin typeface="Noto Sans KR"/>
-                <a:ea typeface="Noto Sans KR"/>
-                <a:cs typeface="Noto Sans KR"/>
-              </a:rPr>
-              <a:t>Clalen O2O2 M_6P</a:t>
-            </a:r>
-          </a:p>
-        </p:txBody>
-      </p:sp>
-      <p:sp>
-        <p:nvSpPr>
-          <p:cNvPr id="46" name="TextBox 45"/>
-          <p:cNvSpPr txBox="1"/>
-          <p:nvPr/>
-        </p:nvSpPr>
-        <p:spPr>
-          <a:xfrm>
-            <a:off x="10634472" y="3557016"/>
-            <a:ext cx="868680" cy="320040"/>
-          </a:xfrm>
-          <a:prstGeom prst="rect">
-            <a:avLst/>
-          </a:prstGeom>
-          <a:noFill/>
-        </p:spPr>
-        <p:txBody>
-          <a:bodyPr wrap="square" lIns="0" rIns="0" tIns="0" bIns="0" anchor="ctr">
-            <a:spAutoFit/>
-          </a:bodyPr>
-          <a:lstStyle/>
-          <a:p>
-            <a:pPr algn="r">
-              <a:spcBef>
-                <a:spcPts val="0"/>
-              </a:spcBef>
-              <a:spcAft>
-                <a:spcPts val="0"/>
-              </a:spcAft>
-            </a:pPr>
-            <a:r>
-              <a:rPr sz="869" b="1">
-                <a:solidFill>
-                  <a:srgbClr val="D85A30"/>
-                </a:solidFill>
-                <a:latin typeface="Noto Sans KR"/>
-                <a:ea typeface="Noto Sans KR"/>
-                <a:cs typeface="Noto Sans KR"/>
-              </a:rPr>
-              <a:t>3</a:t>
-            </a:r>
-          </a:p>
-        </p:txBody>
-      </p:sp>
-      <p:sp>
-        <p:nvSpPr>
-          <p:cNvPr id="47" name="Rectangle 46"/>
+              <a:t>1</a:t>
+            </a:r>
+          </a:p>
+        </p:txBody>
+      </p:sp>
+      <p:sp>
+        <p:nvSpPr>
+          <p:cNvPr id="172" name="Rectangle 171"/>
           <p:cNvSpPr/>
           <p:nvPr/>
         </p:nvSpPr>
         <p:spPr>
           <a:xfrm>
-            <a:off x="658368" y="3895344"/>
-            <a:ext cx="10881360" cy="9144"/>
+            <a:off x="8257031" y="5986826"/>
+            <a:ext cx="3465576" cy="9144"/>
           </a:xfrm>
           <a:prstGeom prst="rect">
             <a:avLst/>
@@ -11473,14 +10609,14 @@
       </p:sp>
       <p:sp>
         <p:nvSpPr>
-          <p:cNvPr id="48" name="TextBox 47"/>
-          <p:cNvSpPr txBox="1"/>
-          <p:nvPr/>
-        </p:nvSpPr>
-        <p:spPr>
-          <a:xfrm>
-            <a:off x="713232" y="3913631"/>
-            <a:ext cx="960120" cy="320040"/>
+          <p:cNvPr id="173" name="TextBox 172"/>
+          <p:cNvSpPr txBox="1"/>
+          <p:nvPr/>
+        </p:nvSpPr>
+        <p:spPr>
+          <a:xfrm>
+            <a:off x="8293607" y="5995970"/>
+            <a:ext cx="530352" cy="221949"/>
           </a:xfrm>
           <a:prstGeom prst="rect">
             <a:avLst/>
@@ -11502,7 +10638,7 @@
               </a:spcAft>
             </a:pPr>
             <a:r>
-              <a:rPr sz="869" b="1">
+              <a:rPr sz="650" b="1">
                 <a:solidFill>
                   <a:srgbClr val="185FA5"/>
                 </a:solidFill>
@@ -11510,21 +10646,21 @@
                 <a:ea typeface="Noto Sans KR"/>
                 <a:cs typeface="Noto Sans KR"/>
               </a:rPr>
-              <a:t>S611</a:t>
-            </a:r>
-          </a:p>
-        </p:txBody>
-      </p:sp>
-      <p:sp>
-        <p:nvSpPr>
-          <p:cNvPr id="49" name="TextBox 48"/>
-          <p:cNvSpPr txBox="1"/>
-          <p:nvPr/>
-        </p:nvSpPr>
-        <p:spPr>
-          <a:xfrm>
-            <a:off x="1673352" y="3913631"/>
-            <a:ext cx="1143000" cy="320040"/>
+              <a:t>S547</a:t>
+            </a:r>
+          </a:p>
+        </p:txBody>
+      </p:sp>
+      <p:sp>
+        <p:nvSpPr>
+          <p:cNvPr id="174" name="TextBox 173"/>
+          <p:cNvSpPr txBox="1"/>
+          <p:nvPr/>
+        </p:nvSpPr>
+        <p:spPr>
+          <a:xfrm>
+            <a:off x="8823959" y="5995970"/>
+            <a:ext cx="530352" cy="221949"/>
           </a:xfrm>
           <a:prstGeom prst="rect">
             <a:avLst/>
@@ -11546,29 +10682,29 @@
               </a:spcAft>
             </a:pPr>
             <a:r>
-              <a:rPr sz="869" b="1">
-                <a:solidFill>
-                  <a:srgbClr val="1D9E75"/>
-                </a:solidFill>
-                <a:latin typeface="Noto Sans KR"/>
-                <a:ea typeface="Noto Sans KR"/>
-                <a:cs typeface="Noto Sans KR"/>
-              </a:rPr>
-              <a:t>요청내</a:t>
-            </a:r>
-          </a:p>
-        </p:txBody>
-      </p:sp>
-      <p:sp>
-        <p:nvSpPr>
-          <p:cNvPr id="50" name="TextBox 49"/>
-          <p:cNvSpPr txBox="1"/>
-          <p:nvPr/>
-        </p:nvSpPr>
-        <p:spPr>
-          <a:xfrm>
-            <a:off x="2816352" y="3913631"/>
-            <a:ext cx="7818120" cy="320040"/>
+              <a:rPr sz="650" b="1">
+                <a:solidFill>
+                  <a:srgbClr val="D85A30"/>
+                </a:solidFill>
+                <a:latin typeface="Noto Sans KR"/>
+                <a:ea typeface="Noto Sans KR"/>
+                <a:cs typeface="Noto Sans KR"/>
+              </a:rPr>
+              <a:t>요청외</a:t>
+            </a:r>
+          </a:p>
+        </p:txBody>
+      </p:sp>
+      <p:sp>
+        <p:nvSpPr>
+          <p:cNvPr id="175" name="TextBox 174"/>
+          <p:cNvSpPr txBox="1"/>
+          <p:nvPr/>
+        </p:nvSpPr>
+        <p:spPr>
+          <a:xfrm>
+            <a:off x="9354311" y="5995970"/>
+            <a:ext cx="1938528" cy="221949"/>
           </a:xfrm>
           <a:prstGeom prst="rect">
             <a:avLst/>
@@ -11590,7 +10726,7 @@
               </a:spcAft>
             </a:pPr>
             <a:r>
-              <a:rPr sz="840" b="0">
+              <a:rPr sz="610" b="0">
                 <a:solidFill>
                   <a:srgbClr val="121A2A"/>
                 </a:solidFill>
@@ -11598,21 +10734,21 @@
                 <a:ea typeface="Noto Sans KR"/>
                 <a:cs typeface="Noto Sans KR"/>
               </a:rPr>
-              <a:t>Clalen O2O2 M_Natural Chocolat EX_2P</a:t>
-            </a:r>
-          </a:p>
-        </p:txBody>
-      </p:sp>
-      <p:sp>
-        <p:nvSpPr>
-          <p:cNvPr id="51" name="TextBox 50"/>
-          <p:cNvSpPr txBox="1"/>
-          <p:nvPr/>
-        </p:nvSpPr>
-        <p:spPr>
-          <a:xfrm>
-            <a:off x="10634472" y="3913631"/>
-            <a:ext cx="868680" cy="320040"/>
+              <a:t>Clalen O2O2 M_2P</a:t>
+            </a:r>
+          </a:p>
+        </p:txBody>
+      </p:sp>
+      <p:sp>
+        <p:nvSpPr>
+          <p:cNvPr id="176" name="TextBox 175"/>
+          <p:cNvSpPr txBox="1"/>
+          <p:nvPr/>
+        </p:nvSpPr>
+        <p:spPr>
+          <a:xfrm>
+            <a:off x="11292839" y="5995970"/>
+            <a:ext cx="347472" cy="221949"/>
           </a:xfrm>
           <a:prstGeom prst="rect">
             <a:avLst/>
@@ -11634,7 +10770,7 @@
               </a:spcAft>
             </a:pPr>
             <a:r>
-              <a:rPr sz="869" b="1">
+              <a:rPr sz="650" b="1">
                 <a:solidFill>
                   <a:srgbClr val="D85A30"/>
                 </a:solidFill>
@@ -11642,21 +10778,21 @@
                 <a:ea typeface="Noto Sans KR"/>
                 <a:cs typeface="Noto Sans KR"/>
               </a:rPr>
-              <a:t>2</a:t>
-            </a:r>
-          </a:p>
-        </p:txBody>
-      </p:sp>
-      <p:sp>
-        <p:nvSpPr>
-          <p:cNvPr id="52" name="Rectangle 51"/>
+              <a:t>1</a:t>
+            </a:r>
+          </a:p>
+        </p:txBody>
+      </p:sp>
+      <p:sp>
+        <p:nvSpPr>
+          <p:cNvPr id="177" name="Rectangle 176"/>
           <p:cNvSpPr/>
           <p:nvPr/>
         </p:nvSpPr>
         <p:spPr>
           <a:xfrm>
-            <a:off x="658368" y="4251959"/>
-            <a:ext cx="10881360" cy="9144"/>
+            <a:off x="8257031" y="6227064"/>
+            <a:ext cx="3465576" cy="9144"/>
           </a:xfrm>
           <a:prstGeom prst="rect">
             <a:avLst/>
@@ -11692,57 +10828,14 @@
       </p:sp>
       <p:sp>
         <p:nvSpPr>
-          <p:cNvPr id="53" name="Rectangle 52"/>
-          <p:cNvSpPr/>
-          <p:nvPr/>
-        </p:nvSpPr>
-        <p:spPr>
-          <a:xfrm>
-            <a:off x="640080" y="4251960"/>
-            <a:ext cx="10917936" cy="356616"/>
-          </a:xfrm>
-          <a:prstGeom prst="rect">
-            <a:avLst/>
-          </a:prstGeom>
-          <a:solidFill>
-            <a:srgbClr val="F8FAFC"/>
-          </a:solidFill>
-          <a:ln>
-            <a:noFill/>
-          </a:ln>
-        </p:spPr>
-        <p:style>
-          <a:lnRef idx="1">
-            <a:schemeClr val="accent1"/>
-          </a:lnRef>
-          <a:fillRef idx="3">
-            <a:schemeClr val="accent1"/>
-          </a:fillRef>
-          <a:effectRef idx="2">
-            <a:schemeClr val="accent1"/>
-          </a:effectRef>
-          <a:fontRef idx="minor">
-            <a:schemeClr val="lt1"/>
-          </a:fontRef>
-        </p:style>
-        <p:txBody>
-          <a:bodyPr rtlCol="0" anchor="ctr"/>
-          <a:lstStyle/>
-          <a:p>
-            <a:pPr algn="ctr"/>
-          </a:p>
-        </p:txBody>
-      </p:sp>
-      <p:sp>
-        <p:nvSpPr>
-          <p:cNvPr id="54" name="TextBox 53"/>
-          <p:cNvSpPr txBox="1"/>
-          <p:nvPr/>
-        </p:nvSpPr>
-        <p:spPr>
-          <a:xfrm>
-            <a:off x="713232" y="4270248"/>
-            <a:ext cx="960120" cy="320040"/>
+          <p:cNvPr id="178" name="TextBox 177"/>
+          <p:cNvSpPr txBox="1"/>
+          <p:nvPr/>
+        </p:nvSpPr>
+        <p:spPr>
+          <a:xfrm>
+            <a:off x="8293607" y="6254496"/>
+            <a:ext cx="3392424" cy="146304"/>
           </a:xfrm>
           <a:prstGeom prst="rect">
             <a:avLst/>
@@ -11764,29 +10857,29 @@
               </a:spcAft>
             </a:pPr>
             <a:r>
-              <a:rPr sz="869" b="1">
-                <a:solidFill>
-                  <a:srgbClr val="185FA5"/>
-                </a:solidFill>
-                <a:latin typeface="Noto Sans KR"/>
-                <a:ea typeface="Noto Sans KR"/>
-                <a:cs typeface="Noto Sans KR"/>
-              </a:rPr>
-              <a:t>S147</a:t>
-            </a:r>
-          </a:p>
-        </p:txBody>
-      </p:sp>
-      <p:sp>
-        <p:nvSpPr>
-          <p:cNvPr id="55" name="TextBox 54"/>
-          <p:cNvSpPr txBox="1"/>
-          <p:nvPr/>
-        </p:nvSpPr>
-        <p:spPr>
-          <a:xfrm>
-            <a:off x="1673352" y="4270248"/>
-            <a:ext cx="1143000" cy="320040"/>
+              <a:rPr sz="590" b="0">
+                <a:solidFill>
+                  <a:srgbClr val="6B7280"/>
+                </a:solidFill>
+                <a:latin typeface="Noto Sans KR"/>
+                <a:ea typeface="Noto Sans KR"/>
+                <a:cs typeface="Noto Sans KR"/>
+              </a:rPr>
+              <a:t>요청외 SKU 포함 시 S코드 전체 요청외</a:t>
+            </a:r>
+          </a:p>
+        </p:txBody>
+      </p:sp>
+      <p:sp>
+        <p:nvSpPr>
+          <p:cNvPr id="179" name="TextBox 178"/>
+          <p:cNvSpPr txBox="1"/>
+          <p:nvPr/>
+        </p:nvSpPr>
+        <p:spPr>
+          <a:xfrm>
+            <a:off x="411480" y="6547104"/>
+            <a:ext cx="11338560" cy="201168"/>
           </a:xfrm>
           <a:prstGeom prst="rect">
             <a:avLst/>
@@ -11808,847 +10901,16 @@
               </a:spcAft>
             </a:pPr>
             <a:r>
-              <a:rPr sz="869" b="1">
-                <a:solidFill>
-                  <a:srgbClr val="1D9E75"/>
-                </a:solidFill>
-                <a:latin typeface="Noto Sans KR"/>
-                <a:ea typeface="Noto Sans KR"/>
-                <a:cs typeface="Noto Sans KR"/>
-              </a:rPr>
-              <a:t>요청내</a:t>
-            </a:r>
-          </a:p>
-        </p:txBody>
-      </p:sp>
-      <p:sp>
-        <p:nvSpPr>
-          <p:cNvPr id="56" name="TextBox 55"/>
-          <p:cNvSpPr txBox="1"/>
-          <p:nvPr/>
-        </p:nvSpPr>
-        <p:spPr>
-          <a:xfrm>
-            <a:off x="2816352" y="4270248"/>
-            <a:ext cx="7818120" cy="320040"/>
-          </a:xfrm>
-          <a:prstGeom prst="rect">
-            <a:avLst/>
-          </a:prstGeom>
-          <a:noFill/>
-        </p:spPr>
-        <p:txBody>
-          <a:bodyPr wrap="square" lIns="0" rIns="0" tIns="0" bIns="0" anchor="ctr">
-            <a:spAutoFit/>
-          </a:bodyPr>
-          <a:lstStyle/>
-          <a:p>
-            <a:pPr algn="l">
-              <a:spcBef>
-                <a:spcPts val="0"/>
-              </a:spcBef>
-              <a:spcAft>
-                <a:spcPts val="0"/>
-              </a:spcAft>
-            </a:pPr>
-            <a:r>
-              <a:rPr sz="840" b="0">
-                <a:solidFill>
-                  <a:srgbClr val="121A2A"/>
-                </a:solidFill>
-                <a:latin typeface="Noto Sans KR"/>
-                <a:ea typeface="Noto Sans KR"/>
-                <a:cs typeface="Noto Sans KR"/>
-              </a:rPr>
-              <a:t>Iris Toric Alicia Brown_30팩</a:t>
-            </a:r>
-          </a:p>
-        </p:txBody>
-      </p:sp>
-      <p:sp>
-        <p:nvSpPr>
-          <p:cNvPr id="57" name="TextBox 56"/>
-          <p:cNvSpPr txBox="1"/>
-          <p:nvPr/>
-        </p:nvSpPr>
-        <p:spPr>
-          <a:xfrm>
-            <a:off x="10634472" y="4270248"/>
-            <a:ext cx="868680" cy="320040"/>
-          </a:xfrm>
-          <a:prstGeom prst="rect">
-            <a:avLst/>
-          </a:prstGeom>
-          <a:noFill/>
-        </p:spPr>
-        <p:txBody>
-          <a:bodyPr wrap="square" lIns="0" rIns="0" tIns="0" bIns="0" anchor="ctr">
-            <a:spAutoFit/>
-          </a:bodyPr>
-          <a:lstStyle/>
-          <a:p>
-            <a:pPr algn="r">
-              <a:spcBef>
-                <a:spcPts val="0"/>
-              </a:spcBef>
-              <a:spcAft>
-                <a:spcPts val="0"/>
-              </a:spcAft>
-            </a:pPr>
-            <a:r>
-              <a:rPr sz="869" b="1">
-                <a:solidFill>
-                  <a:srgbClr val="D85A30"/>
-                </a:solidFill>
-                <a:latin typeface="Noto Sans KR"/>
-                <a:ea typeface="Noto Sans KR"/>
-                <a:cs typeface="Noto Sans KR"/>
-              </a:rPr>
-              <a:t>1</a:t>
-            </a:r>
-          </a:p>
-        </p:txBody>
-      </p:sp>
-      <p:sp>
-        <p:nvSpPr>
-          <p:cNvPr id="58" name="Rectangle 57"/>
-          <p:cNvSpPr/>
-          <p:nvPr/>
-        </p:nvSpPr>
-        <p:spPr>
-          <a:xfrm>
-            <a:off x="658368" y="4608576"/>
-            <a:ext cx="10881360" cy="9144"/>
-          </a:xfrm>
-          <a:prstGeom prst="rect">
-            <a:avLst/>
-          </a:prstGeom>
-          <a:solidFill>
-            <a:srgbClr val="F1F4F8"/>
-          </a:solidFill>
-          <a:ln>
-            <a:noFill/>
-          </a:ln>
-        </p:spPr>
-        <p:style>
-          <a:lnRef idx="1">
-            <a:schemeClr val="accent1"/>
-          </a:lnRef>
-          <a:fillRef idx="3">
-            <a:schemeClr val="accent1"/>
-          </a:fillRef>
-          <a:effectRef idx="2">
-            <a:schemeClr val="accent1"/>
-          </a:effectRef>
-          <a:fontRef idx="minor">
-            <a:schemeClr val="lt1"/>
-          </a:fontRef>
-        </p:style>
-        <p:txBody>
-          <a:bodyPr rtlCol="0" anchor="ctr"/>
-          <a:lstStyle/>
-          <a:p>
-            <a:pPr algn="ctr"/>
-          </a:p>
-        </p:txBody>
-      </p:sp>
-      <p:sp>
-        <p:nvSpPr>
-          <p:cNvPr id="59" name="TextBox 58"/>
-          <p:cNvSpPr txBox="1"/>
-          <p:nvPr/>
-        </p:nvSpPr>
-        <p:spPr>
-          <a:xfrm>
-            <a:off x="713232" y="4626864"/>
-            <a:ext cx="960120" cy="320040"/>
-          </a:xfrm>
-          <a:prstGeom prst="rect">
-            <a:avLst/>
-          </a:prstGeom>
-          <a:noFill/>
-        </p:spPr>
-        <p:txBody>
-          <a:bodyPr wrap="square" lIns="0" rIns="0" tIns="0" bIns="0" anchor="ctr">
-            <a:spAutoFit/>
-          </a:bodyPr>
-          <a:lstStyle/>
-          <a:p>
-            <a:pPr algn="l">
-              <a:spcBef>
-                <a:spcPts val="0"/>
-              </a:spcBef>
-              <a:spcAft>
-                <a:spcPts val="0"/>
-              </a:spcAft>
-            </a:pPr>
-            <a:r>
-              <a:rPr sz="869" b="1">
-                <a:solidFill>
-                  <a:srgbClr val="185FA5"/>
-                </a:solidFill>
-                <a:latin typeface="Noto Sans KR"/>
-                <a:ea typeface="Noto Sans KR"/>
-                <a:cs typeface="Noto Sans KR"/>
-              </a:rPr>
-              <a:t>S162</a:t>
-            </a:r>
-          </a:p>
-        </p:txBody>
-      </p:sp>
-      <p:sp>
-        <p:nvSpPr>
-          <p:cNvPr id="60" name="TextBox 59"/>
-          <p:cNvSpPr txBox="1"/>
-          <p:nvPr/>
-        </p:nvSpPr>
-        <p:spPr>
-          <a:xfrm>
-            <a:off x="1673352" y="4626864"/>
-            <a:ext cx="1143000" cy="320040"/>
-          </a:xfrm>
-          <a:prstGeom prst="rect">
-            <a:avLst/>
-          </a:prstGeom>
-          <a:noFill/>
-        </p:spPr>
-        <p:txBody>
-          <a:bodyPr wrap="square" lIns="0" rIns="0" tIns="0" bIns="0" anchor="ctr">
-            <a:spAutoFit/>
-          </a:bodyPr>
-          <a:lstStyle/>
-          <a:p>
-            <a:pPr algn="l">
-              <a:spcBef>
-                <a:spcPts val="0"/>
-              </a:spcBef>
-              <a:spcAft>
-                <a:spcPts val="0"/>
-              </a:spcAft>
-            </a:pPr>
-            <a:r>
-              <a:rPr sz="869" b="1">
-                <a:solidFill>
-                  <a:srgbClr val="D85A30"/>
-                </a:solidFill>
-                <a:latin typeface="Noto Sans KR"/>
-                <a:ea typeface="Noto Sans KR"/>
-                <a:cs typeface="Noto Sans KR"/>
-              </a:rPr>
-              <a:t>요청외</a:t>
-            </a:r>
-          </a:p>
-        </p:txBody>
-      </p:sp>
-      <p:sp>
-        <p:nvSpPr>
-          <p:cNvPr id="61" name="TextBox 60"/>
-          <p:cNvSpPr txBox="1"/>
-          <p:nvPr/>
-        </p:nvSpPr>
-        <p:spPr>
-          <a:xfrm>
-            <a:off x="2816352" y="4626864"/>
-            <a:ext cx="7818120" cy="320040"/>
-          </a:xfrm>
-          <a:prstGeom prst="rect">
-            <a:avLst/>
-          </a:prstGeom>
-          <a:noFill/>
-        </p:spPr>
-        <p:txBody>
-          <a:bodyPr wrap="square" lIns="0" rIns="0" tIns="0" bIns="0" anchor="ctr">
-            <a:spAutoFit/>
-          </a:bodyPr>
-          <a:lstStyle/>
-          <a:p>
-            <a:pPr algn="l">
-              <a:spcBef>
-                <a:spcPts val="0"/>
-              </a:spcBef>
-              <a:spcAft>
-                <a:spcPts val="0"/>
-              </a:spcAft>
-            </a:pPr>
-            <a:r>
-              <a:rPr sz="840" b="0">
-                <a:solidFill>
-                  <a:srgbClr val="121A2A"/>
-                </a:solidFill>
-                <a:latin typeface="Noto Sans KR"/>
-                <a:ea typeface="Noto Sans KR"/>
-                <a:cs typeface="Noto Sans KR"/>
-              </a:rPr>
-              <a:t>Iris BlueMoon_40팩</a:t>
-            </a:r>
-          </a:p>
-        </p:txBody>
-      </p:sp>
-      <p:sp>
-        <p:nvSpPr>
-          <p:cNvPr id="62" name="TextBox 61"/>
-          <p:cNvSpPr txBox="1"/>
-          <p:nvPr/>
-        </p:nvSpPr>
-        <p:spPr>
-          <a:xfrm>
-            <a:off x="10634472" y="4626864"/>
-            <a:ext cx="868680" cy="320040"/>
-          </a:xfrm>
-          <a:prstGeom prst="rect">
-            <a:avLst/>
-          </a:prstGeom>
-          <a:noFill/>
-        </p:spPr>
-        <p:txBody>
-          <a:bodyPr wrap="square" lIns="0" rIns="0" tIns="0" bIns="0" anchor="ctr">
-            <a:spAutoFit/>
-          </a:bodyPr>
-          <a:lstStyle/>
-          <a:p>
-            <a:pPr algn="r">
-              <a:spcBef>
-                <a:spcPts val="0"/>
-              </a:spcBef>
-              <a:spcAft>
-                <a:spcPts val="0"/>
-              </a:spcAft>
-            </a:pPr>
-            <a:r>
-              <a:rPr sz="869" b="1">
-                <a:solidFill>
-                  <a:srgbClr val="D85A30"/>
-                </a:solidFill>
-                <a:latin typeface="Noto Sans KR"/>
-                <a:ea typeface="Noto Sans KR"/>
-                <a:cs typeface="Noto Sans KR"/>
-              </a:rPr>
-              <a:t>1</a:t>
-            </a:r>
-          </a:p>
-        </p:txBody>
-      </p:sp>
-      <p:sp>
-        <p:nvSpPr>
-          <p:cNvPr id="63" name="Rectangle 62"/>
-          <p:cNvSpPr/>
-          <p:nvPr/>
-        </p:nvSpPr>
-        <p:spPr>
-          <a:xfrm>
-            <a:off x="658368" y="4965192"/>
-            <a:ext cx="10881360" cy="9144"/>
-          </a:xfrm>
-          <a:prstGeom prst="rect">
-            <a:avLst/>
-          </a:prstGeom>
-          <a:solidFill>
-            <a:srgbClr val="F1F4F8"/>
-          </a:solidFill>
-          <a:ln>
-            <a:noFill/>
-          </a:ln>
-        </p:spPr>
-        <p:style>
-          <a:lnRef idx="1">
-            <a:schemeClr val="accent1"/>
-          </a:lnRef>
-          <a:fillRef idx="3">
-            <a:schemeClr val="accent1"/>
-          </a:fillRef>
-          <a:effectRef idx="2">
-            <a:schemeClr val="accent1"/>
-          </a:effectRef>
-          <a:fontRef idx="minor">
-            <a:schemeClr val="lt1"/>
-          </a:fontRef>
-        </p:style>
-        <p:txBody>
-          <a:bodyPr rtlCol="0" anchor="ctr"/>
-          <a:lstStyle/>
-          <a:p>
-            <a:pPr algn="ctr"/>
-          </a:p>
-        </p:txBody>
-      </p:sp>
-      <p:sp>
-        <p:nvSpPr>
-          <p:cNvPr id="64" name="Rectangle 63"/>
-          <p:cNvSpPr/>
-          <p:nvPr/>
-        </p:nvSpPr>
-        <p:spPr>
-          <a:xfrm>
-            <a:off x="640080" y="4965192"/>
-            <a:ext cx="10917936" cy="356616"/>
-          </a:xfrm>
-          <a:prstGeom prst="rect">
-            <a:avLst/>
-          </a:prstGeom>
-          <a:solidFill>
-            <a:srgbClr val="F8FAFC"/>
-          </a:solidFill>
-          <a:ln>
-            <a:noFill/>
-          </a:ln>
-        </p:spPr>
-        <p:style>
-          <a:lnRef idx="1">
-            <a:schemeClr val="accent1"/>
-          </a:lnRef>
-          <a:fillRef idx="3">
-            <a:schemeClr val="accent1"/>
-          </a:fillRef>
-          <a:effectRef idx="2">
-            <a:schemeClr val="accent1"/>
-          </a:effectRef>
-          <a:fontRef idx="minor">
-            <a:schemeClr val="lt1"/>
-          </a:fontRef>
-        </p:style>
-        <p:txBody>
-          <a:bodyPr rtlCol="0" anchor="ctr"/>
-          <a:lstStyle/>
-          <a:p>
-            <a:pPr algn="ctr"/>
-          </a:p>
-        </p:txBody>
-      </p:sp>
-      <p:sp>
-        <p:nvSpPr>
-          <p:cNvPr id="65" name="TextBox 64"/>
-          <p:cNvSpPr txBox="1"/>
-          <p:nvPr/>
-        </p:nvSpPr>
-        <p:spPr>
-          <a:xfrm>
-            <a:off x="713232" y="4983479"/>
-            <a:ext cx="960120" cy="320040"/>
-          </a:xfrm>
-          <a:prstGeom prst="rect">
-            <a:avLst/>
-          </a:prstGeom>
-          <a:noFill/>
-        </p:spPr>
-        <p:txBody>
-          <a:bodyPr wrap="square" lIns="0" rIns="0" tIns="0" bIns="0" anchor="ctr">
-            <a:spAutoFit/>
-          </a:bodyPr>
-          <a:lstStyle/>
-          <a:p>
-            <a:pPr algn="l">
-              <a:spcBef>
-                <a:spcPts val="0"/>
-              </a:spcBef>
-              <a:spcAft>
-                <a:spcPts val="0"/>
-              </a:spcAft>
-            </a:pPr>
-            <a:r>
-              <a:rPr sz="869" b="1">
-                <a:solidFill>
-                  <a:srgbClr val="185FA5"/>
-                </a:solidFill>
-                <a:latin typeface="Noto Sans KR"/>
-                <a:ea typeface="Noto Sans KR"/>
-                <a:cs typeface="Noto Sans KR"/>
-              </a:rPr>
-              <a:t>S318</a:t>
-            </a:r>
-          </a:p>
-        </p:txBody>
-      </p:sp>
-      <p:sp>
-        <p:nvSpPr>
-          <p:cNvPr id="66" name="TextBox 65"/>
-          <p:cNvSpPr txBox="1"/>
-          <p:nvPr/>
-        </p:nvSpPr>
-        <p:spPr>
-          <a:xfrm>
-            <a:off x="1673352" y="4983479"/>
-            <a:ext cx="1143000" cy="320040"/>
-          </a:xfrm>
-          <a:prstGeom prst="rect">
-            <a:avLst/>
-          </a:prstGeom>
-          <a:noFill/>
-        </p:spPr>
-        <p:txBody>
-          <a:bodyPr wrap="square" lIns="0" rIns="0" tIns="0" bIns="0" anchor="ctr">
-            <a:spAutoFit/>
-          </a:bodyPr>
-          <a:lstStyle/>
-          <a:p>
-            <a:pPr algn="l">
-              <a:spcBef>
-                <a:spcPts val="0"/>
-              </a:spcBef>
-              <a:spcAft>
-                <a:spcPts val="0"/>
-              </a:spcAft>
-            </a:pPr>
-            <a:r>
-              <a:rPr sz="869" b="1">
-                <a:solidFill>
-                  <a:srgbClr val="1D9E75"/>
-                </a:solidFill>
-                <a:latin typeface="Noto Sans KR"/>
-                <a:ea typeface="Noto Sans KR"/>
-                <a:cs typeface="Noto Sans KR"/>
-              </a:rPr>
-              <a:t>요청내</a:t>
-            </a:r>
-          </a:p>
-        </p:txBody>
-      </p:sp>
-      <p:sp>
-        <p:nvSpPr>
-          <p:cNvPr id="67" name="TextBox 66"/>
-          <p:cNvSpPr txBox="1"/>
-          <p:nvPr/>
-        </p:nvSpPr>
-        <p:spPr>
-          <a:xfrm>
-            <a:off x="2816352" y="4983479"/>
-            <a:ext cx="7818120" cy="320040"/>
-          </a:xfrm>
-          <a:prstGeom prst="rect">
-            <a:avLst/>
-          </a:prstGeom>
-          <a:noFill/>
-        </p:spPr>
-        <p:txBody>
-          <a:bodyPr wrap="square" lIns="0" rIns="0" tIns="0" bIns="0" anchor="ctr">
-            <a:spAutoFit/>
-          </a:bodyPr>
-          <a:lstStyle/>
-          <a:p>
-            <a:pPr algn="l">
-              <a:spcBef>
-                <a:spcPts val="0"/>
-              </a:spcBef>
-              <a:spcAft>
-                <a:spcPts val="0"/>
-              </a:spcAft>
-            </a:pPr>
-            <a:r>
-              <a:rPr sz="840" b="0">
-                <a:solidFill>
-                  <a:srgbClr val="121A2A"/>
-                </a:solidFill>
-                <a:latin typeface="Noto Sans KR"/>
-                <a:ea typeface="Noto Sans KR"/>
-                <a:cs typeface="Noto Sans KR"/>
-              </a:rPr>
-              <a:t>Clalen O2O2 M_Micelia_Deep Black_45%_2P</a:t>
-            </a:r>
-          </a:p>
-        </p:txBody>
-      </p:sp>
-      <p:sp>
-        <p:nvSpPr>
-          <p:cNvPr id="68" name="TextBox 67"/>
-          <p:cNvSpPr txBox="1"/>
-          <p:nvPr/>
-        </p:nvSpPr>
-        <p:spPr>
-          <a:xfrm>
-            <a:off x="10634472" y="4983479"/>
-            <a:ext cx="868680" cy="320040"/>
-          </a:xfrm>
-          <a:prstGeom prst="rect">
-            <a:avLst/>
-          </a:prstGeom>
-          <a:noFill/>
-        </p:spPr>
-        <p:txBody>
-          <a:bodyPr wrap="square" lIns="0" rIns="0" tIns="0" bIns="0" anchor="ctr">
-            <a:spAutoFit/>
-          </a:bodyPr>
-          <a:lstStyle/>
-          <a:p>
-            <a:pPr algn="r">
-              <a:spcBef>
-                <a:spcPts val="0"/>
-              </a:spcBef>
-              <a:spcAft>
-                <a:spcPts val="0"/>
-              </a:spcAft>
-            </a:pPr>
-            <a:r>
-              <a:rPr sz="869" b="1">
-                <a:solidFill>
-                  <a:srgbClr val="D85A30"/>
-                </a:solidFill>
-                <a:latin typeface="Noto Sans KR"/>
-                <a:ea typeface="Noto Sans KR"/>
-                <a:cs typeface="Noto Sans KR"/>
-              </a:rPr>
-              <a:t>1</a:t>
-            </a:r>
-          </a:p>
-        </p:txBody>
-      </p:sp>
-      <p:sp>
-        <p:nvSpPr>
-          <p:cNvPr id="69" name="Rectangle 68"/>
-          <p:cNvSpPr/>
-          <p:nvPr/>
-        </p:nvSpPr>
-        <p:spPr>
-          <a:xfrm>
-            <a:off x="658368" y="5321807"/>
-            <a:ext cx="10881360" cy="9144"/>
-          </a:xfrm>
-          <a:prstGeom prst="rect">
-            <a:avLst/>
-          </a:prstGeom>
-          <a:solidFill>
-            <a:srgbClr val="F1F4F8"/>
-          </a:solidFill>
-          <a:ln>
-            <a:noFill/>
-          </a:ln>
-        </p:spPr>
-        <p:style>
-          <a:lnRef idx="1">
-            <a:schemeClr val="accent1"/>
-          </a:lnRef>
-          <a:fillRef idx="3">
-            <a:schemeClr val="accent1"/>
-          </a:fillRef>
-          <a:effectRef idx="2">
-            <a:schemeClr val="accent1"/>
-          </a:effectRef>
-          <a:fontRef idx="minor">
-            <a:schemeClr val="lt1"/>
-          </a:fontRef>
-        </p:style>
-        <p:txBody>
-          <a:bodyPr rtlCol="0" anchor="ctr"/>
-          <a:lstStyle/>
-          <a:p>
-            <a:pPr algn="ctr"/>
-          </a:p>
-        </p:txBody>
-      </p:sp>
-      <p:sp>
-        <p:nvSpPr>
-          <p:cNvPr id="70" name="TextBox 69"/>
-          <p:cNvSpPr txBox="1"/>
-          <p:nvPr/>
-        </p:nvSpPr>
-        <p:spPr>
-          <a:xfrm>
-            <a:off x="713232" y="5340096"/>
-            <a:ext cx="960120" cy="320040"/>
-          </a:xfrm>
-          <a:prstGeom prst="rect">
-            <a:avLst/>
-          </a:prstGeom>
-          <a:noFill/>
-        </p:spPr>
-        <p:txBody>
-          <a:bodyPr wrap="square" lIns="0" rIns="0" tIns="0" bIns="0" anchor="ctr">
-            <a:spAutoFit/>
-          </a:bodyPr>
-          <a:lstStyle/>
-          <a:p>
-            <a:pPr algn="l">
-              <a:spcBef>
-                <a:spcPts val="0"/>
-              </a:spcBef>
-              <a:spcAft>
-                <a:spcPts val="0"/>
-              </a:spcAft>
-            </a:pPr>
-            <a:r>
-              <a:rPr sz="869" b="1">
-                <a:solidFill>
-                  <a:srgbClr val="185FA5"/>
-                </a:solidFill>
-                <a:latin typeface="Noto Sans KR"/>
-                <a:ea typeface="Noto Sans KR"/>
-                <a:cs typeface="Noto Sans KR"/>
-              </a:rPr>
-              <a:t>S547</a:t>
-            </a:r>
-          </a:p>
-        </p:txBody>
-      </p:sp>
-      <p:sp>
-        <p:nvSpPr>
-          <p:cNvPr id="71" name="TextBox 70"/>
-          <p:cNvSpPr txBox="1"/>
-          <p:nvPr/>
-        </p:nvSpPr>
-        <p:spPr>
-          <a:xfrm>
-            <a:off x="1673352" y="5340096"/>
-            <a:ext cx="1143000" cy="320040"/>
-          </a:xfrm>
-          <a:prstGeom prst="rect">
-            <a:avLst/>
-          </a:prstGeom>
-          <a:noFill/>
-        </p:spPr>
-        <p:txBody>
-          <a:bodyPr wrap="square" lIns="0" rIns="0" tIns="0" bIns="0" anchor="ctr">
-            <a:spAutoFit/>
-          </a:bodyPr>
-          <a:lstStyle/>
-          <a:p>
-            <a:pPr algn="l">
-              <a:spcBef>
-                <a:spcPts val="0"/>
-              </a:spcBef>
-              <a:spcAft>
-                <a:spcPts val="0"/>
-              </a:spcAft>
-            </a:pPr>
-            <a:r>
-              <a:rPr sz="869" b="1">
-                <a:solidFill>
-                  <a:srgbClr val="D85A30"/>
-                </a:solidFill>
-                <a:latin typeface="Noto Sans KR"/>
-                <a:ea typeface="Noto Sans KR"/>
-                <a:cs typeface="Noto Sans KR"/>
-              </a:rPr>
-              <a:t>요청외</a:t>
-            </a:r>
-          </a:p>
-        </p:txBody>
-      </p:sp>
-      <p:sp>
-        <p:nvSpPr>
-          <p:cNvPr id="72" name="TextBox 71"/>
-          <p:cNvSpPr txBox="1"/>
-          <p:nvPr/>
-        </p:nvSpPr>
-        <p:spPr>
-          <a:xfrm>
-            <a:off x="2816352" y="5340096"/>
-            <a:ext cx="7818120" cy="320040"/>
-          </a:xfrm>
-          <a:prstGeom prst="rect">
-            <a:avLst/>
-          </a:prstGeom>
-          <a:noFill/>
-        </p:spPr>
-        <p:txBody>
-          <a:bodyPr wrap="square" lIns="0" rIns="0" tIns="0" bIns="0" anchor="ctr">
-            <a:spAutoFit/>
-          </a:bodyPr>
-          <a:lstStyle/>
-          <a:p>
-            <a:pPr algn="l">
-              <a:spcBef>
-                <a:spcPts val="0"/>
-              </a:spcBef>
-              <a:spcAft>
-                <a:spcPts val="0"/>
-              </a:spcAft>
-            </a:pPr>
-            <a:r>
-              <a:rPr sz="840" b="0">
-                <a:solidFill>
-                  <a:srgbClr val="121A2A"/>
-                </a:solidFill>
-                <a:latin typeface="Noto Sans KR"/>
-                <a:ea typeface="Noto Sans KR"/>
-                <a:cs typeface="Noto Sans KR"/>
-              </a:rPr>
-              <a:t>Clalen O2O2 M_2P</a:t>
-            </a:r>
-          </a:p>
-        </p:txBody>
-      </p:sp>
-      <p:sp>
-        <p:nvSpPr>
-          <p:cNvPr id="73" name="TextBox 72"/>
-          <p:cNvSpPr txBox="1"/>
-          <p:nvPr/>
-        </p:nvSpPr>
-        <p:spPr>
-          <a:xfrm>
-            <a:off x="10634472" y="5340096"/>
-            <a:ext cx="868680" cy="320040"/>
-          </a:xfrm>
-          <a:prstGeom prst="rect">
-            <a:avLst/>
-          </a:prstGeom>
-          <a:noFill/>
-        </p:spPr>
-        <p:txBody>
-          <a:bodyPr wrap="square" lIns="0" rIns="0" tIns="0" bIns="0" anchor="ctr">
-            <a:spAutoFit/>
-          </a:bodyPr>
-          <a:lstStyle/>
-          <a:p>
-            <a:pPr algn="r">
-              <a:spcBef>
-                <a:spcPts val="0"/>
-              </a:spcBef>
-              <a:spcAft>
-                <a:spcPts val="0"/>
-              </a:spcAft>
-            </a:pPr>
-            <a:r>
-              <a:rPr sz="869" b="1">
-                <a:solidFill>
-                  <a:srgbClr val="D85A30"/>
-                </a:solidFill>
-                <a:latin typeface="Noto Sans KR"/>
-                <a:ea typeface="Noto Sans KR"/>
-                <a:cs typeface="Noto Sans KR"/>
-              </a:rPr>
-              <a:t>1</a:t>
-            </a:r>
-          </a:p>
-        </p:txBody>
-      </p:sp>
-      <p:sp>
-        <p:nvSpPr>
-          <p:cNvPr id="74" name="Rectangle 73"/>
-          <p:cNvSpPr/>
-          <p:nvPr/>
-        </p:nvSpPr>
-        <p:spPr>
-          <a:xfrm>
-            <a:off x="658368" y="5678424"/>
-            <a:ext cx="10881360" cy="9144"/>
-          </a:xfrm>
-          <a:prstGeom prst="rect">
-            <a:avLst/>
-          </a:prstGeom>
-          <a:solidFill>
-            <a:srgbClr val="F1F4F8"/>
-          </a:solidFill>
-          <a:ln>
-            <a:noFill/>
-          </a:ln>
-        </p:spPr>
-        <p:style>
-          <a:lnRef idx="1">
-            <a:schemeClr val="accent1"/>
-          </a:lnRef>
-          <a:fillRef idx="3">
-            <a:schemeClr val="accent1"/>
-          </a:fillRef>
-          <a:effectRef idx="2">
-            <a:schemeClr val="accent1"/>
-          </a:effectRef>
-          <a:fontRef idx="minor">
-            <a:schemeClr val="lt1"/>
-          </a:fontRef>
-        </p:style>
-        <p:txBody>
-          <a:bodyPr rtlCol="0" anchor="ctr"/>
-          <a:lstStyle/>
-          <a:p>
-            <a:pPr algn="ctr"/>
+              <a:rPr sz="750" b="0">
+                <a:solidFill>
+                  <a:srgbClr val="6B7280"/>
+                </a:solidFill>
+                <a:latin typeface="Noto Sans KR"/>
+                <a:ea typeface="Noto Sans KR"/>
+                <a:cs typeface="Noto Sans KR"/>
+              </a:rPr>
+              <a:t>진도율은 생산요청 기준이며, 요청/긴급 대응 품목은 일일 재고표 기준으로 산출됩니다.</a:t>
+            </a:r>
           </a:p>
         </p:txBody>
       </p:sp>
